--- a/MaNu-PRO-Propuesta-Javier.pptx
+++ b/MaNu-PRO-Propuesta-Javier.pptx
@@ -4,6 +4,9 @@
   <p:sldMasterIdLst>
     <p:sldMasterId id="2147483648" r:id="rId1"/>
   </p:sldMasterIdLst>
+  <p:notesMasterIdLst>
+    <p:notesMasterId r:id="rId13"/>
+  </p:notesMasterIdLst>
   <p:sldIdLst>
     <p:sldId id="256" r:id="rId2"/>
     <p:sldId id="257" r:id="rId3"/>
@@ -17,9 +20,6 @@
     <p:sldId id="265" r:id="rId11"/>
     <p:sldId id="266" r:id="rId12"/>
   </p:sldIdLst>
-  <p:notesMasterIdLst>
-    <p:notesMasterId r:id="rId13"/>
-  </p:notesMasterIdLst>
   <p:sldSz cx="12192000" cy="6858000"/>
   <p:notesSz cx="6858000" cy="12192000"/>
   <p:defaultTextStyle>
@@ -114,6 +114,11 @@
       </a:defRPr>
     </a:lvl9pPr>
   </p:defaultTextStyle>
+  <p:extLst>
+    <p:ext uri="{EFAFB233-063F-42B5-8137-9DF3F51BA10A}">
+      <p15:sldGuideLst xmlns:p15="http://schemas.microsoft.com/office/powerpoint/2012/main"/>
+    </p:ext>
+  </p:extLst>
 </p:presentation>
 </file>
 
@@ -139,234 +144,10 @@
           <a:chExt cx="0" cy="0"/>
         </a:xfrm>
       </p:grpSpPr>
-      <p:sp>
-        <p:nvSpPr>
-          <p:cNvPr id="2" name="Header Placeholder 1"/>
-          <p:cNvSpPr>
-            <a:spLocks noGrp="1"/>
-          </p:cNvSpPr>
-          <p:nvPr>
-            <p:ph type="hdr" sz="quarter"/>
-          </p:nvPr>
-        </p:nvSpPr>
-        <p:spPr>
-          <a:xfrm>
-            <a:off x="0" y="0"/>
-            <a:ext cx="2971800" cy="458788"/>
-          </a:xfrm>
-          <a:prstGeom prst="rect">
-            <a:avLst/>
-          </a:prstGeom>
-        </p:spPr>
-        <p:txBody>
-          <a:bodyPr vert="horz" lIns="91440" tIns="45720" rIns="91440" bIns="45720" rtlCol="0"/>
-          <a:lstStyle>
-            <a:lvl1pPr algn="l">
-              <a:defRPr sz="1200"/>
-            </a:lvl1pPr>
-          </a:lstStyle>
-          <a:p>
-            <a:endParaRPr lang="en-US"/>
-          </a:p>
-        </p:txBody>
-      </p:sp>
-      <p:sp>
-        <p:nvSpPr>
-          <p:cNvPr id="3" name="Date Placeholder 2"/>
-          <p:cNvSpPr>
-            <a:spLocks noGrp="1"/>
-          </p:cNvSpPr>
-          <p:nvPr>
-            <p:ph type="dt" idx="1"/>
-          </p:nvPr>
-        </p:nvSpPr>
-        <p:spPr>
-          <a:xfrm>
-            <a:off x="3884613" y="0"/>
-            <a:ext cx="2971800" cy="458788"/>
-          </a:xfrm>
-          <a:prstGeom prst="rect">
-            <a:avLst/>
-          </a:prstGeom>
-        </p:spPr>
-        <p:txBody>
-          <a:bodyPr vert="horz" lIns="91440" tIns="45720" rIns="91440" bIns="45720" rtlCol="0"/>
-          <a:lstStyle>
-            <a:lvl1pPr algn="r">
-              <a:defRPr sz="1200"/>
-            </a:lvl1pPr>
-          </a:lstStyle>
-          <a:p>
-            <a:fld id="{5282F153-3F37-0F45-9E97-73ACFA13230C}" type="datetimeFigureOut">
-              <a:rPr lang="en-US"/>
-              <a:t>7/23/19</a:t>
-            </a:fld>
-            <a:endParaRPr lang="en-US"/>
-          </a:p>
-        </p:txBody>
-      </p:sp>
-      <p:sp>
-        <p:nvSpPr>
-          <p:cNvPr id="4" name="Slide Image Placeholder 3"/>
-          <p:cNvSpPr>
-            <a:spLocks noGrp="1" noRot="1" noChangeAspect="1"/>
-          </p:cNvSpPr>
-          <p:nvPr>
-            <p:ph type="sldImg" idx="2"/>
-          </p:nvPr>
-        </p:nvSpPr>
-        <p:spPr>
-          <a:xfrm>
-            <a:off x="685800" y="1143000"/>
-            <a:ext cx="5486400" cy="3086100"/>
-          </a:xfrm>
-          <a:prstGeom prst="rect">
-            <a:avLst/>
-          </a:prstGeom>
-          <a:noFill/>
-          <a:ln w="12700">
-            <a:solidFill>
-              <a:prstClr val="black"/>
-            </a:solidFill>
-          </a:ln>
-        </p:spPr>
-        <p:txBody>
-          <a:bodyPr vert="horz" lIns="91440" tIns="45720" rIns="91440" bIns="45720" rtlCol="0" anchor="ctr"/>
-          <a:lstStyle/>
-          <a:p>
-            <a:endParaRPr lang="en-US"/>
-          </a:p>
-        </p:txBody>
-      </p:sp>
-      <p:sp>
-        <p:nvSpPr>
-          <p:cNvPr id="5" name="Notes Placeholder 4"/>
-          <p:cNvSpPr>
-            <a:spLocks noGrp="1"/>
-          </p:cNvSpPr>
-          <p:nvPr>
-            <p:ph type="body" sz="quarter" idx="3"/>
-          </p:nvPr>
-        </p:nvSpPr>
-        <p:spPr>
-          <a:xfrm>
-            <a:off x="685800" y="4400550"/>
-            <a:ext cx="5486400" cy="3600450"/>
-          </a:xfrm>
-          <a:prstGeom prst="rect">
-            <a:avLst/>
-          </a:prstGeom>
-        </p:spPr>
-        <p:txBody>
-          <a:bodyPr vert="horz" lIns="91440" tIns="45720" rIns="91440" bIns="45720" rtlCol="0"/>
-          <a:lstStyle/>
-          <a:p>
-            <a:pPr lvl="0"/>
-            <a:r>
-              <a:rPr lang="en-US"/>
-              <a:t>Click to edit Master text styles</a:t>
-            </a:r>
-          </a:p>
-          <a:p>
-            <a:pPr lvl="1"/>
-            <a:r>
-              <a:rPr lang="en-US"/>
-              <a:t>Second level</a:t>
-            </a:r>
-          </a:p>
-          <a:p>
-            <a:pPr lvl="2"/>
-            <a:r>
-              <a:rPr lang="en-US"/>
-              <a:t>Third level</a:t>
-            </a:r>
-          </a:p>
-          <a:p>
-            <a:pPr lvl="3"/>
-            <a:r>
-              <a:rPr lang="en-US"/>
-              <a:t>Fourth level</a:t>
-            </a:r>
-          </a:p>
-          <a:p>
-            <a:pPr lvl="4"/>
-            <a:r>
-              <a:rPr lang="en-US"/>
-              <a:t>Fifth level</a:t>
-            </a:r>
-          </a:p>
-        </p:txBody>
-      </p:sp>
-      <p:sp>
-        <p:nvSpPr>
-          <p:cNvPr id="6" name="Footer Placeholder 5"/>
-          <p:cNvSpPr>
-            <a:spLocks noGrp="1"/>
-          </p:cNvSpPr>
-          <p:nvPr>
-            <p:ph type="ftr" sz="quarter" idx="4"/>
-          </p:nvPr>
-        </p:nvSpPr>
-        <p:spPr>
-          <a:xfrm>
-            <a:off x="0" y="8685213"/>
-            <a:ext cx="2971800" cy="458787"/>
-          </a:xfrm>
-          <a:prstGeom prst="rect">
-            <a:avLst/>
-          </a:prstGeom>
-        </p:spPr>
-        <p:txBody>
-          <a:bodyPr vert="horz" lIns="91440" tIns="45720" rIns="91440" bIns="45720" rtlCol="0" anchor="b"/>
-          <a:lstStyle>
-            <a:lvl1pPr algn="l">
-              <a:defRPr sz="1200"/>
-            </a:lvl1pPr>
-          </a:lstStyle>
-          <a:p>
-            <a:endParaRPr lang="en-US"/>
-          </a:p>
-        </p:txBody>
-      </p:sp>
-      <p:sp>
-        <p:nvSpPr>
-          <p:cNvPr id="7" name="Slide Number Placeholder 6"/>
-          <p:cNvSpPr>
-            <a:spLocks noGrp="1"/>
-          </p:cNvSpPr>
-          <p:nvPr>
-            <p:ph type="sldNum" sz="quarter" idx="5"/>
-          </p:nvPr>
-        </p:nvSpPr>
-        <p:spPr>
-          <a:xfrm>
-            <a:off x="3884613" y="8685213"/>
-            <a:ext cx="2971800" cy="458787"/>
-          </a:xfrm>
-          <a:prstGeom prst="rect">
-            <a:avLst/>
-          </a:prstGeom>
-        </p:spPr>
-        <p:txBody>
-          <a:bodyPr vert="horz" lIns="91440" tIns="45720" rIns="91440" bIns="45720" rtlCol="0" anchor="b"/>
-          <a:lstStyle>
-            <a:lvl1pPr algn="r">
-              <a:defRPr sz="1200"/>
-            </a:lvl1pPr>
-          </a:lstStyle>
-          <a:p>
-            <a:fld id="{CE5E9CC1-C706-0F49-92D6-E571CC5EEA8F}" type="slidenum">
-              <a:rPr lang="en-US"/>
-              <a:t>‹#›</a:t>
-            </a:fld>
-            <a:endParaRPr lang="en-US"/>
-          </a:p>
-        </p:txBody>
-      </p:sp>
     </p:spTree>
     <p:extLst>
       <p:ext uri="{BB962C8B-B14F-4D97-AF65-F5344CB8AC3E}">
-        <p14:creationId xmlns:p14="http://schemas.microsoft.com/office/powerpoint/2010/main" val="1024086991"/>
+        <p14:creationId xmlns:p14="http://schemas.microsoft.com/office/powerpoint/2010/main" val="3384819635"/>
       </p:ext>
     </p:extLst>
   </p:cSld>
@@ -514,7 +295,6 @@
               <a:rPr lang="en-US" dirty="0"/>
               <a:t>Abrir con la pregunta: ¿cuánto te cuesta hoy conseguir un cliente nuevo calificado? Presentar MaNu PRO como una fuente de clientes que llegan ya educados sobre su situación de retiro.</a:t>
             </a:r>
-            <a:endParaRPr lang="en-US" dirty="0"/>
           </a:p>
         </p:txBody>
       </p:sp>
@@ -602,7 +382,6 @@
               <a:rPr lang="en-US" dirty="0"/>
               <a:t>Fede es el creador: idea, logica financiera y primer MVP — ademas de capitalizar la inversion. Martin llevo el producto a produccion. B2B validado: los asesores necesitan leads, no software. Roadmap conservador — primero validar calidad con Javier.</a:t>
             </a:r>
-            <a:endParaRPr lang="en-US" dirty="0"/>
           </a:p>
         </p:txBody>
       </p:sp>
@@ -690,7 +469,6 @@
               <a:rPr lang="en-US" dirty="0"/>
               <a:t>Cierre: pedir el OK para el piloto. La configuración es inmediata — puede recibir su primer lead de prueba antes de que termine la reunión.</a:t>
             </a:r>
-            <a:endParaRPr lang="en-US" dirty="0"/>
           </a:p>
         </p:txBody>
       </p:sp>
@@ -778,7 +556,6 @@
               <a:rPr lang="en-US" dirty="0"/>
               <a:t>El dolor del asesor: adquisición cara y de baja calidad. Anclar el benchmark: USD 20-40 el lead frío. Nuestro lead llega con contexto — eso viene en las próximas slides.</a:t>
             </a:r>
-            <a:endParaRPr lang="en-US" dirty="0"/>
           </a:p>
         </p:txBody>
       </p:sp>
@@ -866,7 +643,6 @@
               <a:rPr lang="en-US" dirty="0"/>
               <a:t>Demo en vivo acá si hay tiempo: abrir magic-number.app y calcular un caso en 3 minutos. Alternativa: ?demo=1 muestra la experiencia completa desbloqueada.</a:t>
             </a:r>
-            <a:endParaRPr lang="en-US" dirty="0"/>
           </a:p>
         </p:txBody>
       </p:sp>
@@ -954,7 +730,6 @@
               <a:rPr lang="en-US" dirty="0"/>
               <a:t>Mostrar el informe real (llevar impreso o en tablet). Punto clave: el contenido educa y crea urgencia — el usuario ya hizo el trabajo emocional antes de hablar con Javier.</a:t>
             </a:r>
-            <a:endParaRPr lang="en-US" dirty="0"/>
           </a:p>
         </p:txBody>
       </p:sp>
@@ -1042,7 +817,6 @@
               <a:rPr lang="en-US" dirty="0"/>
               <a:t>El embudo se auto-califica: quien llega al paso 4 vio su brecha y decidió pedir ayuda. Nadie lo interrumpió — la persona pidió que la contacten.</a:t>
             </a:r>
-            <a:endParaRPr lang="en-US" dirty="0"/>
           </a:p>
         </p:txBody>
       </p:sp>
@@ -1130,7 +904,6 @@
               <a:rPr lang="en-US" dirty="0"/>
               <a:t>Esta es LA slide. Mostrar el email real si Resend ya está activo (mandarse un lead de prueba en vivo desde el celular es un gran momento de la reunión).</a:t>
             </a:r>
-            <a:endParaRPr lang="en-US" dirty="0"/>
           </a:p>
         </p:txBody>
       </p:sp>
@@ -1218,7 +991,6 @@
               <a:rPr lang="en-US" dirty="0"/>
               <a:t>Modelo elegido: comisión por cliente convertido (referido). No vendemos leads. El número exacto de la comisión queda abierto para acordar con Javier en la reunión.</a:t>
             </a:r>
-            <a:endParaRPr lang="en-US" dirty="0"/>
           </a:p>
         </p:txBody>
       </p:sp>
@@ -1306,7 +1078,6 @@
               <a:rPr lang="en-US" dirty="0"/>
               <a:t>Ser 100% honesto: hoy 0 usuarios, esto es matemática de embudo con benchmarks públicos. El piloto de 3 meses valida los ratios reales. La pauta la pagamos nosotros — para Javier el volumen es upside sin riesgo.</a:t>
             </a:r>
-            <a:endParaRPr lang="en-US" dirty="0"/>
           </a:p>
         </p:txBody>
       </p:sp>
@@ -1394,7 +1165,6 @@
               <a:rPr lang="en-US" dirty="0"/>
               <a:t>Javier va a escrutar la metodología — esa es exactamente la razón de la sección "Cómo calculamos". Invitarlo a revisarla y dar feedback del motor: su expertise mejora el producto.</a:t>
             </a:r>
-            <a:endParaRPr lang="en-US" dirty="0"/>
           </a:p>
         </p:txBody>
       </p:sp>
@@ -1467,6 +1237,11 @@
 <file path=ppt/slideMasters/slideMaster1.xml><?xml version="1.0" encoding="utf-8"?>
 <p:sldMaster xmlns:a="http://schemas.openxmlformats.org/drawingml/2006/main" xmlns:r="http://schemas.openxmlformats.org/officeDocument/2006/relationships" xmlns:p="http://schemas.openxmlformats.org/presentationml/2006/main">
   <p:cSld>
+    <p:bg>
+      <p:bgRef idx="1001">
+        <a:schemeClr val="bg1"/>
+      </p:bgRef>
+    </p:bg>
     <p:spTree>
       <p:nvGrpSpPr>
         <p:cNvPr id="1" name=""/>
@@ -1749,6 +1524,7 @@
         <a:solidFill>
           <a:srgbClr val="0F172A"/>
         </a:solidFill>
+        <a:effectLst/>
       </p:bgPr>
     </p:bg>
     <p:spTree>
@@ -1786,6 +1562,13 @@
           </a:solidFill>
           <a:ln/>
         </p:spPr>
+        <p:txBody>
+          <a:bodyPr/>
+          <a:lstStyle/>
+          <a:p>
+            <a:endParaRPr lang="es-AR"/>
+          </a:p>
+        </p:txBody>
       </p:sp>
       <p:sp>
         <p:nvSpPr>
@@ -1808,7 +1591,7 @@
           <a:bodyPr wrap="square" lIns="0" tIns="0" rIns="0" bIns="0" rtlCol="0" anchor="ctr"/>
           <a:lstStyle/>
           <a:p>
-            <a:pPr algn="ctr" indent="0" marL="0">
+            <a:pPr marL="0" indent="0" algn="ctr">
               <a:buNone/>
             </a:pPr>
             <a:r>
@@ -1847,7 +1630,7 @@
           <a:bodyPr wrap="square" lIns="0" tIns="0" rIns="0" bIns="0" rtlCol="0" anchor="ctr"/>
           <a:lstStyle/>
           <a:p>
-            <a:pPr indent="0" marL="0">
+            <a:pPr marL="0" indent="0">
               <a:buNone/>
             </a:pPr>
             <a:r>
@@ -1886,7 +1669,7 @@
           <a:bodyPr wrap="square" lIns="0" tIns="0" rIns="0" bIns="0" rtlCol="0" anchor="ctr"/>
           <a:lstStyle/>
           <a:p>
-            <a:pPr indent="0" marL="0">
+            <a:pPr marL="0" indent="0">
               <a:buNone/>
             </a:pPr>
             <a:r>
@@ -1900,9 +1683,6 @@
               </a:rPr>
               <a:t>Leads calificados de </a:t>
             </a:r>
-            <a:pPr indent="0" marL="0">
-              <a:buNone/>
-            </a:pPr>
             <a:r>
               <a:rPr lang="en-US" sz="4400" b="1" dirty="0">
                 <a:solidFill>
@@ -1939,7 +1719,7 @@
           <a:bodyPr wrap="square" lIns="0" tIns="0" rIns="0" bIns="0" rtlCol="0" anchor="ctr"/>
           <a:lstStyle/>
           <a:p>
-            <a:pPr indent="0" marL="0">
+            <a:pPr marL="0" indent="0">
               <a:buNone/>
             </a:pPr>
             <a:r>
@@ -1951,7 +1731,18 @@
                 <a:ea typeface="Arial" pitchFamily="34" charset="-122"/>
                 <a:cs typeface="Arial" pitchFamily="34" charset="-120"/>
               </a:rPr>
-              <a:t>Propuesta de colaboración — Javier</a:t>
+              <a:t>Propuesta de </a:t>
+            </a:r>
+            <a:r>
+              <a:rPr lang="en-US" sz="2000" dirty="0" err="1">
+                <a:solidFill>
+                  <a:srgbClr val="CBD5E1"/>
+                </a:solidFill>
+                <a:latin typeface="Arial" pitchFamily="34" charset="0"/>
+                <a:ea typeface="Arial" pitchFamily="34" charset="-122"/>
+                <a:cs typeface="Arial" pitchFamily="34" charset="-120"/>
+              </a:rPr>
+              <a:t>colaboración</a:t>
             </a:r>
             <a:endParaRPr lang="en-US" sz="2000" dirty="0"/>
           </a:p>
@@ -1978,7 +1769,7 @@
           <a:bodyPr wrap="square" lIns="0" tIns="0" rIns="0" bIns="0" rtlCol="0" anchor="ctr"/>
           <a:lstStyle/>
           <a:p>
-            <a:pPr indent="0" marL="0">
+            <a:pPr marL="0" indent="0">
               <a:buNone/>
             </a:pPr>
             <a:r>
@@ -2012,6 +1803,7 @@
         <a:solidFill>
           <a:srgbClr val="FFFFFF"/>
         </a:solidFill>
+        <a:effectLst/>
       </p:bgPr>
     </p:bg>
     <p:spTree>
@@ -2049,7 +1841,7 @@
           <a:bodyPr wrap="square" lIns="0" tIns="0" rIns="0" bIns="0" rtlCol="0" anchor="ctr"/>
           <a:lstStyle/>
           <a:p>
-            <a:pPr indent="0" marL="0">
+            <a:pPr marL="0" indent="0">
               <a:buNone/>
             </a:pPr>
             <a:r>
@@ -2088,7 +1880,7 @@
           <a:bodyPr wrap="square" lIns="0" tIns="0" rIns="0" bIns="0" rtlCol="0" anchor="ctr"/>
           <a:lstStyle/>
           <a:p>
-            <a:pPr indent="0" marL="0">
+            <a:pPr marL="0" indent="0">
               <a:buNone/>
             </a:pPr>
             <a:r>
@@ -2127,17 +1919,24 @@
           </a:solidFill>
           <a:ln/>
         </p:spPr>
+        <p:txBody>
+          <a:bodyPr/>
+          <a:lstStyle/>
+          <a:p>
+            <a:endParaRPr lang="es-AR"/>
+          </a:p>
+        </p:txBody>
       </p:sp>
       <p:pic>
         <p:nvPicPr>
-          <p:cNvPr id="5" name="Image 0" descr="/tmp/deck/icon-usertie-blue.png">    </p:cNvPr>
+          <p:cNvPr id="5" name="Image 0" descr="/tmp/deck/icon-usertie-blue.png"/>
           <p:cNvPicPr>
             <a:picLocks noChangeAspect="1"/>
           </p:cNvPicPr>
           <p:nvPr/>
         </p:nvPicPr>
         <p:blipFill>
-          <a:blip r:embed="rId1"/>
+          <a:blip r:embed="rId3"/>
           <a:stretch>
             <a:fillRect/>
           </a:stretch>
@@ -2173,7 +1972,7 @@
           <a:bodyPr wrap="square" lIns="0" tIns="0" rIns="0" bIns="0" rtlCol="0" anchor="ctr"/>
           <a:lstStyle/>
           <a:p>
-            <a:pPr indent="0" marL="0">
+            <a:pPr marL="0" indent="0">
               <a:buNone/>
             </a:pPr>
             <a:r>
@@ -2212,7 +2011,7 @@
           <a:bodyPr wrap="square" lIns="0" tIns="0" rIns="0" bIns="0" rtlCol="0" anchor="ctr"/>
           <a:lstStyle/>
           <a:p>
-            <a:pPr indent="0" marL="0">
+            <a:pPr marL="0" indent="0">
               <a:buNone/>
             </a:pPr>
             <a:r>
@@ -2251,17 +2050,24 @@
           </a:solidFill>
           <a:ln/>
         </p:spPr>
+        <p:txBody>
+          <a:bodyPr/>
+          <a:lstStyle/>
+          <a:p>
+            <a:endParaRPr lang="es-AR"/>
+          </a:p>
+        </p:txBody>
       </p:sp>
       <p:pic>
         <p:nvPicPr>
-          <p:cNvPr id="9" name="Image 1" descr="/tmp/deck/icon-usertie-blue.png">    </p:cNvPr>
+          <p:cNvPr id="9" name="Image 1" descr="/tmp/deck/icon-usertie-blue.png"/>
           <p:cNvPicPr>
             <a:picLocks noChangeAspect="1"/>
           </p:cNvPicPr>
           <p:nvPr/>
         </p:nvPicPr>
         <p:blipFill>
-          <a:blip r:embed="rId2"/>
+          <a:blip r:embed="rId3"/>
           <a:stretch>
             <a:fillRect/>
           </a:stretch>
@@ -2297,7 +2103,7 @@
           <a:bodyPr wrap="square" lIns="0" tIns="0" rIns="0" bIns="0" rtlCol="0" anchor="ctr"/>
           <a:lstStyle/>
           <a:p>
-            <a:pPr indent="0" marL="0">
+            <a:pPr marL="0" indent="0">
               <a:buNone/>
             </a:pPr>
             <a:r>
@@ -2336,7 +2142,7 @@
           <a:bodyPr wrap="square" lIns="0" tIns="0" rIns="0" bIns="0" rtlCol="0" anchor="ctr"/>
           <a:lstStyle/>
           <a:p>
-            <a:pPr indent="0" marL="0">
+            <a:pPr marL="0" indent="0">
               <a:buNone/>
             </a:pPr>
             <a:r>
@@ -2375,6 +2181,13 @@
           </a:solidFill>
           <a:ln/>
         </p:spPr>
+        <p:txBody>
+          <a:bodyPr/>
+          <a:lstStyle/>
+          <a:p>
+            <a:endParaRPr lang="es-AR"/>
+          </a:p>
+        </p:txBody>
       </p:sp>
       <p:sp>
         <p:nvSpPr>
@@ -2397,7 +2210,7 @@
           <a:bodyPr wrap="square" lIns="0" tIns="0" rIns="0" bIns="0" rtlCol="0" anchor="ctr"/>
           <a:lstStyle/>
           <a:p>
-            <a:pPr indent="0" marL="0">
+            <a:pPr marL="0" indent="0">
               <a:buNone/>
             </a:pPr>
             <a:r>
@@ -2411,9 +2224,6 @@
               </a:rPr>
               <a:t>Validado con asesores: </a:t>
             </a:r>
-            <a:pPr indent="0" marL="0">
-              <a:buNone/>
-            </a:pPr>
             <a:r>
               <a:rPr lang="en-US" sz="1250" dirty="0">
                 <a:solidFill>
@@ -2450,7 +2260,7 @@
           <a:bodyPr wrap="square" lIns="0" tIns="0" rIns="0" bIns="0" rtlCol="0" anchor="ctr"/>
           <a:lstStyle/>
           <a:p>
-            <a:pPr indent="0" marL="0">
+            <a:pPr marL="0" indent="0">
               <a:buNone/>
             </a:pPr>
             <a:r>
@@ -2489,6 +2299,13 @@
           </a:solidFill>
           <a:ln/>
         </p:spPr>
+        <p:txBody>
+          <a:bodyPr/>
+          <a:lstStyle/>
+          <a:p>
+            <a:endParaRPr lang="es-AR"/>
+          </a:p>
+        </p:txBody>
       </p:sp>
       <p:sp>
         <p:nvSpPr>
@@ -2511,7 +2328,7 @@
           <a:bodyPr wrap="square" lIns="0" tIns="0" rIns="0" bIns="0" rtlCol="0" anchor="ctr"/>
           <a:lstStyle/>
           <a:p>
-            <a:pPr algn="ctr" indent="0" marL="0">
+            <a:pPr marL="0" indent="0" algn="ctr">
               <a:buNone/>
             </a:pPr>
             <a:r>
@@ -2550,7 +2367,7 @@
           <a:bodyPr wrap="square" lIns="0" tIns="0" rIns="0" bIns="0" rtlCol="0" anchor="ctr"/>
           <a:lstStyle/>
           <a:p>
-            <a:pPr indent="0" marL="0">
+            <a:pPr marL="0" indent="0">
               <a:buNone/>
             </a:pPr>
             <a:r>
@@ -2589,6 +2406,13 @@
           </a:solidFill>
           <a:ln/>
         </p:spPr>
+        <p:txBody>
+          <a:bodyPr/>
+          <a:lstStyle/>
+          <a:p>
+            <a:endParaRPr lang="es-AR"/>
+          </a:p>
+        </p:txBody>
       </p:sp>
       <p:sp>
         <p:nvSpPr>
@@ -2611,7 +2435,7 @@
           <a:bodyPr wrap="square" lIns="0" tIns="0" rIns="0" bIns="0" rtlCol="0" anchor="ctr"/>
           <a:lstStyle/>
           <a:p>
-            <a:pPr algn="ctr" indent="0" marL="0">
+            <a:pPr marL="0" indent="0" algn="ctr">
               <a:buNone/>
             </a:pPr>
             <a:r>
@@ -2650,7 +2474,7 @@
           <a:bodyPr wrap="square" lIns="0" tIns="0" rIns="0" bIns="0" rtlCol="0" anchor="ctr"/>
           <a:lstStyle/>
           <a:p>
-            <a:pPr indent="0" marL="0">
+            <a:pPr marL="0" indent="0">
               <a:buNone/>
             </a:pPr>
             <a:r>
@@ -2662,7 +2486,7 @@
                 <a:ea typeface="Arial" pitchFamily="34" charset="-122"/>
                 <a:cs typeface="Arial" pitchFamily="34" charset="-120"/>
               </a:rPr>
-              <a:t>Piloto con Javier: pauta inicial, medición de calidad y conversión de leads.</a:t>
+              <a:t>Piloto: pauta inicial, medición de calidad y conversión de leads.</a:t>
             </a:r>
             <a:endParaRPr lang="en-US" sz="1200" dirty="0"/>
           </a:p>
@@ -2689,6 +2513,13 @@
           </a:solidFill>
           <a:ln/>
         </p:spPr>
+        <p:txBody>
+          <a:bodyPr/>
+          <a:lstStyle/>
+          <a:p>
+            <a:endParaRPr lang="es-AR"/>
+          </a:p>
+        </p:txBody>
       </p:sp>
       <p:sp>
         <p:nvSpPr>
@@ -2711,7 +2542,7 @@
           <a:bodyPr wrap="square" lIns="0" tIns="0" rIns="0" bIns="0" rtlCol="0" anchor="ctr"/>
           <a:lstStyle/>
           <a:p>
-            <a:pPr algn="ctr" indent="0" marL="0">
+            <a:pPr marL="0" indent="0" algn="ctr">
               <a:buNone/>
             </a:pPr>
             <a:r>
@@ -2750,7 +2581,7 @@
           <a:bodyPr wrap="square" lIns="0" tIns="0" rIns="0" bIns="0" rtlCol="0" anchor="ctr"/>
           <a:lstStyle/>
           <a:p>
-            <a:pPr indent="0" marL="0">
+            <a:pPr marL="0" indent="0">
               <a:buNone/>
             </a:pPr>
             <a:r>
@@ -2789,6 +2620,13 @@
           </a:solidFill>
           <a:ln/>
         </p:spPr>
+        <p:txBody>
+          <a:bodyPr/>
+          <a:lstStyle/>
+          <a:p>
+            <a:endParaRPr lang="es-AR"/>
+          </a:p>
+        </p:txBody>
       </p:sp>
       <p:sp>
         <p:nvSpPr>
@@ -2811,7 +2649,7 @@
           <a:bodyPr wrap="square" lIns="0" tIns="0" rIns="0" bIns="0" rtlCol="0" anchor="ctr"/>
           <a:lstStyle/>
           <a:p>
-            <a:pPr algn="ctr" indent="0" marL="0">
+            <a:pPr marL="0" indent="0" algn="ctr">
               <a:buNone/>
             </a:pPr>
             <a:r>
@@ -2850,7 +2688,7 @@
           <a:bodyPr wrap="square" lIns="0" tIns="0" rIns="0" bIns="0" rtlCol="0" anchor="ctr"/>
           <a:lstStyle/>
           <a:p>
-            <a:pPr indent="0" marL="0">
+            <a:pPr marL="0" indent="0">
               <a:buNone/>
             </a:pPr>
             <a:r>
@@ -2889,7 +2727,7 @@
           <a:bodyPr wrap="square" lIns="0" tIns="0" rIns="0" bIns="0" rtlCol="0" anchor="ctr"/>
           <a:lstStyle/>
           <a:p>
-            <a:pPr indent="0" marL="0">
+            <a:pPr marL="0" indent="0">
               <a:buNone/>
             </a:pPr>
             <a:r>
@@ -2928,7 +2766,7 @@
           <a:bodyPr wrap="square" lIns="0" tIns="0" rIns="0" bIns="0" rtlCol="0" anchor="ctr"/>
           <a:lstStyle/>
           <a:p>
-            <a:pPr algn="r" indent="0" marL="0">
+            <a:pPr marL="0" indent="0" algn="r">
               <a:buNone/>
             </a:pPr>
             <a:r>
@@ -2962,6 +2800,7 @@
         <a:solidFill>
           <a:srgbClr val="0F172A"/>
         </a:solidFill>
+        <a:effectLst/>
       </p:bgPr>
     </p:bg>
     <p:spTree>
@@ -2999,6 +2838,13 @@
           </a:solidFill>
           <a:ln/>
         </p:spPr>
+        <p:txBody>
+          <a:bodyPr/>
+          <a:lstStyle/>
+          <a:p>
+            <a:endParaRPr lang="es-AR"/>
+          </a:p>
+        </p:txBody>
       </p:sp>
       <p:sp>
         <p:nvSpPr>
@@ -3021,7 +2867,7 @@
           <a:bodyPr wrap="square" lIns="0" tIns="0" rIns="0" bIns="0" rtlCol="0" anchor="ctr"/>
           <a:lstStyle/>
           <a:p>
-            <a:pPr algn="ctr" indent="0" marL="0">
+            <a:pPr marL="0" indent="0" algn="ctr">
               <a:buNone/>
             </a:pPr>
             <a:r>
@@ -3060,7 +2906,7 @@
           <a:bodyPr wrap="square" lIns="0" tIns="0" rIns="0" bIns="0" rtlCol="0" anchor="ctr"/>
           <a:lstStyle/>
           <a:p>
-            <a:pPr indent="0" marL="0">
+            <a:pPr marL="0" indent="0">
               <a:buNone/>
             </a:pPr>
             <a:r>
@@ -3099,7 +2945,7 @@
           <a:bodyPr wrap="square" lIns="0" tIns="0" rIns="0" bIns="0" rtlCol="0" anchor="ctr"/>
           <a:lstStyle/>
           <a:p>
-            <a:pPr indent="0" marL="0">
+            <a:pPr marL="0" indent="0">
               <a:buNone/>
             </a:pPr>
             <a:r>
@@ -3138,6 +2984,13 @@
           </a:solidFill>
           <a:ln/>
         </p:spPr>
+        <p:txBody>
+          <a:bodyPr/>
+          <a:lstStyle/>
+          <a:p>
+            <a:endParaRPr lang="es-AR"/>
+          </a:p>
+        </p:txBody>
       </p:sp>
       <p:sp>
         <p:nvSpPr>
@@ -3160,7 +3013,7 @@
           <a:bodyPr wrap="square" lIns="0" tIns="0" rIns="0" bIns="0" rtlCol="0" anchor="ctr"/>
           <a:lstStyle/>
           <a:p>
-            <a:pPr algn="ctr" indent="0" marL="0">
+            <a:pPr marL="0" indent="0" algn="ctr">
               <a:buNone/>
             </a:pPr>
             <a:r>
@@ -3199,7 +3052,7 @@
           <a:bodyPr wrap="square" lIns="0" tIns="0" rIns="0" bIns="0" rtlCol="0" anchor="ctr"/>
           <a:lstStyle/>
           <a:p>
-            <a:pPr indent="0" marL="0">
+            <a:pPr marL="0" indent="0">
               <a:buNone/>
             </a:pPr>
             <a:r>
@@ -3238,6 +3091,13 @@
           </a:solidFill>
           <a:ln/>
         </p:spPr>
+        <p:txBody>
+          <a:bodyPr/>
+          <a:lstStyle/>
+          <a:p>
+            <a:endParaRPr lang="es-AR"/>
+          </a:p>
+        </p:txBody>
       </p:sp>
       <p:sp>
         <p:nvSpPr>
@@ -3260,7 +3120,7 @@
           <a:bodyPr wrap="square" lIns="0" tIns="0" rIns="0" bIns="0" rtlCol="0" anchor="ctr"/>
           <a:lstStyle/>
           <a:p>
-            <a:pPr algn="ctr" indent="0" marL="0">
+            <a:pPr marL="0" indent="0" algn="ctr">
               <a:buNone/>
             </a:pPr>
             <a:r>
@@ -3299,7 +3159,7 @@
           <a:bodyPr wrap="square" lIns="0" tIns="0" rIns="0" bIns="0" rtlCol="0" anchor="ctr"/>
           <a:lstStyle/>
           <a:p>
-            <a:pPr indent="0" marL="0">
+            <a:pPr marL="0" indent="0">
               <a:buNone/>
             </a:pPr>
             <a:r>
@@ -3338,6 +3198,13 @@
           </a:solidFill>
           <a:ln/>
         </p:spPr>
+        <p:txBody>
+          <a:bodyPr/>
+          <a:lstStyle/>
+          <a:p>
+            <a:endParaRPr lang="es-AR"/>
+          </a:p>
+        </p:txBody>
       </p:sp>
       <p:sp>
         <p:nvSpPr>
@@ -3360,7 +3227,7 @@
           <a:bodyPr wrap="square" lIns="0" tIns="0" rIns="0" bIns="0" rtlCol="0" anchor="ctr"/>
           <a:lstStyle/>
           <a:p>
-            <a:pPr algn="ctr" indent="0" marL="0">
+            <a:pPr marL="0" indent="0" algn="ctr">
               <a:buNone/>
             </a:pPr>
             <a:r>
@@ -3399,7 +3266,7 @@
           <a:bodyPr wrap="square" lIns="0" tIns="0" rIns="0" bIns="0" rtlCol="0" anchor="ctr"/>
           <a:lstStyle/>
           <a:p>
-            <a:pPr indent="0" marL="0">
+            <a:pPr marL="0" indent="0">
               <a:buNone/>
             </a:pPr>
             <a:r>
@@ -3438,6 +3305,13 @@
           </a:solidFill>
           <a:ln/>
         </p:spPr>
+        <p:txBody>
+          <a:bodyPr/>
+          <a:lstStyle/>
+          <a:p>
+            <a:endParaRPr lang="es-AR"/>
+          </a:p>
+        </p:txBody>
       </p:sp>
       <p:sp>
         <p:nvSpPr>
@@ -3460,7 +3334,7 @@
           <a:bodyPr wrap="square" lIns="0" tIns="0" rIns="0" bIns="0" rtlCol="0" anchor="ctr"/>
           <a:lstStyle/>
           <a:p>
-            <a:pPr algn="ctr" indent="0" marL="0">
+            <a:pPr marL="0" indent="0" algn="ctr">
               <a:buNone/>
             </a:pPr>
             <a:r>
@@ -3499,7 +3373,7 @@
           <a:bodyPr wrap="square" lIns="0" tIns="0" rIns="0" bIns="0" rtlCol="0" anchor="ctr"/>
           <a:lstStyle/>
           <a:p>
-            <a:pPr indent="0" marL="0">
+            <a:pPr marL="0" indent="0">
               <a:buNone/>
             </a:pPr>
             <a:r>
@@ -3538,17 +3412,24 @@
           </a:solidFill>
           <a:ln/>
         </p:spPr>
+        <p:txBody>
+          <a:bodyPr/>
+          <a:lstStyle/>
+          <a:p>
+            <a:endParaRPr lang="es-AR"/>
+          </a:p>
+        </p:txBody>
       </p:sp>
       <p:pic>
         <p:nvPicPr>
-          <p:cNvPr id="19" name="Image 0" descr="/tmp/qr.png">    </p:cNvPr>
+          <p:cNvPr id="19" name="Image 0" descr="/tmp/qr.png"/>
           <p:cNvPicPr>
             <a:picLocks noChangeAspect="1"/>
           </p:cNvPicPr>
           <p:nvPr/>
         </p:nvPicPr>
         <p:blipFill>
-          <a:blip r:embed="rId1"/>
+          <a:blip r:embed="rId3"/>
           <a:stretch>
             <a:fillRect/>
           </a:stretch>
@@ -3584,7 +3465,7 @@
           <a:bodyPr wrap="square" lIns="0" tIns="0" rIns="0" bIns="0" rtlCol="0" anchor="ctr"/>
           <a:lstStyle/>
           <a:p>
-            <a:pPr algn="ctr" indent="0" marL="0">
+            <a:pPr marL="0" indent="0" algn="ctr">
               <a:buNone/>
             </a:pPr>
             <a:r>
@@ -3623,7 +3504,7 @@
           <a:bodyPr wrap="square" lIns="0" tIns="0" rIns="0" bIns="0" rtlCol="0" anchor="ctr"/>
           <a:lstStyle/>
           <a:p>
-            <a:pPr algn="ctr" indent="0" marL="0">
+            <a:pPr marL="0" indent="0" algn="ctr">
               <a:buNone/>
             </a:pPr>
             <a:r>
@@ -3662,7 +3543,7 @@
           <a:bodyPr wrap="square" lIns="0" tIns="0" rIns="0" bIns="0" rtlCol="0" anchor="ctr"/>
           <a:lstStyle/>
           <a:p>
-            <a:pPr indent="0" marL="0">
+            <a:pPr marL="0" indent="0">
               <a:buNone/>
             </a:pPr>
             <a:r>
@@ -3701,7 +3582,7 @@
           <a:bodyPr wrap="square" lIns="0" tIns="0" rIns="0" bIns="0" rtlCol="0" anchor="ctr"/>
           <a:lstStyle/>
           <a:p>
-            <a:pPr indent="0" marL="0">
+            <a:pPr marL="0" indent="0">
               <a:buNone/>
             </a:pPr>
             <a:r>
@@ -3740,7 +3621,7 @@
           <a:bodyPr wrap="square" lIns="0" tIns="0" rIns="0" bIns="0" rtlCol="0" anchor="ctr"/>
           <a:lstStyle/>
           <a:p>
-            <a:pPr algn="r" indent="0" marL="0">
+            <a:pPr marL="0" indent="0" algn="r">
               <a:buNone/>
             </a:pPr>
             <a:r>
@@ -3774,6 +3655,7 @@
         <a:solidFill>
           <a:srgbClr val="FFFFFF"/>
         </a:solidFill>
+        <a:effectLst/>
       </p:bgPr>
     </p:bg>
     <p:spTree>
@@ -3811,7 +3693,7 @@
           <a:bodyPr wrap="square" lIns="0" tIns="0" rIns="0" bIns="0" rtlCol="0" anchor="ctr"/>
           <a:lstStyle/>
           <a:p>
-            <a:pPr indent="0" marL="0">
+            <a:pPr marL="0" indent="0">
               <a:buNone/>
             </a:pPr>
             <a:r>
@@ -3850,258 +3732,17 @@
           </a:solidFill>
           <a:ln/>
         </p:spPr>
+        <p:txBody>
+          <a:bodyPr/>
+          <a:lstStyle/>
+          <a:p>
+            <a:endParaRPr lang="es-AR"/>
+          </a:p>
+        </p:txBody>
       </p:sp>
       <p:pic>
         <p:nvPicPr>
-          <p:cNvPr id="4" name="Image 0" descr="/tmp/deck/icon-dollar-blue.png">    </p:cNvPr>
-          <p:cNvPicPr>
-            <a:picLocks noChangeAspect="1"/>
-          </p:cNvPicPr>
-          <p:nvPr/>
-        </p:nvPicPr>
-        <p:blipFill>
-          <a:blip r:embed="rId1"/>
-          <a:stretch>
-            <a:fillRect/>
-          </a:stretch>
-        </p:blipFill>
-        <p:spPr>
-          <a:xfrm>
-            <a:off x="653247" y="1704807"/>
-            <a:ext cx="266273" cy="266273"/>
-          </a:xfrm>
-          <a:prstGeom prst="rect">
-            <a:avLst/>
-          </a:prstGeom>
-        </p:spPr>
-      </p:pic>
-      <p:sp>
-        <p:nvSpPr>
-          <p:cNvPr id="5" name="Text 2"/>
-          <p:cNvSpPr/>
-          <p:nvPr/>
-        </p:nvSpPr>
-        <p:spPr>
-          <a:xfrm>
-            <a:off x="1234440" y="1545336"/>
-            <a:ext cx="5669280" cy="365760"/>
-          </a:xfrm>
-          <a:prstGeom prst="rect">
-            <a:avLst/>
-          </a:prstGeom>
-          <a:noFill/>
-          <a:ln/>
-        </p:spPr>
-        <p:txBody>
-          <a:bodyPr wrap="square" lIns="0" tIns="0" rIns="0" bIns="0" rtlCol="0" anchor="ctr"/>
-          <a:lstStyle/>
-          <a:p>
-            <a:pPr indent="0" marL="0">
-              <a:buNone/>
-            </a:pPr>
-            <a:r>
-              <a:rPr lang="en-US" sz="1700" b="1" dirty="0">
-                <a:solidFill>
-                  <a:srgbClr val="0F172A"/>
-                </a:solidFill>
-                <a:latin typeface="Arial" pitchFamily="34" charset="0"/>
-                <a:ea typeface="Arial" pitchFamily="34" charset="-122"/>
-                <a:cs typeface="Arial" pitchFamily="34" charset="-120"/>
-              </a:rPr>
-              <a:t>Adquisición cara</a:t>
-            </a:r>
-            <a:endParaRPr lang="en-US" sz="1700" dirty="0"/>
-          </a:p>
-        </p:txBody>
-      </p:sp>
-      <p:sp>
-        <p:nvSpPr>
-          <p:cNvPr id="6" name="Text 3"/>
-          <p:cNvSpPr/>
-          <p:nvPr/>
-        </p:nvSpPr>
-        <p:spPr>
-          <a:xfrm>
-            <a:off x="1234440" y="1892808"/>
-            <a:ext cx="5669280" cy="777240"/>
-          </a:xfrm>
-          <a:prstGeom prst="rect">
-            <a:avLst/>
-          </a:prstGeom>
-          <a:noFill/>
-          <a:ln/>
-        </p:spPr>
-        <p:txBody>
-          <a:bodyPr wrap="square" lIns="0" tIns="0" rIns="0" bIns="0" rtlCol="0" anchor="ctr"/>
-          <a:lstStyle/>
-          <a:p>
-            <a:pPr indent="0" marL="0">
-              <a:buNone/>
-            </a:pPr>
-            <a:r>
-              <a:rPr lang="en-US" sz="1350" dirty="0">
-                <a:solidFill>
-                  <a:srgbClr val="64748B"/>
-                </a:solidFill>
-                <a:latin typeface="Arial" pitchFamily="34" charset="0"/>
-                <a:ea typeface="Arial" pitchFamily="34" charset="-122"/>
-                <a:cs typeface="Arial" pitchFamily="34" charset="-120"/>
-              </a:rPr>
-              <a:t>Un lead de finanzas en LATAM cuesta USD 20–40 en pauta digital, y el costo sube todos los años.</a:t>
-            </a:r>
-            <a:endParaRPr lang="en-US" sz="1350" dirty="0"/>
-          </a:p>
-        </p:txBody>
-      </p:sp>
-      <p:sp>
-        <p:nvSpPr>
-          <p:cNvPr id="7" name="Shape 4"/>
-          <p:cNvSpPr/>
-          <p:nvPr/>
-        </p:nvSpPr>
-        <p:spPr>
-          <a:xfrm>
-            <a:off x="548640" y="2926080"/>
-            <a:ext cx="475488" cy="475488"/>
-          </a:xfrm>
-          <a:prstGeom prst="roundRect">
-            <a:avLst>
-              <a:gd name="adj" fmla="val 23077"/>
-            </a:avLst>
-          </a:prstGeom>
-          <a:solidFill>
-            <a:srgbClr val="EFF6FF"/>
-          </a:solidFill>
-          <a:ln/>
-        </p:spPr>
-      </p:sp>
-      <p:pic>
-        <p:nvPicPr>
-          <p:cNvPr id="8" name="Image 1" descr="/tmp/deck/icon-snow-blue.png">    </p:cNvPr>
-          <p:cNvPicPr>
-            <a:picLocks noChangeAspect="1"/>
-          </p:cNvPicPr>
-          <p:nvPr/>
-        </p:nvPicPr>
-        <p:blipFill>
-          <a:blip r:embed="rId2"/>
-          <a:stretch>
-            <a:fillRect/>
-          </a:stretch>
-        </p:blipFill>
-        <p:spPr>
-          <a:xfrm>
-            <a:off x="653247" y="3030687"/>
-            <a:ext cx="266273" cy="266273"/>
-          </a:xfrm>
-          <a:prstGeom prst="rect">
-            <a:avLst/>
-          </a:prstGeom>
-        </p:spPr>
-      </p:pic>
-      <p:sp>
-        <p:nvSpPr>
-          <p:cNvPr id="9" name="Text 5"/>
-          <p:cNvSpPr/>
-          <p:nvPr/>
-        </p:nvSpPr>
-        <p:spPr>
-          <a:xfrm>
-            <a:off x="1234440" y="2871216"/>
-            <a:ext cx="5669280" cy="365760"/>
-          </a:xfrm>
-          <a:prstGeom prst="rect">
-            <a:avLst/>
-          </a:prstGeom>
-          <a:noFill/>
-          <a:ln/>
-        </p:spPr>
-        <p:txBody>
-          <a:bodyPr wrap="square" lIns="0" tIns="0" rIns="0" bIns="0" rtlCol="0" anchor="ctr"/>
-          <a:lstStyle/>
-          <a:p>
-            <a:pPr indent="0" marL="0">
-              <a:buNone/>
-            </a:pPr>
-            <a:r>
-              <a:rPr lang="en-US" sz="1700" b="1" dirty="0">
-                <a:solidFill>
-                  <a:srgbClr val="0F172A"/>
-                </a:solidFill>
-                <a:latin typeface="Arial" pitchFamily="34" charset="0"/>
-                <a:ea typeface="Arial" pitchFamily="34" charset="-122"/>
-                <a:cs typeface="Arial" pitchFamily="34" charset="-120"/>
-              </a:rPr>
-              <a:t>Leads fríos</a:t>
-            </a:r>
-            <a:endParaRPr lang="en-US" sz="1700" dirty="0"/>
-          </a:p>
-        </p:txBody>
-      </p:sp>
-      <p:sp>
-        <p:nvSpPr>
-          <p:cNvPr id="10" name="Text 6"/>
-          <p:cNvSpPr/>
-          <p:nvPr/>
-        </p:nvSpPr>
-        <p:spPr>
-          <a:xfrm>
-            <a:off x="1234440" y="3218688"/>
-            <a:ext cx="5669280" cy="777240"/>
-          </a:xfrm>
-          <a:prstGeom prst="rect">
-            <a:avLst/>
-          </a:prstGeom>
-          <a:noFill/>
-          <a:ln/>
-        </p:spPr>
-        <p:txBody>
-          <a:bodyPr wrap="square" lIns="0" tIns="0" rIns="0" bIns="0" rtlCol="0" anchor="ctr"/>
-          <a:lstStyle/>
-          <a:p>
-            <a:pPr indent="0" marL="0">
-              <a:buNone/>
-            </a:pPr>
-            <a:r>
-              <a:rPr lang="en-US" sz="1350" dirty="0">
-                <a:solidFill>
-                  <a:srgbClr val="64748B"/>
-                </a:solidFill>
-                <a:latin typeface="Arial" pitchFamily="34" charset="0"/>
-                <a:ea typeface="Arial" pitchFamily="34" charset="-122"/>
-                <a:cs typeface="Arial" pitchFamily="34" charset="-120"/>
-              </a:rPr>
-              <a:t>Las bases compradas no tienen contexto ni urgencia: la persona no sabe por qué la llaman.</a:t>
-            </a:r>
-            <a:endParaRPr lang="en-US" sz="1350" dirty="0"/>
-          </a:p>
-        </p:txBody>
-      </p:sp>
-      <p:sp>
-        <p:nvSpPr>
-          <p:cNvPr id="11" name="Shape 7"/>
-          <p:cNvSpPr/>
-          <p:nvPr/>
-        </p:nvSpPr>
-        <p:spPr>
-          <a:xfrm>
-            <a:off x="548640" y="4251960"/>
-            <a:ext cx="475488" cy="475488"/>
-          </a:xfrm>
-          <a:prstGeom prst="roundRect">
-            <a:avLst>
-              <a:gd name="adj" fmla="val 23077"/>
-            </a:avLst>
-          </a:prstGeom>
-          <a:solidFill>
-            <a:srgbClr val="EFF6FF"/>
-          </a:solidFill>
-          <a:ln/>
-        </p:spPr>
-      </p:sp>
-      <p:pic>
-        <p:nvPicPr>
-          <p:cNvPr id="12" name="Image 2" descr="/tmp/deck/icon-clock-blue.png">    </p:cNvPr>
+          <p:cNvPr id="4" name="Image 0" descr="/tmp/deck/icon-dollar-blue.png"/>
           <p:cNvPicPr>
             <a:picLocks noChangeAspect="1"/>
           </p:cNvPicPr>
@@ -4115,6 +3756,268 @@
         </p:blipFill>
         <p:spPr>
           <a:xfrm>
+            <a:off x="653247" y="1704807"/>
+            <a:ext cx="266273" cy="266273"/>
+          </a:xfrm>
+          <a:prstGeom prst="rect">
+            <a:avLst/>
+          </a:prstGeom>
+        </p:spPr>
+      </p:pic>
+      <p:sp>
+        <p:nvSpPr>
+          <p:cNvPr id="5" name="Text 2"/>
+          <p:cNvSpPr/>
+          <p:nvPr/>
+        </p:nvSpPr>
+        <p:spPr>
+          <a:xfrm>
+            <a:off x="1234440" y="1545336"/>
+            <a:ext cx="5669280" cy="365760"/>
+          </a:xfrm>
+          <a:prstGeom prst="rect">
+            <a:avLst/>
+          </a:prstGeom>
+          <a:noFill/>
+          <a:ln/>
+        </p:spPr>
+        <p:txBody>
+          <a:bodyPr wrap="square" lIns="0" tIns="0" rIns="0" bIns="0" rtlCol="0" anchor="ctr"/>
+          <a:lstStyle/>
+          <a:p>
+            <a:pPr marL="0" indent="0">
+              <a:buNone/>
+            </a:pPr>
+            <a:r>
+              <a:rPr lang="en-US" sz="1700" b="1" dirty="0">
+                <a:solidFill>
+                  <a:srgbClr val="0F172A"/>
+                </a:solidFill>
+                <a:latin typeface="Arial" pitchFamily="34" charset="0"/>
+                <a:ea typeface="Arial" pitchFamily="34" charset="-122"/>
+                <a:cs typeface="Arial" pitchFamily="34" charset="-120"/>
+              </a:rPr>
+              <a:t>Adquisición cara</a:t>
+            </a:r>
+            <a:endParaRPr lang="en-US" sz="1700" dirty="0"/>
+          </a:p>
+        </p:txBody>
+      </p:sp>
+      <p:sp>
+        <p:nvSpPr>
+          <p:cNvPr id="6" name="Text 3"/>
+          <p:cNvSpPr/>
+          <p:nvPr/>
+        </p:nvSpPr>
+        <p:spPr>
+          <a:xfrm>
+            <a:off x="1234440" y="1892808"/>
+            <a:ext cx="5669280" cy="777240"/>
+          </a:xfrm>
+          <a:prstGeom prst="rect">
+            <a:avLst/>
+          </a:prstGeom>
+          <a:noFill/>
+          <a:ln/>
+        </p:spPr>
+        <p:txBody>
+          <a:bodyPr wrap="square" lIns="0" tIns="0" rIns="0" bIns="0" rtlCol="0" anchor="ctr"/>
+          <a:lstStyle/>
+          <a:p>
+            <a:pPr marL="0" indent="0">
+              <a:buNone/>
+            </a:pPr>
+            <a:r>
+              <a:rPr lang="en-US" sz="1350" dirty="0">
+                <a:solidFill>
+                  <a:srgbClr val="64748B"/>
+                </a:solidFill>
+                <a:latin typeface="Arial" pitchFamily="34" charset="0"/>
+                <a:ea typeface="Arial" pitchFamily="34" charset="-122"/>
+                <a:cs typeface="Arial" pitchFamily="34" charset="-120"/>
+              </a:rPr>
+              <a:t>Un lead de finanzas en LATAM cuesta USD 20–40 en pauta digital, y el costo sube todos los años.</a:t>
+            </a:r>
+            <a:endParaRPr lang="en-US" sz="1350" dirty="0"/>
+          </a:p>
+        </p:txBody>
+      </p:sp>
+      <p:sp>
+        <p:nvSpPr>
+          <p:cNvPr id="7" name="Shape 4"/>
+          <p:cNvSpPr/>
+          <p:nvPr/>
+        </p:nvSpPr>
+        <p:spPr>
+          <a:xfrm>
+            <a:off x="548640" y="2926080"/>
+            <a:ext cx="475488" cy="475488"/>
+          </a:xfrm>
+          <a:prstGeom prst="roundRect">
+            <a:avLst>
+              <a:gd name="adj" fmla="val 23077"/>
+            </a:avLst>
+          </a:prstGeom>
+          <a:solidFill>
+            <a:srgbClr val="EFF6FF"/>
+          </a:solidFill>
+          <a:ln/>
+        </p:spPr>
+        <p:txBody>
+          <a:bodyPr/>
+          <a:lstStyle/>
+          <a:p>
+            <a:endParaRPr lang="es-AR"/>
+          </a:p>
+        </p:txBody>
+      </p:sp>
+      <p:pic>
+        <p:nvPicPr>
+          <p:cNvPr id="8" name="Image 1" descr="/tmp/deck/icon-snow-blue.png"/>
+          <p:cNvPicPr>
+            <a:picLocks noChangeAspect="1"/>
+          </p:cNvPicPr>
+          <p:nvPr/>
+        </p:nvPicPr>
+        <p:blipFill>
+          <a:blip r:embed="rId4"/>
+          <a:stretch>
+            <a:fillRect/>
+          </a:stretch>
+        </p:blipFill>
+        <p:spPr>
+          <a:xfrm>
+            <a:off x="653247" y="3030687"/>
+            <a:ext cx="266273" cy="266273"/>
+          </a:xfrm>
+          <a:prstGeom prst="rect">
+            <a:avLst/>
+          </a:prstGeom>
+        </p:spPr>
+      </p:pic>
+      <p:sp>
+        <p:nvSpPr>
+          <p:cNvPr id="9" name="Text 5"/>
+          <p:cNvSpPr/>
+          <p:nvPr/>
+        </p:nvSpPr>
+        <p:spPr>
+          <a:xfrm>
+            <a:off x="1234440" y="2871216"/>
+            <a:ext cx="5669280" cy="365760"/>
+          </a:xfrm>
+          <a:prstGeom prst="rect">
+            <a:avLst/>
+          </a:prstGeom>
+          <a:noFill/>
+          <a:ln/>
+        </p:spPr>
+        <p:txBody>
+          <a:bodyPr wrap="square" lIns="0" tIns="0" rIns="0" bIns="0" rtlCol="0" anchor="ctr"/>
+          <a:lstStyle/>
+          <a:p>
+            <a:pPr marL="0" indent="0">
+              <a:buNone/>
+            </a:pPr>
+            <a:r>
+              <a:rPr lang="en-US" sz="1700" b="1" dirty="0">
+                <a:solidFill>
+                  <a:srgbClr val="0F172A"/>
+                </a:solidFill>
+                <a:latin typeface="Arial" pitchFamily="34" charset="0"/>
+                <a:ea typeface="Arial" pitchFamily="34" charset="-122"/>
+                <a:cs typeface="Arial" pitchFamily="34" charset="-120"/>
+              </a:rPr>
+              <a:t>Leads fríos</a:t>
+            </a:r>
+            <a:endParaRPr lang="en-US" sz="1700" dirty="0"/>
+          </a:p>
+        </p:txBody>
+      </p:sp>
+      <p:sp>
+        <p:nvSpPr>
+          <p:cNvPr id="10" name="Text 6"/>
+          <p:cNvSpPr/>
+          <p:nvPr/>
+        </p:nvSpPr>
+        <p:spPr>
+          <a:xfrm>
+            <a:off x="1234440" y="3218688"/>
+            <a:ext cx="5669280" cy="777240"/>
+          </a:xfrm>
+          <a:prstGeom prst="rect">
+            <a:avLst/>
+          </a:prstGeom>
+          <a:noFill/>
+          <a:ln/>
+        </p:spPr>
+        <p:txBody>
+          <a:bodyPr wrap="square" lIns="0" tIns="0" rIns="0" bIns="0" rtlCol="0" anchor="ctr"/>
+          <a:lstStyle/>
+          <a:p>
+            <a:pPr marL="0" indent="0">
+              <a:buNone/>
+            </a:pPr>
+            <a:r>
+              <a:rPr lang="en-US" sz="1350" dirty="0">
+                <a:solidFill>
+                  <a:srgbClr val="64748B"/>
+                </a:solidFill>
+                <a:latin typeface="Arial" pitchFamily="34" charset="0"/>
+                <a:ea typeface="Arial" pitchFamily="34" charset="-122"/>
+                <a:cs typeface="Arial" pitchFamily="34" charset="-120"/>
+              </a:rPr>
+              <a:t>Las bases compradas no tienen contexto ni urgencia: la persona no sabe por qué la llaman.</a:t>
+            </a:r>
+            <a:endParaRPr lang="en-US" sz="1350" dirty="0"/>
+          </a:p>
+        </p:txBody>
+      </p:sp>
+      <p:sp>
+        <p:nvSpPr>
+          <p:cNvPr id="11" name="Shape 7"/>
+          <p:cNvSpPr/>
+          <p:nvPr/>
+        </p:nvSpPr>
+        <p:spPr>
+          <a:xfrm>
+            <a:off x="548640" y="4251960"/>
+            <a:ext cx="475488" cy="475488"/>
+          </a:xfrm>
+          <a:prstGeom prst="roundRect">
+            <a:avLst>
+              <a:gd name="adj" fmla="val 23077"/>
+            </a:avLst>
+          </a:prstGeom>
+          <a:solidFill>
+            <a:srgbClr val="EFF6FF"/>
+          </a:solidFill>
+          <a:ln/>
+        </p:spPr>
+        <p:txBody>
+          <a:bodyPr/>
+          <a:lstStyle/>
+          <a:p>
+            <a:endParaRPr lang="es-AR"/>
+          </a:p>
+        </p:txBody>
+      </p:sp>
+      <p:pic>
+        <p:nvPicPr>
+          <p:cNvPr id="12" name="Image 2" descr="/tmp/deck/icon-clock-blue.png"/>
+          <p:cNvPicPr>
+            <a:picLocks noChangeAspect="1"/>
+          </p:cNvPicPr>
+          <p:nvPr/>
+        </p:nvPicPr>
+        <p:blipFill>
+          <a:blip r:embed="rId5"/>
+          <a:stretch>
+            <a:fillRect/>
+          </a:stretch>
+        </p:blipFill>
+        <p:spPr>
+          <a:xfrm>
             <a:off x="653247" y="4356567"/>
             <a:ext cx="266273" cy="266273"/>
           </a:xfrm>
@@ -4144,7 +4047,7 @@
           <a:bodyPr wrap="square" lIns="0" tIns="0" rIns="0" bIns="0" rtlCol="0" anchor="ctr"/>
           <a:lstStyle/>
           <a:p>
-            <a:pPr indent="0" marL="0">
+            <a:pPr marL="0" indent="0">
               <a:buNone/>
             </a:pPr>
             <a:r>
@@ -4183,7 +4086,7 @@
           <a:bodyPr wrap="square" lIns="0" tIns="0" rIns="0" bIns="0" rtlCol="0" anchor="ctr"/>
           <a:lstStyle/>
           <a:p>
-            <a:pPr indent="0" marL="0">
+            <a:pPr marL="0" indent="0">
               <a:buNone/>
             </a:pPr>
             <a:r>
@@ -4222,6 +4125,13 @@
           </a:solidFill>
           <a:ln/>
         </p:spPr>
+        <p:txBody>
+          <a:bodyPr/>
+          <a:lstStyle/>
+          <a:p>
+            <a:endParaRPr lang="es-AR"/>
+          </a:p>
+        </p:txBody>
       </p:sp>
       <p:sp>
         <p:nvSpPr>
@@ -4244,7 +4154,7 @@
           <a:bodyPr wrap="square" lIns="0" tIns="0" rIns="0" bIns="0" rtlCol="0" anchor="ctr"/>
           <a:lstStyle/>
           <a:p>
-            <a:pPr algn="ctr" indent="0" marL="0">
+            <a:pPr marL="0" indent="0" algn="ctr">
               <a:buNone/>
             </a:pPr>
             <a:r>
@@ -4283,7 +4193,7 @@
           <a:bodyPr wrap="square" lIns="0" tIns="0" rIns="0" bIns="0" rtlCol="0" anchor="ctr"/>
           <a:lstStyle/>
           <a:p>
-            <a:pPr algn="ctr" indent="0" marL="0">
+            <a:pPr marL="0" indent="0" algn="ctr">
               <a:buNone/>
             </a:pPr>
             <a:r>
@@ -4322,7 +4232,7 @@
           <a:bodyPr wrap="square" lIns="0" tIns="0" rIns="0" bIns="0" rtlCol="0" anchor="ctr"/>
           <a:lstStyle/>
           <a:p>
-            <a:pPr algn="ctr" indent="0" marL="0">
+            <a:pPr marL="0" indent="0" algn="ctr">
               <a:buNone/>
             </a:pPr>
             <a:r>
@@ -4361,7 +4271,7 @@
           <a:bodyPr wrap="square" lIns="0" tIns="0" rIns="0" bIns="0" rtlCol="0" anchor="ctr"/>
           <a:lstStyle/>
           <a:p>
-            <a:pPr indent="0" marL="0">
+            <a:pPr marL="0" indent="0">
               <a:buNone/>
             </a:pPr>
             <a:r>
@@ -4400,7 +4310,7 @@
           <a:bodyPr wrap="square" lIns="0" tIns="0" rIns="0" bIns="0" rtlCol="0" anchor="ctr"/>
           <a:lstStyle/>
           <a:p>
-            <a:pPr indent="0" marL="0">
+            <a:pPr marL="0" indent="0">
               <a:buNone/>
             </a:pPr>
             <a:r>
@@ -4439,7 +4349,7 @@
           <a:bodyPr wrap="square" lIns="0" tIns="0" rIns="0" bIns="0" rtlCol="0" anchor="ctr"/>
           <a:lstStyle/>
           <a:p>
-            <a:pPr algn="r" indent="0" marL="0">
+            <a:pPr marL="0" indent="0" algn="r">
               <a:buNone/>
             </a:pPr>
             <a:r>
@@ -4473,6 +4383,7 @@
         <a:solidFill>
           <a:srgbClr val="FFFFFF"/>
         </a:solidFill>
+        <a:effectLst/>
       </p:bgPr>
     </p:bg>
     <p:spTree>
@@ -4510,7 +4421,7 @@
           <a:bodyPr wrap="square" lIns="0" tIns="0" rIns="0" bIns="0" rtlCol="0" anchor="ctr"/>
           <a:lstStyle/>
           <a:p>
-            <a:pPr indent="0" marL="0">
+            <a:pPr marL="0" indent="0">
               <a:buNone/>
             </a:pPr>
             <a:r>
@@ -4549,180 +4460,17 @@
           </a:solidFill>
           <a:ln/>
         </p:spPr>
+        <p:txBody>
+          <a:bodyPr/>
+          <a:lstStyle/>
+          <a:p>
+            <a:endParaRPr lang="es-AR"/>
+          </a:p>
+        </p:txBody>
       </p:sp>
       <p:pic>
         <p:nvPicPr>
-          <p:cNvPr id="4" name="Image 0" descr="/tmp/deck/icon-check-blue.png">    </p:cNvPr>
-          <p:cNvPicPr>
-            <a:picLocks noChangeAspect="1"/>
-          </p:cNvPicPr>
-          <p:nvPr/>
-        </p:nvPicPr>
-        <p:blipFill>
-          <a:blip r:embed="rId1"/>
-          <a:stretch>
-            <a:fillRect/>
-          </a:stretch>
-        </p:blipFill>
-        <p:spPr>
-          <a:xfrm>
-            <a:off x="637154" y="1734434"/>
-            <a:ext cx="225308" cy="225308"/>
-          </a:xfrm>
-          <a:prstGeom prst="rect">
-            <a:avLst/>
-          </a:prstGeom>
-        </p:spPr>
-      </p:pic>
-      <p:sp>
-        <p:nvSpPr>
-          <p:cNvPr id="5" name="Text 2"/>
-          <p:cNvSpPr/>
-          <p:nvPr/>
-        </p:nvSpPr>
-        <p:spPr>
-          <a:xfrm>
-            <a:off x="1143000" y="1618488"/>
-            <a:ext cx="5394960" cy="777240"/>
-          </a:xfrm>
-          <a:prstGeom prst="rect">
-            <a:avLst/>
-          </a:prstGeom>
-          <a:noFill/>
-          <a:ln/>
-        </p:spPr>
-        <p:txBody>
-          <a:bodyPr wrap="square" lIns="0" tIns="0" rIns="0" bIns="0" rtlCol="0" anchor="ctr"/>
-          <a:lstStyle/>
-          <a:p>
-            <a:pPr indent="0" marL="0">
-              <a:buNone/>
-            </a:pPr>
-            <a:r>
-              <a:rPr lang="en-US" sz="1350" dirty="0">
-                <a:solidFill>
-                  <a:srgbClr val="0F172A"/>
-                </a:solidFill>
-                <a:latin typeface="Arial" pitchFamily="34" charset="0"/>
-                <a:ea typeface="Arial" pitchFamily="34" charset="-122"/>
-                <a:cs typeface="Arial" pitchFamily="34" charset="-120"/>
-              </a:rPr>
-              <a:t>Calculadora de retiro gratis, sin registro y sin tarjeta — cero fricción de entrada.</a:t>
-            </a:r>
-            <a:endParaRPr lang="en-US" sz="1350" dirty="0"/>
-          </a:p>
-        </p:txBody>
-      </p:sp>
-      <p:sp>
-        <p:nvSpPr>
-          <p:cNvPr id="6" name="Shape 3"/>
-          <p:cNvSpPr/>
-          <p:nvPr/>
-        </p:nvSpPr>
-        <p:spPr>
-          <a:xfrm>
-            <a:off x="548640" y="2578608"/>
-            <a:ext cx="402336" cy="402336"/>
-          </a:xfrm>
-          <a:prstGeom prst="roundRect">
-            <a:avLst>
-              <a:gd name="adj" fmla="val 27273"/>
-            </a:avLst>
-          </a:prstGeom>
-          <a:solidFill>
-            <a:srgbClr val="EFF6FF"/>
-          </a:solidFill>
-          <a:ln/>
-        </p:spPr>
-      </p:sp>
-      <p:pic>
-        <p:nvPicPr>
-          <p:cNvPr id="7" name="Image 1" descr="/tmp/deck/icon-bullseye-blue.png">    </p:cNvPr>
-          <p:cNvPicPr>
-            <a:picLocks noChangeAspect="1"/>
-          </p:cNvPicPr>
-          <p:nvPr/>
-        </p:nvPicPr>
-        <p:blipFill>
-          <a:blip r:embed="rId2"/>
-          <a:stretch>
-            <a:fillRect/>
-          </a:stretch>
-        </p:blipFill>
-        <p:spPr>
-          <a:xfrm>
-            <a:off x="637154" y="2667122"/>
-            <a:ext cx="225308" cy="225308"/>
-          </a:xfrm>
-          <a:prstGeom prst="rect">
-            <a:avLst/>
-          </a:prstGeom>
-        </p:spPr>
-      </p:pic>
-      <p:sp>
-        <p:nvSpPr>
-          <p:cNvPr id="8" name="Text 4"/>
-          <p:cNvSpPr/>
-          <p:nvPr/>
-        </p:nvSpPr>
-        <p:spPr>
-          <a:xfrm>
-            <a:off x="1143000" y="2551176"/>
-            <a:ext cx="5394960" cy="777240"/>
-          </a:xfrm>
-          <a:prstGeom prst="rect">
-            <a:avLst/>
-          </a:prstGeom>
-          <a:noFill/>
-          <a:ln/>
-        </p:spPr>
-        <p:txBody>
-          <a:bodyPr wrap="square" lIns="0" tIns="0" rIns="0" bIns="0" rtlCol="0" anchor="ctr"/>
-          <a:lstStyle/>
-          <a:p>
-            <a:pPr indent="0" marL="0">
-              <a:buNone/>
-            </a:pPr>
-            <a:r>
-              <a:rPr lang="en-US" sz="1350" dirty="0">
-                <a:solidFill>
-                  <a:srgbClr val="0F172A"/>
-                </a:solidFill>
-                <a:latin typeface="Arial" pitchFamily="34" charset="0"/>
-                <a:ea typeface="Arial" pitchFamily="34" charset="-122"/>
-                <a:cs typeface="Arial" pitchFamily="34" charset="-120"/>
-              </a:rPr>
-              <a:t>Calcula el Magic Number: el capital exacto para retirarse, en dólares constantes.</a:t>
-            </a:r>
-            <a:endParaRPr lang="en-US" sz="1350" dirty="0"/>
-          </a:p>
-        </p:txBody>
-      </p:sp>
-      <p:sp>
-        <p:nvSpPr>
-          <p:cNvPr id="9" name="Shape 5"/>
-          <p:cNvSpPr/>
-          <p:nvPr/>
-        </p:nvSpPr>
-        <p:spPr>
-          <a:xfrm>
-            <a:off x="548640" y="3511296"/>
-            <a:ext cx="402336" cy="402336"/>
-          </a:xfrm>
-          <a:prstGeom prst="roundRect">
-            <a:avLst>
-              <a:gd name="adj" fmla="val 27273"/>
-            </a:avLst>
-          </a:prstGeom>
-          <a:solidFill>
-            <a:srgbClr val="EFF6FF"/>
-          </a:solidFill>
-          <a:ln/>
-        </p:spPr>
-      </p:sp>
-      <p:pic>
-        <p:nvPicPr>
-          <p:cNvPr id="10" name="Image 2" descr="/tmp/deck/icon-chart-blue.png">    </p:cNvPr>
+          <p:cNvPr id="4" name="Image 0" descr="/tmp/deck/icon-check-blue.png"/>
           <p:cNvPicPr>
             <a:picLocks noChangeAspect="1"/>
           </p:cNvPicPr>
@@ -4736,7 +4484,7 @@
         </p:blipFill>
         <p:spPr>
           <a:xfrm>
-            <a:off x="637154" y="3599810"/>
+            <a:off x="637154" y="1734434"/>
             <a:ext cx="225308" cy="225308"/>
           </a:xfrm>
           <a:prstGeom prst="rect">
@@ -4746,13 +4494,13 @@
       </p:pic>
       <p:sp>
         <p:nvSpPr>
-          <p:cNvPr id="11" name="Text 6"/>
-          <p:cNvSpPr/>
-          <p:nvPr/>
-        </p:nvSpPr>
-        <p:spPr>
-          <a:xfrm>
-            <a:off x="1143000" y="3483864"/>
+          <p:cNvPr id="5" name="Text 2"/>
+          <p:cNvSpPr/>
+          <p:nvPr/>
+        </p:nvSpPr>
+        <p:spPr>
+          <a:xfrm>
+            <a:off x="1143000" y="1618488"/>
             <a:ext cx="5394960" cy="777240"/>
           </a:xfrm>
           <a:prstGeom prst="rect">
@@ -4765,7 +4513,7 @@
           <a:bodyPr wrap="square" lIns="0" tIns="0" rIns="0" bIns="0" rtlCol="0" anchor="ctr"/>
           <a:lstStyle/>
           <a:p>
-            <a:pPr indent="0" marL="0">
+            <a:pPr marL="0" indent="0">
               <a:buNone/>
             </a:pPr>
             <a:r>
@@ -4777,7 +4525,7 @@
                 <a:ea typeface="Arial" pitchFamily="34" charset="-122"/>
                 <a:cs typeface="Arial" pitchFamily="34" charset="-120"/>
               </a:rPr>
-              <a:t>Muestra la brecha, el costo de esperar y un simulador interactivo de escenarios.</a:t>
+              <a:t>Calculadora de retiro gratis, sin registro y sin tarjeta — cero fricción de entrada.</a:t>
             </a:r>
             <a:endParaRPr lang="en-US" sz="1350" dirty="0"/>
           </a:p>
@@ -4785,13 +4533,13 @@
       </p:sp>
       <p:sp>
         <p:nvSpPr>
-          <p:cNvPr id="12" name="Shape 7"/>
-          <p:cNvSpPr/>
-          <p:nvPr/>
-        </p:nvSpPr>
-        <p:spPr>
-          <a:xfrm>
-            <a:off x="548640" y="4443984"/>
+          <p:cNvPr id="6" name="Shape 3"/>
+          <p:cNvSpPr/>
+          <p:nvPr/>
+        </p:nvSpPr>
+        <p:spPr>
+          <a:xfrm>
+            <a:off x="548640" y="2578608"/>
             <a:ext cx="402336" cy="402336"/>
           </a:xfrm>
           <a:prstGeom prst="roundRect">
@@ -4804,10 +4552,17 @@
           </a:solidFill>
           <a:ln/>
         </p:spPr>
+        <p:txBody>
+          <a:bodyPr/>
+          <a:lstStyle/>
+          <a:p>
+            <a:endParaRPr lang="es-AR"/>
+          </a:p>
+        </p:txBody>
       </p:sp>
       <p:pic>
         <p:nvPicPr>
-          <p:cNvPr id="13" name="Image 3" descr="/tmp/deck/icon-invoice-blue.png">    </p:cNvPr>
+          <p:cNvPr id="7" name="Image 1" descr="/tmp/deck/icon-bullseye-blue.png"/>
           <p:cNvPicPr>
             <a:picLocks noChangeAspect="1"/>
           </p:cNvPicPr>
@@ -4821,7 +4576,7 @@
         </p:blipFill>
         <p:spPr>
           <a:xfrm>
-            <a:off x="637154" y="4532498"/>
+            <a:off x="637154" y="2667122"/>
             <a:ext cx="225308" cy="225308"/>
           </a:xfrm>
           <a:prstGeom prst="rect">
@@ -4831,13 +4586,13 @@
       </p:pic>
       <p:sp>
         <p:nvSpPr>
-          <p:cNvPr id="14" name="Text 8"/>
-          <p:cNvSpPr/>
-          <p:nvPr/>
-        </p:nvSpPr>
-        <p:spPr>
-          <a:xfrm>
-            <a:off x="1143000" y="4416552"/>
+          <p:cNvPr id="8" name="Text 4"/>
+          <p:cNvSpPr/>
+          <p:nvPr/>
+        </p:nvSpPr>
+        <p:spPr>
+          <a:xfrm>
+            <a:off x="1143000" y="2551176"/>
             <a:ext cx="5394960" cy="777240"/>
           </a:xfrm>
           <a:prstGeom prst="rect">
@@ -4850,7 +4605,7 @@
           <a:bodyPr wrap="square" lIns="0" tIns="0" rIns="0" bIns="0" rtlCol="0" anchor="ctr"/>
           <a:lstStyle/>
           <a:p>
-            <a:pPr indent="0" marL="0">
+            <a:pPr marL="0" indent="0">
               <a:buNone/>
             </a:pPr>
             <a:r>
@@ -4862,7 +4617,7 @@
                 <a:ea typeface="Arial" pitchFamily="34" charset="-122"/>
                 <a:cs typeface="Arial" pitchFamily="34" charset="-120"/>
               </a:rPr>
-              <a:t>Freemium: informe premium en PDF por USD 3,99 — el usuario que paga es el más comprometido.</a:t>
+              <a:t>Calcula el Magic Number: el capital exacto para retirarse, en dólares constantes.</a:t>
             </a:r>
             <a:endParaRPr lang="en-US" sz="1350" dirty="0"/>
           </a:p>
@@ -4870,46 +4625,36 @@
       </p:sp>
       <p:sp>
         <p:nvSpPr>
-          <p:cNvPr id="15" name="Text 9"/>
-          <p:cNvSpPr/>
-          <p:nvPr/>
-        </p:nvSpPr>
-        <p:spPr>
-          <a:xfrm>
-            <a:off x="548640" y="5577840"/>
-            <a:ext cx="5943600" cy="365760"/>
-          </a:xfrm>
-          <a:prstGeom prst="rect">
-            <a:avLst/>
-          </a:prstGeom>
-          <a:noFill/>
-          <a:ln/>
-        </p:spPr>
-        <p:txBody>
-          <a:bodyPr wrap="square" lIns="0" tIns="0" rIns="0" bIns="0" rtlCol="0" anchor="ctr"/>
-          <a:lstStyle/>
-          <a:p>
-            <a:pPr indent="0" marL="0">
-              <a:buNone/>
-            </a:pPr>
-            <a:r>
-              <a:rPr lang="en-US" sz="1300" b="1" dirty="0">
-                <a:solidFill>
-                  <a:srgbClr val="3B82F6"/>
-                </a:solidFill>
-                <a:latin typeface="Arial" pitchFamily="34" charset="0"/>
-                <a:ea typeface="Arial" pitchFamily="34" charset="-122"/>
-                <a:cs typeface="Arial" pitchFamily="34" charset="-120"/>
-              </a:rPr>
-              <a:t>En producción hoy: magic-number.app · Español e inglés</a:t>
-            </a:r>
-            <a:endParaRPr lang="en-US" sz="1300" dirty="0"/>
+          <p:cNvPr id="9" name="Shape 5"/>
+          <p:cNvSpPr/>
+          <p:nvPr/>
+        </p:nvSpPr>
+        <p:spPr>
+          <a:xfrm>
+            <a:off x="548640" y="3511296"/>
+            <a:ext cx="402336" cy="402336"/>
+          </a:xfrm>
+          <a:prstGeom prst="roundRect">
+            <a:avLst>
+              <a:gd name="adj" fmla="val 27273"/>
+            </a:avLst>
+          </a:prstGeom>
+          <a:solidFill>
+            <a:srgbClr val="EFF6FF"/>
+          </a:solidFill>
+          <a:ln/>
+        </p:spPr>
+        <p:txBody>
+          <a:bodyPr/>
+          <a:lstStyle/>
+          <a:p>
+            <a:endParaRPr lang="es-AR"/>
           </a:p>
         </p:txBody>
       </p:sp>
       <p:pic>
         <p:nvPicPr>
-          <p:cNvPr id="16" name="Image 4" descr="/tmp/og-image.png">    </p:cNvPr>
+          <p:cNvPr id="10" name="Image 2" descr="/tmp/deck/icon-chart-blue.png"/>
           <p:cNvPicPr>
             <a:picLocks noChangeAspect="1"/>
           </p:cNvPicPr>
@@ -4923,6 +4668,200 @@
         </p:blipFill>
         <p:spPr>
           <a:xfrm>
+            <a:off x="637154" y="3599810"/>
+            <a:ext cx="225308" cy="225308"/>
+          </a:xfrm>
+          <a:prstGeom prst="rect">
+            <a:avLst/>
+          </a:prstGeom>
+        </p:spPr>
+      </p:pic>
+      <p:sp>
+        <p:nvSpPr>
+          <p:cNvPr id="11" name="Text 6"/>
+          <p:cNvSpPr/>
+          <p:nvPr/>
+        </p:nvSpPr>
+        <p:spPr>
+          <a:xfrm>
+            <a:off x="1143000" y="3483864"/>
+            <a:ext cx="5394960" cy="777240"/>
+          </a:xfrm>
+          <a:prstGeom prst="rect">
+            <a:avLst/>
+          </a:prstGeom>
+          <a:noFill/>
+          <a:ln/>
+        </p:spPr>
+        <p:txBody>
+          <a:bodyPr wrap="square" lIns="0" tIns="0" rIns="0" bIns="0" rtlCol="0" anchor="ctr"/>
+          <a:lstStyle/>
+          <a:p>
+            <a:pPr marL="0" indent="0">
+              <a:buNone/>
+            </a:pPr>
+            <a:r>
+              <a:rPr lang="en-US" sz="1350" dirty="0">
+                <a:solidFill>
+                  <a:srgbClr val="0F172A"/>
+                </a:solidFill>
+                <a:latin typeface="Arial" pitchFamily="34" charset="0"/>
+                <a:ea typeface="Arial" pitchFamily="34" charset="-122"/>
+                <a:cs typeface="Arial" pitchFamily="34" charset="-120"/>
+              </a:rPr>
+              <a:t>Muestra la brecha, el costo de esperar y un simulador interactivo de escenarios.</a:t>
+            </a:r>
+            <a:endParaRPr lang="en-US" sz="1350" dirty="0"/>
+          </a:p>
+        </p:txBody>
+      </p:sp>
+      <p:sp>
+        <p:nvSpPr>
+          <p:cNvPr id="12" name="Shape 7"/>
+          <p:cNvSpPr/>
+          <p:nvPr/>
+        </p:nvSpPr>
+        <p:spPr>
+          <a:xfrm>
+            <a:off x="548640" y="4443984"/>
+            <a:ext cx="402336" cy="402336"/>
+          </a:xfrm>
+          <a:prstGeom prst="roundRect">
+            <a:avLst>
+              <a:gd name="adj" fmla="val 27273"/>
+            </a:avLst>
+          </a:prstGeom>
+          <a:solidFill>
+            <a:srgbClr val="EFF6FF"/>
+          </a:solidFill>
+          <a:ln/>
+        </p:spPr>
+        <p:txBody>
+          <a:bodyPr/>
+          <a:lstStyle/>
+          <a:p>
+            <a:endParaRPr lang="es-AR"/>
+          </a:p>
+        </p:txBody>
+      </p:sp>
+      <p:pic>
+        <p:nvPicPr>
+          <p:cNvPr id="13" name="Image 3" descr="/tmp/deck/icon-invoice-blue.png"/>
+          <p:cNvPicPr>
+            <a:picLocks noChangeAspect="1"/>
+          </p:cNvPicPr>
+          <p:nvPr/>
+        </p:nvPicPr>
+        <p:blipFill>
+          <a:blip r:embed="rId6"/>
+          <a:stretch>
+            <a:fillRect/>
+          </a:stretch>
+        </p:blipFill>
+        <p:spPr>
+          <a:xfrm>
+            <a:off x="637154" y="4532498"/>
+            <a:ext cx="225308" cy="225308"/>
+          </a:xfrm>
+          <a:prstGeom prst="rect">
+            <a:avLst/>
+          </a:prstGeom>
+        </p:spPr>
+      </p:pic>
+      <p:sp>
+        <p:nvSpPr>
+          <p:cNvPr id="14" name="Text 8"/>
+          <p:cNvSpPr/>
+          <p:nvPr/>
+        </p:nvSpPr>
+        <p:spPr>
+          <a:xfrm>
+            <a:off x="1143000" y="4416552"/>
+            <a:ext cx="5394960" cy="777240"/>
+          </a:xfrm>
+          <a:prstGeom prst="rect">
+            <a:avLst/>
+          </a:prstGeom>
+          <a:noFill/>
+          <a:ln/>
+        </p:spPr>
+        <p:txBody>
+          <a:bodyPr wrap="square" lIns="0" tIns="0" rIns="0" bIns="0" rtlCol="0" anchor="ctr"/>
+          <a:lstStyle/>
+          <a:p>
+            <a:pPr marL="0" indent="0">
+              <a:buNone/>
+            </a:pPr>
+            <a:r>
+              <a:rPr lang="en-US" sz="1350" dirty="0">
+                <a:solidFill>
+                  <a:srgbClr val="0F172A"/>
+                </a:solidFill>
+                <a:latin typeface="Arial" pitchFamily="34" charset="0"/>
+                <a:ea typeface="Arial" pitchFamily="34" charset="-122"/>
+                <a:cs typeface="Arial" pitchFamily="34" charset="-120"/>
+              </a:rPr>
+              <a:t>Freemium: informe premium en PDF por USD 3,99 — el usuario que paga es el más comprometido.</a:t>
+            </a:r>
+            <a:endParaRPr lang="en-US" sz="1350" dirty="0"/>
+          </a:p>
+        </p:txBody>
+      </p:sp>
+      <p:sp>
+        <p:nvSpPr>
+          <p:cNvPr id="15" name="Text 9"/>
+          <p:cNvSpPr/>
+          <p:nvPr/>
+        </p:nvSpPr>
+        <p:spPr>
+          <a:xfrm>
+            <a:off x="548640" y="5577840"/>
+            <a:ext cx="5943600" cy="365760"/>
+          </a:xfrm>
+          <a:prstGeom prst="rect">
+            <a:avLst/>
+          </a:prstGeom>
+          <a:noFill/>
+          <a:ln/>
+        </p:spPr>
+        <p:txBody>
+          <a:bodyPr wrap="square" lIns="0" tIns="0" rIns="0" bIns="0" rtlCol="0" anchor="ctr"/>
+          <a:lstStyle/>
+          <a:p>
+            <a:pPr marL="0" indent="0">
+              <a:buNone/>
+            </a:pPr>
+            <a:r>
+              <a:rPr lang="en-US" sz="1300" b="1" dirty="0">
+                <a:solidFill>
+                  <a:srgbClr val="3B82F6"/>
+                </a:solidFill>
+                <a:latin typeface="Arial" pitchFamily="34" charset="0"/>
+                <a:ea typeface="Arial" pitchFamily="34" charset="-122"/>
+                <a:cs typeface="Arial" pitchFamily="34" charset="-120"/>
+              </a:rPr>
+              <a:t>En producción hoy: magic-number.app · Español e inglés</a:t>
+            </a:r>
+            <a:endParaRPr lang="en-US" sz="1300" dirty="0"/>
+          </a:p>
+        </p:txBody>
+      </p:sp>
+      <p:pic>
+        <p:nvPicPr>
+          <p:cNvPr id="16" name="Image 4" descr="/tmp/og-image.png"/>
+          <p:cNvPicPr>
+            <a:picLocks noChangeAspect="1"/>
+          </p:cNvPicPr>
+          <p:nvPr/>
+        </p:nvPicPr>
+        <p:blipFill>
+          <a:blip r:embed="rId7"/>
+          <a:stretch>
+            <a:fillRect/>
+          </a:stretch>
+        </p:blipFill>
+        <p:spPr>
+          <a:xfrm>
             <a:off x="6720840" y="1691640"/>
             <a:ext cx="4892040" cy="2569464"/>
           </a:xfrm>
@@ -4952,6 +4891,13 @@
           </a:solidFill>
           <a:ln/>
         </p:spPr>
+        <p:txBody>
+          <a:bodyPr/>
+          <a:lstStyle/>
+          <a:p>
+            <a:endParaRPr lang="es-AR"/>
+          </a:p>
+        </p:txBody>
       </p:sp>
       <p:sp>
         <p:nvSpPr>
@@ -4974,7 +4920,7 @@
           <a:bodyPr wrap="square" lIns="0" tIns="0" rIns="0" bIns="0" rtlCol="0" anchor="ctr"/>
           <a:lstStyle/>
           <a:p>
-            <a:pPr algn="ctr" indent="0" marL="0">
+            <a:pPr marL="0" indent="0" algn="ctr">
               <a:buNone/>
             </a:pPr>
             <a:r>
@@ -5013,7 +4959,7 @@
           <a:bodyPr wrap="square" lIns="0" tIns="0" rIns="0" bIns="0" rtlCol="0" anchor="ctr"/>
           <a:lstStyle/>
           <a:p>
-            <a:pPr algn="ctr" indent="0" marL="0">
+            <a:pPr marL="0" indent="0" algn="ctr">
               <a:buNone/>
             </a:pPr>
             <a:r>
@@ -5052,7 +4998,7 @@
           <a:bodyPr wrap="square" lIns="0" tIns="0" rIns="0" bIns="0" rtlCol="0" anchor="ctr"/>
           <a:lstStyle/>
           <a:p>
-            <a:pPr algn="ctr" indent="0" marL="0">
+            <a:pPr marL="0" indent="0" algn="ctr">
               <a:buNone/>
             </a:pPr>
             <a:r>
@@ -5091,7 +5037,7 @@
           <a:bodyPr wrap="square" lIns="0" tIns="0" rIns="0" bIns="0" rtlCol="0" anchor="ctr"/>
           <a:lstStyle/>
           <a:p>
-            <a:pPr algn="ctr" indent="0" marL="0">
+            <a:pPr marL="0" indent="0" algn="ctr">
               <a:buNone/>
             </a:pPr>
             <a:r>
@@ -5130,7 +5076,7 @@
           <a:bodyPr wrap="square" lIns="0" tIns="0" rIns="0" bIns="0" rtlCol="0" anchor="ctr"/>
           <a:lstStyle/>
           <a:p>
-            <a:pPr algn="ctr" indent="0" marL="0">
+            <a:pPr marL="0" indent="0" algn="ctr">
               <a:buNone/>
             </a:pPr>
             <a:r>
@@ -5169,7 +5115,7 @@
           <a:bodyPr wrap="square" lIns="0" tIns="0" rIns="0" bIns="0" rtlCol="0" anchor="ctr"/>
           <a:lstStyle/>
           <a:p>
-            <a:pPr algn="ctr" indent="0" marL="0">
+            <a:pPr marL="0" indent="0" algn="ctr">
               <a:buNone/>
             </a:pPr>
             <a:r>
@@ -5208,7 +5154,7 @@
           <a:bodyPr wrap="square" lIns="0" tIns="0" rIns="0" bIns="0" rtlCol="0" anchor="ctr"/>
           <a:lstStyle/>
           <a:p>
-            <a:pPr indent="0" marL="0">
+            <a:pPr marL="0" indent="0">
               <a:buNone/>
             </a:pPr>
             <a:r>
@@ -5247,7 +5193,7 @@
           <a:bodyPr wrap="square" lIns="0" tIns="0" rIns="0" bIns="0" rtlCol="0" anchor="ctr"/>
           <a:lstStyle/>
           <a:p>
-            <a:pPr algn="r" indent="0" marL="0">
+            <a:pPr marL="0" indent="0" algn="r">
               <a:buNone/>
             </a:pPr>
             <a:r>
@@ -5281,6 +5227,7 @@
         <a:solidFill>
           <a:srgbClr val="FFFFFF"/>
         </a:solidFill>
+        <a:effectLst/>
       </p:bgPr>
     </p:bg>
     <p:spTree>
@@ -5318,7 +5265,7 @@
           <a:bodyPr wrap="square" lIns="0" tIns="0" rIns="0" bIns="0" rtlCol="0" anchor="ctr"/>
           <a:lstStyle/>
           <a:p>
-            <a:pPr indent="0" marL="0">
+            <a:pPr marL="0" indent="0">
               <a:buNone/>
             </a:pPr>
             <a:r>
@@ -5338,14 +5285,14 @@
       </p:sp>
       <p:pic>
         <p:nvPicPr>
-          <p:cNvPr id="3" name="Image 0" descr="/tmp/hi-1.png">    </p:cNvPr>
+          <p:cNvPr id="3" name="Image 0" descr="/tmp/hi-1.png"/>
           <p:cNvPicPr>
             <a:picLocks noChangeAspect="1"/>
           </p:cNvPicPr>
           <p:nvPr/>
         </p:nvPicPr>
         <p:blipFill>
-          <a:blip r:embed="rId1"/>
+          <a:blip r:embed="rId3"/>
           <a:stretch>
             <a:fillRect/>
           </a:stretch>
@@ -5381,7 +5328,7 @@
           <a:bodyPr wrap="square" lIns="0" tIns="0" rIns="0" bIns="0" rtlCol="0" anchor="ctr"/>
           <a:lstStyle/>
           <a:p>
-            <a:pPr indent="0" marL="0">
+            <a:pPr marL="0" indent="0">
               <a:buNone/>
             </a:pPr>
             <a:r>
@@ -5547,6 +5494,13 @@
           </a:solidFill>
           <a:ln/>
         </p:spPr>
+        <p:txBody>
+          <a:bodyPr/>
+          <a:lstStyle/>
+          <a:p>
+            <a:endParaRPr lang="es-AR"/>
+          </a:p>
+        </p:txBody>
       </p:sp>
       <p:sp>
         <p:nvSpPr>
@@ -5569,7 +5523,7 @@
           <a:bodyPr wrap="square" lIns="0" tIns="0" rIns="0" bIns="0" rtlCol="0" anchor="ctr"/>
           <a:lstStyle/>
           <a:p>
-            <a:pPr indent="0" marL="0">
+            <a:pPr marL="0" indent="0">
               <a:buNone/>
             </a:pPr>
             <a:r>
@@ -5583,9 +5537,6 @@
               </a:rPr>
               <a:t>Cuando esta persona pide un asesor, ya vio su número, su brecha y su score. </a:t>
             </a:r>
-            <a:pPr indent="0" marL="0">
-              <a:buNone/>
-            </a:pPr>
             <a:r>
               <a:rPr lang="en-US" sz="1450" dirty="0">
                 <a:solidFill>
@@ -5622,7 +5573,7 @@
           <a:bodyPr wrap="square" lIns="0" tIns="0" rIns="0" bIns="0" rtlCol="0" anchor="ctr"/>
           <a:lstStyle/>
           <a:p>
-            <a:pPr indent="0" marL="0">
+            <a:pPr marL="0" indent="0">
               <a:buNone/>
             </a:pPr>
             <a:r>
@@ -5661,7 +5612,7 @@
           <a:bodyPr wrap="square" lIns="0" tIns="0" rIns="0" bIns="0" rtlCol="0" anchor="ctr"/>
           <a:lstStyle/>
           <a:p>
-            <a:pPr algn="r" indent="0" marL="0">
+            <a:pPr marL="0" indent="0" algn="r">
               <a:buNone/>
             </a:pPr>
             <a:r>
@@ -5695,6 +5646,7 @@
         <a:solidFill>
           <a:srgbClr val="FFFFFF"/>
         </a:solidFill>
+        <a:effectLst/>
       </p:bgPr>
     </p:bg>
     <p:spTree>
@@ -5732,7 +5684,7 @@
           <a:bodyPr wrap="square" lIns="0" tIns="0" rIns="0" bIns="0" rtlCol="0" anchor="ctr"/>
           <a:lstStyle/>
           <a:p>
-            <a:pPr indent="0" marL="0">
+            <a:pPr marL="0" indent="0">
               <a:buNone/>
             </a:pPr>
             <a:r>
@@ -5771,6 +5723,13 @@
           </a:solidFill>
           <a:ln/>
         </p:spPr>
+        <p:txBody>
+          <a:bodyPr/>
+          <a:lstStyle/>
+          <a:p>
+            <a:endParaRPr lang="es-AR"/>
+          </a:p>
+        </p:txBody>
       </p:sp>
       <p:sp>
         <p:nvSpPr>
@@ -5793,6 +5752,13 @@
           </a:solidFill>
           <a:ln/>
         </p:spPr>
+        <p:txBody>
+          <a:bodyPr/>
+          <a:lstStyle/>
+          <a:p>
+            <a:endParaRPr lang="es-AR"/>
+          </a:p>
+        </p:txBody>
       </p:sp>
       <p:sp>
         <p:nvSpPr>
@@ -5815,7 +5781,7 @@
           <a:bodyPr wrap="square" lIns="0" tIns="0" rIns="0" bIns="0" rtlCol="0" anchor="ctr"/>
           <a:lstStyle/>
           <a:p>
-            <a:pPr algn="ctr" indent="0" marL="0">
+            <a:pPr marL="0" indent="0" algn="ctr">
               <a:buNone/>
             </a:pPr>
             <a:r>
@@ -5854,7 +5820,7 @@
           <a:bodyPr wrap="square" lIns="0" tIns="0" rIns="0" bIns="0" rtlCol="0" anchor="ctr"/>
           <a:lstStyle/>
           <a:p>
-            <a:pPr indent="0" marL="0">
+            <a:pPr marL="0" indent="0">
               <a:buNone/>
             </a:pPr>
             <a:r>
@@ -5893,7 +5859,7 @@
           <a:bodyPr wrap="square" lIns="0" tIns="0" rIns="0" bIns="0" rtlCol="0" anchor="ctr"/>
           <a:lstStyle/>
           <a:p>
-            <a:pPr indent="0" marL="0">
+            <a:pPr marL="0" indent="0">
               <a:buNone/>
             </a:pPr>
             <a:r>
@@ -5932,7 +5898,7 @@
           <a:bodyPr wrap="square" lIns="0" tIns="0" rIns="0" bIns="0" rtlCol="0" anchor="ctr"/>
           <a:lstStyle/>
           <a:p>
-            <a:pPr algn="ctr" indent="0" marL="0">
+            <a:pPr marL="0" indent="0" algn="ctr">
               <a:buNone/>
             </a:pPr>
             <a:r>
@@ -5971,6 +5937,13 @@
           </a:solidFill>
           <a:ln/>
         </p:spPr>
+        <p:txBody>
+          <a:bodyPr/>
+          <a:lstStyle/>
+          <a:p>
+            <a:endParaRPr lang="es-AR"/>
+          </a:p>
+        </p:txBody>
       </p:sp>
       <p:sp>
         <p:nvSpPr>
@@ -5993,6 +5966,13 @@
           </a:solidFill>
           <a:ln/>
         </p:spPr>
+        <p:txBody>
+          <a:bodyPr/>
+          <a:lstStyle/>
+          <a:p>
+            <a:endParaRPr lang="es-AR"/>
+          </a:p>
+        </p:txBody>
       </p:sp>
       <p:sp>
         <p:nvSpPr>
@@ -6015,7 +5995,7 @@
           <a:bodyPr wrap="square" lIns="0" tIns="0" rIns="0" bIns="0" rtlCol="0" anchor="ctr"/>
           <a:lstStyle/>
           <a:p>
-            <a:pPr algn="ctr" indent="0" marL="0">
+            <a:pPr marL="0" indent="0" algn="ctr">
               <a:buNone/>
             </a:pPr>
             <a:r>
@@ -6054,7 +6034,7 @@
           <a:bodyPr wrap="square" lIns="0" tIns="0" rIns="0" bIns="0" rtlCol="0" anchor="ctr"/>
           <a:lstStyle/>
           <a:p>
-            <a:pPr indent="0" marL="0">
+            <a:pPr marL="0" indent="0">
               <a:buNone/>
             </a:pPr>
             <a:r>
@@ -6093,7 +6073,7 @@
           <a:bodyPr wrap="square" lIns="0" tIns="0" rIns="0" bIns="0" rtlCol="0" anchor="ctr"/>
           <a:lstStyle/>
           <a:p>
-            <a:pPr indent="0" marL="0">
+            <a:pPr marL="0" indent="0">
               <a:buNone/>
             </a:pPr>
             <a:r>
@@ -6132,7 +6112,7 @@
           <a:bodyPr wrap="square" lIns="0" tIns="0" rIns="0" bIns="0" rtlCol="0" anchor="ctr"/>
           <a:lstStyle/>
           <a:p>
-            <a:pPr algn="ctr" indent="0" marL="0">
+            <a:pPr marL="0" indent="0" algn="ctr">
               <a:buNone/>
             </a:pPr>
             <a:r>
@@ -6171,6 +6151,13 @@
           </a:solidFill>
           <a:ln/>
         </p:spPr>
+        <p:txBody>
+          <a:bodyPr/>
+          <a:lstStyle/>
+          <a:p>
+            <a:endParaRPr lang="es-AR"/>
+          </a:p>
+        </p:txBody>
       </p:sp>
       <p:sp>
         <p:nvSpPr>
@@ -6193,6 +6180,13 @@
           </a:solidFill>
           <a:ln/>
         </p:spPr>
+        <p:txBody>
+          <a:bodyPr/>
+          <a:lstStyle/>
+          <a:p>
+            <a:endParaRPr lang="es-AR"/>
+          </a:p>
+        </p:txBody>
       </p:sp>
       <p:sp>
         <p:nvSpPr>
@@ -6215,7 +6209,7 @@
           <a:bodyPr wrap="square" lIns="0" tIns="0" rIns="0" bIns="0" rtlCol="0" anchor="ctr"/>
           <a:lstStyle/>
           <a:p>
-            <a:pPr algn="ctr" indent="0" marL="0">
+            <a:pPr marL="0" indent="0" algn="ctr">
               <a:buNone/>
             </a:pPr>
             <a:r>
@@ -6254,7 +6248,7 @@
           <a:bodyPr wrap="square" lIns="0" tIns="0" rIns="0" bIns="0" rtlCol="0" anchor="ctr"/>
           <a:lstStyle/>
           <a:p>
-            <a:pPr indent="0" marL="0">
+            <a:pPr marL="0" indent="0">
               <a:buNone/>
             </a:pPr>
             <a:r>
@@ -6293,7 +6287,7 @@
           <a:bodyPr wrap="square" lIns="0" tIns="0" rIns="0" bIns="0" rtlCol="0" anchor="ctr"/>
           <a:lstStyle/>
           <a:p>
-            <a:pPr indent="0" marL="0">
+            <a:pPr marL="0" indent="0">
               <a:buNone/>
             </a:pPr>
             <a:r>
@@ -6332,7 +6326,7 @@
           <a:bodyPr wrap="square" lIns="0" tIns="0" rIns="0" bIns="0" rtlCol="0" anchor="ctr"/>
           <a:lstStyle/>
           <a:p>
-            <a:pPr algn="ctr" indent="0" marL="0">
+            <a:pPr marL="0" indent="0" algn="ctr">
               <a:buNone/>
             </a:pPr>
             <a:r>
@@ -6371,6 +6365,13 @@
           </a:solidFill>
           <a:ln/>
         </p:spPr>
+        <p:txBody>
+          <a:bodyPr/>
+          <a:lstStyle/>
+          <a:p>
+            <a:endParaRPr lang="es-AR"/>
+          </a:p>
+        </p:txBody>
       </p:sp>
       <p:sp>
         <p:nvSpPr>
@@ -6393,6 +6394,13 @@
           </a:solidFill>
           <a:ln/>
         </p:spPr>
+        <p:txBody>
+          <a:bodyPr/>
+          <a:lstStyle/>
+          <a:p>
+            <a:endParaRPr lang="es-AR"/>
+          </a:p>
+        </p:txBody>
       </p:sp>
       <p:sp>
         <p:nvSpPr>
@@ -6415,7 +6423,7 @@
           <a:bodyPr wrap="square" lIns="0" tIns="0" rIns="0" bIns="0" rtlCol="0" anchor="ctr"/>
           <a:lstStyle/>
           <a:p>
-            <a:pPr algn="ctr" indent="0" marL="0">
+            <a:pPr marL="0" indent="0" algn="ctr">
               <a:buNone/>
             </a:pPr>
             <a:r>
@@ -6454,7 +6462,7 @@
           <a:bodyPr wrap="square" lIns="0" tIns="0" rIns="0" bIns="0" rtlCol="0" anchor="ctr"/>
           <a:lstStyle/>
           <a:p>
-            <a:pPr indent="0" marL="0">
+            <a:pPr marL="0" indent="0">
               <a:buNone/>
             </a:pPr>
             <a:r>
@@ -6493,7 +6501,7 @@
           <a:bodyPr wrap="square" lIns="0" tIns="0" rIns="0" bIns="0" rtlCol="0" anchor="ctr"/>
           <a:lstStyle/>
           <a:p>
-            <a:pPr indent="0" marL="0">
+            <a:pPr marL="0" indent="0">
               <a:buNone/>
             </a:pPr>
             <a:r>
@@ -6532,7 +6540,7 @@
           <a:bodyPr wrap="square" lIns="0" tIns="0" rIns="0" bIns="0" rtlCol="0" anchor="ctr"/>
           <a:lstStyle/>
           <a:p>
-            <a:pPr indent="0" marL="0">
+            <a:pPr marL="0" indent="0">
               <a:buNone/>
             </a:pPr>
             <a:r>
@@ -6571,7 +6579,7 @@
           <a:bodyPr wrap="square" lIns="0" tIns="0" rIns="0" bIns="0" rtlCol="0" anchor="ctr"/>
           <a:lstStyle/>
           <a:p>
-            <a:pPr indent="0" marL="0">
+            <a:pPr marL="0" indent="0">
               <a:buNone/>
             </a:pPr>
             <a:r>
@@ -6610,7 +6618,7 @@
           <a:bodyPr wrap="square" lIns="0" tIns="0" rIns="0" bIns="0" rtlCol="0" anchor="ctr"/>
           <a:lstStyle/>
           <a:p>
-            <a:pPr algn="r" indent="0" marL="0">
+            <a:pPr marL="0" indent="0" algn="r">
               <a:buNone/>
             </a:pPr>
             <a:r>
@@ -6644,6 +6652,7 @@
         <a:solidFill>
           <a:srgbClr val="FFFFFF"/>
         </a:solidFill>
+        <a:effectLst/>
       </p:bgPr>
     </p:bg>
     <p:spTree>
@@ -6681,7 +6690,7 @@
           <a:bodyPr wrap="square" lIns="0" tIns="0" rIns="0" bIns="0" rtlCol="0" anchor="ctr"/>
           <a:lstStyle/>
           <a:p>
-            <a:pPr indent="0" marL="0">
+            <a:pPr marL="0" indent="0">
               <a:buNone/>
             </a:pPr>
             <a:r>
@@ -6701,177 +6710,7 @@
       </p:sp>
       <p:pic>
         <p:nvPicPr>
-          <p:cNvPr id="3" name="Image 0" descr="/tmp/lead-email.png">    </p:cNvPr>
-          <p:cNvPicPr>
-            <a:picLocks noChangeAspect="1"/>
-          </p:cNvPicPr>
-          <p:nvPr/>
-        </p:nvPicPr>
-        <p:blipFill>
-          <a:blip r:embed="rId1"/>
-          <a:stretch>
-            <a:fillRect/>
-          </a:stretch>
-        </p:blipFill>
-        <p:spPr>
-          <a:xfrm>
-            <a:off x="548640" y="1234440"/>
-            <a:ext cx="3447288" cy="4800600"/>
-          </a:xfrm>
-          <a:prstGeom prst="rect">
-            <a:avLst/>
-          </a:prstGeom>
-        </p:spPr>
-      </p:pic>
-      <p:sp>
-        <p:nvSpPr>
-          <p:cNvPr id="4" name="Shape 1"/>
-          <p:cNvSpPr/>
-          <p:nvPr/>
-        </p:nvSpPr>
-        <p:spPr>
-          <a:xfrm>
-            <a:off x="4617720" y="1508760"/>
-            <a:ext cx="438912" cy="438912"/>
-          </a:xfrm>
-          <a:prstGeom prst="roundRect">
-            <a:avLst>
-              <a:gd name="adj" fmla="val 25000"/>
-            </a:avLst>
-          </a:prstGeom>
-          <a:solidFill>
-            <a:srgbClr val="EFF6FF"/>
-          </a:solidFill>
-          <a:ln/>
-        </p:spPr>
-      </p:sp>
-      <p:pic>
-        <p:nvPicPr>
-          <p:cNvPr id="5" name="Image 1" descr="/tmp/deck/icon-email-blue.png">    </p:cNvPr>
-          <p:cNvPicPr>
-            <a:picLocks noChangeAspect="1"/>
-          </p:cNvPicPr>
-          <p:nvPr/>
-        </p:nvPicPr>
-        <p:blipFill>
-          <a:blip r:embed="rId2"/>
-          <a:stretch>
-            <a:fillRect/>
-          </a:stretch>
-        </p:blipFill>
-        <p:spPr>
-          <a:xfrm>
-            <a:off x="4714281" y="1605321"/>
-            <a:ext cx="245791" cy="245791"/>
-          </a:xfrm>
-          <a:prstGeom prst="rect">
-            <a:avLst/>
-          </a:prstGeom>
-        </p:spPr>
-      </p:pic>
-      <p:sp>
-        <p:nvSpPr>
-          <p:cNvPr id="6" name="Text 2"/>
-          <p:cNvSpPr/>
-          <p:nvPr/>
-        </p:nvSpPr>
-        <p:spPr>
-          <a:xfrm>
-            <a:off x="5257800" y="1463040"/>
-            <a:ext cx="6309360" cy="365760"/>
-          </a:xfrm>
-          <a:prstGeom prst="rect">
-            <a:avLst/>
-          </a:prstGeom>
-          <a:noFill/>
-          <a:ln/>
-        </p:spPr>
-        <p:txBody>
-          <a:bodyPr wrap="square" lIns="0" tIns="0" rIns="0" bIns="0" rtlCol="0" anchor="ctr"/>
-          <a:lstStyle/>
-          <a:p>
-            <a:pPr indent="0" marL="0">
-              <a:buNone/>
-            </a:pPr>
-            <a:r>
-              <a:rPr lang="en-US" sz="1550" b="1" dirty="0">
-                <a:solidFill>
-                  <a:srgbClr val="0F172A"/>
-                </a:solidFill>
-                <a:latin typeface="Arial" pitchFamily="34" charset="0"/>
-                <a:ea typeface="Arial" pitchFamily="34" charset="-122"/>
-                <a:cs typeface="Arial" pitchFamily="34" charset="-120"/>
-              </a:rPr>
-              <a:t>Email inmediato</a:t>
-            </a:r>
-            <a:endParaRPr lang="en-US" sz="1550" dirty="0"/>
-          </a:p>
-        </p:txBody>
-      </p:sp>
-      <p:sp>
-        <p:nvSpPr>
-          <p:cNvPr id="7" name="Text 3"/>
-          <p:cNvSpPr/>
-          <p:nvPr/>
-        </p:nvSpPr>
-        <p:spPr>
-          <a:xfrm>
-            <a:off x="5257800" y="1810512"/>
-            <a:ext cx="6309360" cy="685800"/>
-          </a:xfrm>
-          <a:prstGeom prst="rect">
-            <a:avLst/>
-          </a:prstGeom>
-          <a:noFill/>
-          <a:ln/>
-        </p:spPr>
-        <p:txBody>
-          <a:bodyPr wrap="square" lIns="0" tIns="0" rIns="0" bIns="0" rtlCol="0" anchor="ctr"/>
-          <a:lstStyle/>
-          <a:p>
-            <a:pPr indent="0" marL="0">
-              <a:buNone/>
-            </a:pPr>
-            <a:r>
-              <a:rPr lang="en-US" sz="1250" dirty="0">
-                <a:solidFill>
-                  <a:srgbClr val="64748B"/>
-                </a:solidFill>
-                <a:latin typeface="Arial" pitchFamily="34" charset="0"/>
-                <a:ea typeface="Arial" pitchFamily="34" charset="-122"/>
-                <a:cs typeface="Arial" pitchFamily="34" charset="-120"/>
-              </a:rPr>
-              <a:t>Cada lead llega a tu casilla en el momento, con reply-to directo a la persona.</a:t>
-            </a:r>
-            <a:endParaRPr lang="en-US" sz="1250" dirty="0"/>
-          </a:p>
-        </p:txBody>
-      </p:sp>
-      <p:sp>
-        <p:nvSpPr>
-          <p:cNvPr id="8" name="Shape 4"/>
-          <p:cNvSpPr/>
-          <p:nvPr/>
-        </p:nvSpPr>
-        <p:spPr>
-          <a:xfrm>
-            <a:off x="4617720" y="2624328"/>
-            <a:ext cx="438912" cy="438912"/>
-          </a:xfrm>
-          <a:prstGeom prst="roundRect">
-            <a:avLst>
-              <a:gd name="adj" fmla="val 25000"/>
-            </a:avLst>
-          </a:prstGeom>
-          <a:solidFill>
-            <a:srgbClr val="EFF6FF"/>
-          </a:solidFill>
-          <a:ln/>
-        </p:spPr>
-      </p:sp>
-      <p:pic>
-        <p:nvPicPr>
-          <p:cNvPr id="9" name="Image 2" descr="/tmp/deck/icon-usertie-blue.png">    </p:cNvPr>
+          <p:cNvPr id="3" name="Image 0" descr="/tmp/lead-email.png"/>
           <p:cNvPicPr>
             <a:picLocks noChangeAspect="1"/>
           </p:cNvPicPr>
@@ -6885,8 +6724,8 @@
         </p:blipFill>
         <p:spPr>
           <a:xfrm>
-            <a:off x="4714281" y="2720889"/>
-            <a:ext cx="245791" cy="245791"/>
+            <a:off x="548640" y="1234440"/>
+            <a:ext cx="3447288" cy="4800600"/>
           </a:xfrm>
           <a:prstGeom prst="rect">
             <a:avLst/>
@@ -6895,91 +6734,13 @@
       </p:pic>
       <p:sp>
         <p:nvSpPr>
-          <p:cNvPr id="10" name="Text 5"/>
-          <p:cNvSpPr/>
-          <p:nvPr/>
-        </p:nvSpPr>
-        <p:spPr>
-          <a:xfrm>
-            <a:off x="5257800" y="2578608"/>
-            <a:ext cx="6309360" cy="365760"/>
-          </a:xfrm>
-          <a:prstGeom prst="rect">
-            <a:avLst/>
-          </a:prstGeom>
-          <a:noFill/>
-          <a:ln/>
-        </p:spPr>
-        <p:txBody>
-          <a:bodyPr wrap="square" lIns="0" tIns="0" rIns="0" bIns="0" rtlCol="0" anchor="ctr"/>
-          <a:lstStyle/>
-          <a:p>
-            <a:pPr indent="0" marL="0">
-              <a:buNone/>
-            </a:pPr>
-            <a:r>
-              <a:rPr lang="en-US" sz="1550" b="1" dirty="0">
-                <a:solidFill>
-                  <a:srgbClr val="0F172A"/>
-                </a:solidFill>
-                <a:latin typeface="Arial" pitchFamily="34" charset="0"/>
-                <a:ea typeface="Arial" pitchFamily="34" charset="-122"/>
-                <a:cs typeface="Arial" pitchFamily="34" charset="-120"/>
-              </a:rPr>
-              <a:t>Perfil financiero completo</a:t>
-            </a:r>
-            <a:endParaRPr lang="en-US" sz="1550" dirty="0"/>
-          </a:p>
-        </p:txBody>
-      </p:sp>
-      <p:sp>
-        <p:nvSpPr>
-          <p:cNvPr id="11" name="Text 6"/>
-          <p:cNvSpPr/>
-          <p:nvPr/>
-        </p:nvSpPr>
-        <p:spPr>
-          <a:xfrm>
-            <a:off x="5257800" y="2926080"/>
-            <a:ext cx="6309360" cy="685800"/>
-          </a:xfrm>
-          <a:prstGeom prst="rect">
-            <a:avLst/>
-          </a:prstGeom>
-          <a:noFill/>
-          <a:ln/>
-        </p:spPr>
-        <p:txBody>
-          <a:bodyPr wrap="square" lIns="0" tIns="0" rIns="0" bIns="0" rtlCol="0" anchor="ctr"/>
-          <a:lstStyle/>
-          <a:p>
-            <a:pPr indent="0" marL="0">
-              <a:buNone/>
-            </a:pPr>
-            <a:r>
-              <a:rPr lang="en-US" sz="1250" dirty="0">
-                <a:solidFill>
-                  <a:srgbClr val="64748B"/>
-                </a:solidFill>
-                <a:latin typeface="Arial" pitchFamily="34" charset="0"/>
-                <a:ea typeface="Arial" pitchFamily="34" charset="-122"/>
-                <a:cs typeface="Arial" pitchFamily="34" charset="-120"/>
-              </a:rPr>
-              <a:t>Edad, Magic Number, progreso, ingresos, gastos, ahorro, deudas, perfil inversor y score.</a:t>
-            </a:r>
-            <a:endParaRPr lang="en-US" sz="1250" dirty="0"/>
-          </a:p>
-        </p:txBody>
-      </p:sp>
-      <p:sp>
-        <p:nvSpPr>
-          <p:cNvPr id="12" name="Shape 7"/>
-          <p:cNvSpPr/>
-          <p:nvPr/>
-        </p:nvSpPr>
-        <p:spPr>
-          <a:xfrm>
-            <a:off x="4617720" y="3739896"/>
+          <p:cNvPr id="4" name="Shape 1"/>
+          <p:cNvSpPr/>
+          <p:nvPr/>
+        </p:nvSpPr>
+        <p:spPr>
+          <a:xfrm>
+            <a:off x="4617720" y="1508760"/>
             <a:ext cx="438912" cy="438912"/>
           </a:xfrm>
           <a:prstGeom prst="roundRect">
@@ -6992,10 +6753,17 @@
           </a:solidFill>
           <a:ln/>
         </p:spPr>
+        <p:txBody>
+          <a:bodyPr/>
+          <a:lstStyle/>
+          <a:p>
+            <a:endParaRPr lang="es-AR"/>
+          </a:p>
+        </p:txBody>
       </p:sp>
       <p:pic>
         <p:nvPicPr>
-          <p:cNvPr id="13" name="Image 3" descr="/tmp/deck/icon-shield-blue.png">    </p:cNvPr>
+          <p:cNvPr id="5" name="Image 1" descr="/tmp/deck/icon-email-blue.png"/>
           <p:cNvPicPr>
             <a:picLocks noChangeAspect="1"/>
           </p:cNvPicPr>
@@ -7009,7 +6777,7 @@
         </p:blipFill>
         <p:spPr>
           <a:xfrm>
-            <a:off x="4714281" y="3836457"/>
+            <a:off x="4714281" y="1605321"/>
             <a:ext cx="245791" cy="245791"/>
           </a:xfrm>
           <a:prstGeom prst="rect">
@@ -7019,13 +6787,13 @@
       </p:pic>
       <p:sp>
         <p:nvSpPr>
-          <p:cNvPr id="14" name="Text 8"/>
-          <p:cNvSpPr/>
-          <p:nvPr/>
-        </p:nvSpPr>
-        <p:spPr>
-          <a:xfrm>
-            <a:off x="5257800" y="3694176"/>
+          <p:cNvPr id="6" name="Text 2"/>
+          <p:cNvSpPr/>
+          <p:nvPr/>
+        </p:nvSpPr>
+        <p:spPr>
+          <a:xfrm>
+            <a:off x="5257800" y="1463040"/>
             <a:ext cx="6309360" cy="365760"/>
           </a:xfrm>
           <a:prstGeom prst="rect">
@@ -7038,7 +6806,7 @@
           <a:bodyPr wrap="square" lIns="0" tIns="0" rIns="0" bIns="0" rtlCol="0" anchor="ctr"/>
           <a:lstStyle/>
           <a:p>
-            <a:pPr indent="0" marL="0">
+            <a:pPr marL="0" indent="0">
               <a:buNone/>
             </a:pPr>
             <a:r>
@@ -7050,7 +6818,7 @@
                 <a:ea typeface="Arial" pitchFamily="34" charset="-122"/>
                 <a:cs typeface="Arial" pitchFamily="34" charset="-120"/>
               </a:rPr>
-              <a:t>Consentimiento registrado</a:t>
+              <a:t>Email inmediato</a:t>
             </a:r>
             <a:endParaRPr lang="en-US" sz="1550" dirty="0"/>
           </a:p>
@@ -7058,13 +6826,13 @@
       </p:sp>
       <p:sp>
         <p:nvSpPr>
-          <p:cNvPr id="15" name="Text 9"/>
-          <p:cNvSpPr/>
-          <p:nvPr/>
-        </p:nvSpPr>
-        <p:spPr>
-          <a:xfrm>
-            <a:off x="5257800" y="4041648"/>
+          <p:cNvPr id="7" name="Text 3"/>
+          <p:cNvSpPr/>
+          <p:nvPr/>
+        </p:nvSpPr>
+        <p:spPr>
+          <a:xfrm>
+            <a:off x="5257800" y="1810512"/>
             <a:ext cx="6309360" cy="685800"/>
           </a:xfrm>
           <a:prstGeom prst="rect">
@@ -7077,7 +6845,7 @@
           <a:bodyPr wrap="square" lIns="0" tIns="0" rIns="0" bIns="0" rtlCol="0" anchor="ctr"/>
           <a:lstStyle/>
           <a:p>
-            <a:pPr indent="0" marL="0">
+            <a:pPr marL="0" indent="0">
               <a:buNone/>
             </a:pPr>
             <a:r>
@@ -7089,7 +6857,7 @@
                 <a:ea typeface="Arial" pitchFamily="34" charset="-122"/>
                 <a:cs typeface="Arial" pitchFamily="34" charset="-120"/>
               </a:rPr>
-              <a:t>La persona aceptó compartir su perfil con un asesor verificado — con fecha y hora.</a:t>
+              <a:t>Cada lead llega a tu casilla en el momento, con reply-to directo a la persona.</a:t>
             </a:r>
             <a:endParaRPr lang="en-US" sz="1250" dirty="0"/>
           </a:p>
@@ -7097,13 +6865,13 @@
       </p:sp>
       <p:sp>
         <p:nvSpPr>
-          <p:cNvPr id="16" name="Shape 10"/>
-          <p:cNvSpPr/>
-          <p:nvPr/>
-        </p:nvSpPr>
-        <p:spPr>
-          <a:xfrm>
-            <a:off x="4617720" y="4855464"/>
+          <p:cNvPr id="8" name="Shape 4"/>
+          <p:cNvSpPr/>
+          <p:nvPr/>
+        </p:nvSpPr>
+        <p:spPr>
+          <a:xfrm>
+            <a:off x="4617720" y="2624328"/>
             <a:ext cx="438912" cy="438912"/>
           </a:xfrm>
           <a:prstGeom prst="roundRect">
@@ -7116,10 +6884,17 @@
           </a:solidFill>
           <a:ln/>
         </p:spPr>
+        <p:txBody>
+          <a:bodyPr/>
+          <a:lstStyle/>
+          <a:p>
+            <a:endParaRPr lang="es-AR"/>
+          </a:p>
+        </p:txBody>
       </p:sp>
       <p:pic>
         <p:nvPicPr>
-          <p:cNvPr id="17" name="Image 4" descr="/tmp/deck/icon-filter-blue.png">    </p:cNvPr>
+          <p:cNvPr id="9" name="Image 2" descr="/tmp/deck/icon-usertie-blue.png"/>
           <p:cNvPicPr>
             <a:picLocks noChangeAspect="1"/>
           </p:cNvPicPr>
@@ -7133,6 +6908,268 @@
         </p:blipFill>
         <p:spPr>
           <a:xfrm>
+            <a:off x="4714281" y="2720889"/>
+            <a:ext cx="245791" cy="245791"/>
+          </a:xfrm>
+          <a:prstGeom prst="rect">
+            <a:avLst/>
+          </a:prstGeom>
+        </p:spPr>
+      </p:pic>
+      <p:sp>
+        <p:nvSpPr>
+          <p:cNvPr id="10" name="Text 5"/>
+          <p:cNvSpPr/>
+          <p:nvPr/>
+        </p:nvSpPr>
+        <p:spPr>
+          <a:xfrm>
+            <a:off x="5257800" y="2578608"/>
+            <a:ext cx="6309360" cy="365760"/>
+          </a:xfrm>
+          <a:prstGeom prst="rect">
+            <a:avLst/>
+          </a:prstGeom>
+          <a:noFill/>
+          <a:ln/>
+        </p:spPr>
+        <p:txBody>
+          <a:bodyPr wrap="square" lIns="0" tIns="0" rIns="0" bIns="0" rtlCol="0" anchor="ctr"/>
+          <a:lstStyle/>
+          <a:p>
+            <a:pPr marL="0" indent="0">
+              <a:buNone/>
+            </a:pPr>
+            <a:r>
+              <a:rPr lang="en-US" sz="1550" b="1" dirty="0">
+                <a:solidFill>
+                  <a:srgbClr val="0F172A"/>
+                </a:solidFill>
+                <a:latin typeface="Arial" pitchFamily="34" charset="0"/>
+                <a:ea typeface="Arial" pitchFamily="34" charset="-122"/>
+                <a:cs typeface="Arial" pitchFamily="34" charset="-120"/>
+              </a:rPr>
+              <a:t>Perfil financiero completo</a:t>
+            </a:r>
+            <a:endParaRPr lang="en-US" sz="1550" dirty="0"/>
+          </a:p>
+        </p:txBody>
+      </p:sp>
+      <p:sp>
+        <p:nvSpPr>
+          <p:cNvPr id="11" name="Text 6"/>
+          <p:cNvSpPr/>
+          <p:nvPr/>
+        </p:nvSpPr>
+        <p:spPr>
+          <a:xfrm>
+            <a:off x="5257800" y="2926080"/>
+            <a:ext cx="6309360" cy="685800"/>
+          </a:xfrm>
+          <a:prstGeom prst="rect">
+            <a:avLst/>
+          </a:prstGeom>
+          <a:noFill/>
+          <a:ln/>
+        </p:spPr>
+        <p:txBody>
+          <a:bodyPr wrap="square" lIns="0" tIns="0" rIns="0" bIns="0" rtlCol="0" anchor="ctr"/>
+          <a:lstStyle/>
+          <a:p>
+            <a:pPr marL="0" indent="0">
+              <a:buNone/>
+            </a:pPr>
+            <a:r>
+              <a:rPr lang="en-US" sz="1250" dirty="0">
+                <a:solidFill>
+                  <a:srgbClr val="64748B"/>
+                </a:solidFill>
+                <a:latin typeface="Arial" pitchFamily="34" charset="0"/>
+                <a:ea typeface="Arial" pitchFamily="34" charset="-122"/>
+                <a:cs typeface="Arial" pitchFamily="34" charset="-120"/>
+              </a:rPr>
+              <a:t>Edad, Magic Number, progreso, ingresos, gastos, ahorro, deudas, perfil inversor y score.</a:t>
+            </a:r>
+            <a:endParaRPr lang="en-US" sz="1250" dirty="0"/>
+          </a:p>
+        </p:txBody>
+      </p:sp>
+      <p:sp>
+        <p:nvSpPr>
+          <p:cNvPr id="12" name="Shape 7"/>
+          <p:cNvSpPr/>
+          <p:nvPr/>
+        </p:nvSpPr>
+        <p:spPr>
+          <a:xfrm>
+            <a:off x="4617720" y="3739896"/>
+            <a:ext cx="438912" cy="438912"/>
+          </a:xfrm>
+          <a:prstGeom prst="roundRect">
+            <a:avLst>
+              <a:gd name="adj" fmla="val 25000"/>
+            </a:avLst>
+          </a:prstGeom>
+          <a:solidFill>
+            <a:srgbClr val="EFF6FF"/>
+          </a:solidFill>
+          <a:ln/>
+        </p:spPr>
+        <p:txBody>
+          <a:bodyPr/>
+          <a:lstStyle/>
+          <a:p>
+            <a:endParaRPr lang="es-AR"/>
+          </a:p>
+        </p:txBody>
+      </p:sp>
+      <p:pic>
+        <p:nvPicPr>
+          <p:cNvPr id="13" name="Image 3" descr="/tmp/deck/icon-shield-blue.png"/>
+          <p:cNvPicPr>
+            <a:picLocks noChangeAspect="1"/>
+          </p:cNvPicPr>
+          <p:nvPr/>
+        </p:nvPicPr>
+        <p:blipFill>
+          <a:blip r:embed="rId6"/>
+          <a:stretch>
+            <a:fillRect/>
+          </a:stretch>
+        </p:blipFill>
+        <p:spPr>
+          <a:xfrm>
+            <a:off x="4714281" y="3836457"/>
+            <a:ext cx="245791" cy="245791"/>
+          </a:xfrm>
+          <a:prstGeom prst="rect">
+            <a:avLst/>
+          </a:prstGeom>
+        </p:spPr>
+      </p:pic>
+      <p:sp>
+        <p:nvSpPr>
+          <p:cNvPr id="14" name="Text 8"/>
+          <p:cNvSpPr/>
+          <p:nvPr/>
+        </p:nvSpPr>
+        <p:spPr>
+          <a:xfrm>
+            <a:off x="5257800" y="3694176"/>
+            <a:ext cx="6309360" cy="365760"/>
+          </a:xfrm>
+          <a:prstGeom prst="rect">
+            <a:avLst/>
+          </a:prstGeom>
+          <a:noFill/>
+          <a:ln/>
+        </p:spPr>
+        <p:txBody>
+          <a:bodyPr wrap="square" lIns="0" tIns="0" rIns="0" bIns="0" rtlCol="0" anchor="ctr"/>
+          <a:lstStyle/>
+          <a:p>
+            <a:pPr marL="0" indent="0">
+              <a:buNone/>
+            </a:pPr>
+            <a:r>
+              <a:rPr lang="en-US" sz="1550" b="1" dirty="0">
+                <a:solidFill>
+                  <a:srgbClr val="0F172A"/>
+                </a:solidFill>
+                <a:latin typeface="Arial" pitchFamily="34" charset="0"/>
+                <a:ea typeface="Arial" pitchFamily="34" charset="-122"/>
+                <a:cs typeface="Arial" pitchFamily="34" charset="-120"/>
+              </a:rPr>
+              <a:t>Consentimiento registrado</a:t>
+            </a:r>
+            <a:endParaRPr lang="en-US" sz="1550" dirty="0"/>
+          </a:p>
+        </p:txBody>
+      </p:sp>
+      <p:sp>
+        <p:nvSpPr>
+          <p:cNvPr id="15" name="Text 9"/>
+          <p:cNvSpPr/>
+          <p:nvPr/>
+        </p:nvSpPr>
+        <p:spPr>
+          <a:xfrm>
+            <a:off x="5257800" y="4041648"/>
+            <a:ext cx="6309360" cy="685800"/>
+          </a:xfrm>
+          <a:prstGeom prst="rect">
+            <a:avLst/>
+          </a:prstGeom>
+          <a:noFill/>
+          <a:ln/>
+        </p:spPr>
+        <p:txBody>
+          <a:bodyPr wrap="square" lIns="0" tIns="0" rIns="0" bIns="0" rtlCol="0" anchor="ctr"/>
+          <a:lstStyle/>
+          <a:p>
+            <a:pPr marL="0" indent="0">
+              <a:buNone/>
+            </a:pPr>
+            <a:r>
+              <a:rPr lang="en-US" sz="1250" dirty="0">
+                <a:solidFill>
+                  <a:srgbClr val="64748B"/>
+                </a:solidFill>
+                <a:latin typeface="Arial" pitchFamily="34" charset="0"/>
+                <a:ea typeface="Arial" pitchFamily="34" charset="-122"/>
+                <a:cs typeface="Arial" pitchFamily="34" charset="-120"/>
+              </a:rPr>
+              <a:t>La persona aceptó compartir su perfil con un asesor verificado — con fecha y hora.</a:t>
+            </a:r>
+            <a:endParaRPr lang="en-US" sz="1250" dirty="0"/>
+          </a:p>
+        </p:txBody>
+      </p:sp>
+      <p:sp>
+        <p:nvSpPr>
+          <p:cNvPr id="16" name="Shape 10"/>
+          <p:cNvSpPr/>
+          <p:nvPr/>
+        </p:nvSpPr>
+        <p:spPr>
+          <a:xfrm>
+            <a:off x="4617720" y="4855464"/>
+            <a:ext cx="438912" cy="438912"/>
+          </a:xfrm>
+          <a:prstGeom prst="roundRect">
+            <a:avLst>
+              <a:gd name="adj" fmla="val 25000"/>
+            </a:avLst>
+          </a:prstGeom>
+          <a:solidFill>
+            <a:srgbClr val="EFF6FF"/>
+          </a:solidFill>
+          <a:ln/>
+        </p:spPr>
+        <p:txBody>
+          <a:bodyPr/>
+          <a:lstStyle/>
+          <a:p>
+            <a:endParaRPr lang="es-AR"/>
+          </a:p>
+        </p:txBody>
+      </p:sp>
+      <p:pic>
+        <p:nvPicPr>
+          <p:cNvPr id="17" name="Image 4" descr="/tmp/deck/icon-filter-blue.png"/>
+          <p:cNvPicPr>
+            <a:picLocks noChangeAspect="1"/>
+          </p:cNvPicPr>
+          <p:nvPr/>
+        </p:nvPicPr>
+        <p:blipFill>
+          <a:blip r:embed="rId7"/>
+          <a:stretch>
+            <a:fillRect/>
+          </a:stretch>
+        </p:blipFill>
+        <p:spPr>
+          <a:xfrm>
             <a:off x="4714281" y="4952025"/>
             <a:ext cx="245791" cy="245791"/>
           </a:xfrm>
@@ -7162,7 +7199,7 @@
           <a:bodyPr wrap="square" lIns="0" tIns="0" rIns="0" bIns="0" rtlCol="0" anchor="ctr"/>
           <a:lstStyle/>
           <a:p>
-            <a:pPr indent="0" marL="0">
+            <a:pPr marL="0" indent="0">
               <a:buNone/>
             </a:pPr>
             <a:r>
@@ -7201,7 +7238,7 @@
           <a:bodyPr wrap="square" lIns="0" tIns="0" rIns="0" bIns="0" rtlCol="0" anchor="ctr"/>
           <a:lstStyle/>
           <a:p>
-            <a:pPr indent="0" marL="0">
+            <a:pPr marL="0" indent="0">
               <a:buNone/>
             </a:pPr>
             <a:r>
@@ -7240,7 +7277,7 @@
           <a:bodyPr wrap="square" lIns="0" tIns="0" rIns="0" bIns="0" rtlCol="0" anchor="ctr"/>
           <a:lstStyle/>
           <a:p>
-            <a:pPr indent="0" marL="0">
+            <a:pPr marL="0" indent="0">
               <a:buNone/>
             </a:pPr>
             <a:r>
@@ -7279,7 +7316,7 @@
           <a:bodyPr wrap="square" lIns="0" tIns="0" rIns="0" bIns="0" rtlCol="0" anchor="ctr"/>
           <a:lstStyle/>
           <a:p>
-            <a:pPr indent="0" marL="0">
+            <a:pPr marL="0" indent="0">
               <a:buNone/>
             </a:pPr>
             <a:r>
@@ -7318,7 +7355,7 @@
           <a:bodyPr wrap="square" lIns="0" tIns="0" rIns="0" bIns="0" rtlCol="0" anchor="ctr"/>
           <a:lstStyle/>
           <a:p>
-            <a:pPr indent="0" marL="0">
+            <a:pPr marL="0" indent="0">
               <a:buNone/>
             </a:pPr>
             <a:r>
@@ -7357,7 +7394,7 @@
           <a:bodyPr wrap="square" lIns="0" tIns="0" rIns="0" bIns="0" rtlCol="0" anchor="ctr"/>
           <a:lstStyle/>
           <a:p>
-            <a:pPr algn="r" indent="0" marL="0">
+            <a:pPr marL="0" indent="0" algn="r">
               <a:buNone/>
             </a:pPr>
             <a:r>
@@ -7391,6 +7428,7 @@
         <a:solidFill>
           <a:srgbClr val="FFFFFF"/>
         </a:solidFill>
+        <a:effectLst/>
       </p:bgPr>
     </p:bg>
     <p:spTree>
@@ -7428,7 +7466,7 @@
           <a:bodyPr wrap="square" lIns="0" tIns="0" rIns="0" bIns="0" rtlCol="0" anchor="ctr"/>
           <a:lstStyle/>
           <a:p>
-            <a:pPr indent="0" marL="0">
+            <a:pPr marL="0" indent="0">
               <a:buNone/>
             </a:pPr>
             <a:r>
@@ -7467,6 +7505,13 @@
           </a:solidFill>
           <a:ln/>
         </p:spPr>
+        <p:txBody>
+          <a:bodyPr/>
+          <a:lstStyle/>
+          <a:p>
+            <a:endParaRPr lang="es-AR"/>
+          </a:p>
+        </p:txBody>
       </p:sp>
       <p:sp>
         <p:nvSpPr>
@@ -7489,302 +7534,17 @@
           </a:solidFill>
           <a:ln/>
         </p:spPr>
+        <p:txBody>
+          <a:bodyPr/>
+          <a:lstStyle/>
+          <a:p>
+            <a:endParaRPr lang="es-AR"/>
+          </a:p>
+        </p:txBody>
       </p:sp>
       <p:pic>
         <p:nvPicPr>
-          <p:cNvPr id="5" name="Image 0" descr="/tmp/deck/icon-handshake-blue.png">    </p:cNvPr>
-          <p:cNvPicPr>
-            <a:picLocks noChangeAspect="1"/>
-          </p:cNvPicPr>
-          <p:nvPr/>
-        </p:nvPicPr>
-        <p:blipFill>
-          <a:blip r:embed="rId1"/>
-          <a:stretch>
-            <a:fillRect/>
-          </a:stretch>
-        </p:blipFill>
-        <p:spPr>
-          <a:xfrm>
-            <a:off x="933602" y="2122322"/>
-            <a:ext cx="281635" cy="281635"/>
-          </a:xfrm>
-          <a:prstGeom prst="rect">
-            <a:avLst/>
-          </a:prstGeom>
-        </p:spPr>
-      </p:pic>
-      <p:sp>
-        <p:nvSpPr>
-          <p:cNvPr id="6" name="Text 3"/>
-          <p:cNvSpPr/>
-          <p:nvPr/>
-        </p:nvSpPr>
-        <p:spPr>
-          <a:xfrm>
-            <a:off x="822960" y="2743200"/>
-            <a:ext cx="3017520" cy="411480"/>
-          </a:xfrm>
-          <a:prstGeom prst="rect">
-            <a:avLst/>
-          </a:prstGeom>
-          <a:noFill/>
-          <a:ln/>
-        </p:spPr>
-        <p:txBody>
-          <a:bodyPr wrap="square" lIns="0" tIns="0" rIns="0" bIns="0" rtlCol="0" anchor="ctr"/>
-          <a:lstStyle/>
-          <a:p>
-            <a:pPr indent="0" marL="0">
-              <a:buNone/>
-            </a:pPr>
-            <a:r>
-              <a:rPr lang="en-US" sz="1700" b="1" dirty="0">
-                <a:solidFill>
-                  <a:srgbClr val="0F172A"/>
-                </a:solidFill>
-                <a:latin typeface="Arial" pitchFamily="34" charset="0"/>
-                <a:ea typeface="Arial" pitchFamily="34" charset="-122"/>
-                <a:cs typeface="Arial" pitchFamily="34" charset="-120"/>
-              </a:rPr>
-              <a:t>Sin costo fijo</a:t>
-            </a:r>
-            <a:endParaRPr lang="en-US" sz="1700" dirty="0"/>
-          </a:p>
-        </p:txBody>
-      </p:sp>
-      <p:sp>
-        <p:nvSpPr>
-          <p:cNvPr id="7" name="Text 4"/>
-          <p:cNvSpPr/>
-          <p:nvPr/>
-        </p:nvSpPr>
-        <p:spPr>
-          <a:xfrm>
-            <a:off x="822960" y="3200400"/>
-            <a:ext cx="3017520" cy="1554480"/>
-          </a:xfrm>
-          <a:prstGeom prst="rect">
-            <a:avLst/>
-          </a:prstGeom>
-          <a:noFill/>
-          <a:ln/>
-        </p:spPr>
-        <p:txBody>
-          <a:bodyPr wrap="square" lIns="0" tIns="0" rIns="0" bIns="0" rtlCol="0" anchor="ctr"/>
-          <a:lstStyle/>
-          <a:p>
-            <a:pPr indent="0" marL="0">
-              <a:buNone/>
-            </a:pPr>
-            <a:r>
-              <a:rPr lang="en-US" sz="1250" dirty="0">
-                <a:solidFill>
-                  <a:srgbClr val="64748B"/>
-                </a:solidFill>
-                <a:latin typeface="Arial" pitchFamily="34" charset="0"/>
-                <a:ea typeface="Arial" pitchFamily="34" charset="-122"/>
-                <a:cs typeface="Arial" pitchFamily="34" charset="-120"/>
-              </a:rPr>
-              <a:t>No comprás leads ni pagás abono. Solo reconocés una comisión cuando un referido se convierte en cliente tuyo — como una referencia personal.</a:t>
-            </a:r>
-            <a:endParaRPr lang="en-US" sz="1250" dirty="0"/>
-          </a:p>
-        </p:txBody>
-      </p:sp>
-      <p:sp>
-        <p:nvSpPr>
-          <p:cNvPr id="8" name="Shape 5"/>
-          <p:cNvSpPr/>
-          <p:nvPr/>
-        </p:nvSpPr>
-        <p:spPr>
-          <a:xfrm>
-            <a:off x="4343400" y="1737360"/>
-            <a:ext cx="3566160" cy="3200400"/>
-          </a:xfrm>
-          <a:prstGeom prst="roundRect">
-            <a:avLst>
-              <a:gd name="adj" fmla="val 4000"/>
-            </a:avLst>
-          </a:prstGeom>
-          <a:solidFill>
-            <a:srgbClr val="F1F5F9"/>
-          </a:solidFill>
-          <a:ln/>
-        </p:spPr>
-      </p:sp>
-      <p:sp>
-        <p:nvSpPr>
-          <p:cNvPr id="9" name="Shape 6"/>
-          <p:cNvSpPr/>
-          <p:nvPr/>
-        </p:nvSpPr>
-        <p:spPr>
-          <a:xfrm>
-            <a:off x="4617720" y="2011680"/>
-            <a:ext cx="502920" cy="502920"/>
-          </a:xfrm>
-          <a:prstGeom prst="roundRect">
-            <a:avLst>
-              <a:gd name="adj" fmla="val 21818"/>
-            </a:avLst>
-          </a:prstGeom>
-          <a:solidFill>
-            <a:srgbClr val="EFF6FF"/>
-          </a:solidFill>
-          <a:ln/>
-        </p:spPr>
-      </p:sp>
-      <p:pic>
-        <p:nvPicPr>
-          <p:cNvPr id="10" name="Image 1" descr="/tmp/deck/icon-invoice-blue.png">    </p:cNvPr>
-          <p:cNvPicPr>
-            <a:picLocks noChangeAspect="1"/>
-          </p:cNvPicPr>
-          <p:nvPr/>
-        </p:nvPicPr>
-        <p:blipFill>
-          <a:blip r:embed="rId2"/>
-          <a:stretch>
-            <a:fillRect/>
-          </a:stretch>
-        </p:blipFill>
-        <p:spPr>
-          <a:xfrm>
-            <a:off x="4728362" y="2122322"/>
-            <a:ext cx="281635" cy="281635"/>
-          </a:xfrm>
-          <a:prstGeom prst="rect">
-            <a:avLst/>
-          </a:prstGeom>
-        </p:spPr>
-      </p:pic>
-      <p:sp>
-        <p:nvSpPr>
-          <p:cNvPr id="11" name="Text 7"/>
-          <p:cNvSpPr/>
-          <p:nvPr/>
-        </p:nvSpPr>
-        <p:spPr>
-          <a:xfrm>
-            <a:off x="4617720" y="2743200"/>
-            <a:ext cx="3017520" cy="411480"/>
-          </a:xfrm>
-          <a:prstGeom prst="rect">
-            <a:avLst/>
-          </a:prstGeom>
-          <a:noFill/>
-          <a:ln/>
-        </p:spPr>
-        <p:txBody>
-          <a:bodyPr wrap="square" lIns="0" tIns="0" rIns="0" bIns="0" rtlCol="0" anchor="ctr"/>
-          <a:lstStyle/>
-          <a:p>
-            <a:pPr indent="0" marL="0">
-              <a:buNone/>
-            </a:pPr>
-            <a:r>
-              <a:rPr lang="en-US" sz="1700" b="1" dirty="0">
-                <a:solidFill>
-                  <a:srgbClr val="0F172A"/>
-                </a:solidFill>
-                <a:latin typeface="Arial" pitchFamily="34" charset="0"/>
-                <a:ea typeface="Arial" pitchFamily="34" charset="-122"/>
-                <a:cs typeface="Arial" pitchFamily="34" charset="-120"/>
-              </a:rPr>
-              <a:t>Comisión a acordar</a:t>
-            </a:r>
-            <a:endParaRPr lang="en-US" sz="1700" dirty="0"/>
-          </a:p>
-        </p:txBody>
-      </p:sp>
-      <p:sp>
-        <p:nvSpPr>
-          <p:cNvPr id="12" name="Text 8"/>
-          <p:cNvSpPr/>
-          <p:nvPr/>
-        </p:nvSpPr>
-        <p:spPr>
-          <a:xfrm>
-            <a:off x="4617720" y="3200400"/>
-            <a:ext cx="3017520" cy="1554480"/>
-          </a:xfrm>
-          <a:prstGeom prst="rect">
-            <a:avLst/>
-          </a:prstGeom>
-          <a:noFill/>
-          <a:ln/>
-        </p:spPr>
-        <p:txBody>
-          <a:bodyPr wrap="square" lIns="0" tIns="0" rIns="0" bIns="0" rtlCol="0" anchor="ctr"/>
-          <a:lstStyle/>
-          <a:p>
-            <a:pPr indent="0" marL="0">
-              <a:buNone/>
-            </a:pPr>
-            <a:r>
-              <a:rPr lang="en-US" sz="1250" dirty="0">
-                <a:solidFill>
-                  <a:srgbClr val="64748B"/>
-                </a:solidFill>
-                <a:latin typeface="Arial" pitchFamily="34" charset="0"/>
-                <a:ea typeface="Arial" pitchFamily="34" charset="-122"/>
-                <a:cs typeface="Arial" pitchFamily="34" charset="-120"/>
-              </a:rPr>
-              <a:t>Estructura simple de referido: monto fijo o porcentaje por cliente convertido. Lo definimos juntos, sujeto a la normativa aplicable.</a:t>
-            </a:r>
-            <a:endParaRPr lang="en-US" sz="1250" dirty="0"/>
-          </a:p>
-        </p:txBody>
-      </p:sp>
-      <p:sp>
-        <p:nvSpPr>
-          <p:cNvPr id="13" name="Shape 9"/>
-          <p:cNvSpPr/>
-          <p:nvPr/>
-        </p:nvSpPr>
-        <p:spPr>
-          <a:xfrm>
-            <a:off x="8138160" y="1737360"/>
-            <a:ext cx="3566160" cy="3200400"/>
-          </a:xfrm>
-          <a:prstGeom prst="roundRect">
-            <a:avLst>
-              <a:gd name="adj" fmla="val 4000"/>
-            </a:avLst>
-          </a:prstGeom>
-          <a:solidFill>
-            <a:srgbClr val="F1F5F9"/>
-          </a:solidFill>
-          <a:ln/>
-        </p:spPr>
-      </p:sp>
-      <p:sp>
-        <p:nvSpPr>
-          <p:cNvPr id="14" name="Shape 10"/>
-          <p:cNvSpPr/>
-          <p:nvPr/>
-        </p:nvSpPr>
-        <p:spPr>
-          <a:xfrm>
-            <a:off x="8412480" y="2011680"/>
-            <a:ext cx="502920" cy="502920"/>
-          </a:xfrm>
-          <a:prstGeom prst="roundRect">
-            <a:avLst>
-              <a:gd name="adj" fmla="val 21818"/>
-            </a:avLst>
-          </a:prstGeom>
-          <a:solidFill>
-            <a:srgbClr val="EFF6FF"/>
-          </a:solidFill>
-          <a:ln/>
-        </p:spPr>
-      </p:sp>
-      <p:pic>
-        <p:nvPicPr>
-          <p:cNvPr id="15" name="Image 2" descr="/tmp/deck/icon-rocket-blue.png">    </p:cNvPr>
+          <p:cNvPr id="5" name="Image 0" descr="/tmp/deck/icon-handshake-blue.png"/>
           <p:cNvPicPr>
             <a:picLocks noChangeAspect="1"/>
           </p:cNvPicPr>
@@ -7798,6 +7558,326 @@
         </p:blipFill>
         <p:spPr>
           <a:xfrm>
+            <a:off x="933602" y="2122322"/>
+            <a:ext cx="281635" cy="281635"/>
+          </a:xfrm>
+          <a:prstGeom prst="rect">
+            <a:avLst/>
+          </a:prstGeom>
+        </p:spPr>
+      </p:pic>
+      <p:sp>
+        <p:nvSpPr>
+          <p:cNvPr id="6" name="Text 3"/>
+          <p:cNvSpPr/>
+          <p:nvPr/>
+        </p:nvSpPr>
+        <p:spPr>
+          <a:xfrm>
+            <a:off x="822960" y="2743200"/>
+            <a:ext cx="3017520" cy="411480"/>
+          </a:xfrm>
+          <a:prstGeom prst="rect">
+            <a:avLst/>
+          </a:prstGeom>
+          <a:noFill/>
+          <a:ln/>
+        </p:spPr>
+        <p:txBody>
+          <a:bodyPr wrap="square" lIns="0" tIns="0" rIns="0" bIns="0" rtlCol="0" anchor="ctr"/>
+          <a:lstStyle/>
+          <a:p>
+            <a:pPr marL="0" indent="0">
+              <a:buNone/>
+            </a:pPr>
+            <a:r>
+              <a:rPr lang="en-US" sz="1700" b="1" dirty="0">
+                <a:solidFill>
+                  <a:srgbClr val="0F172A"/>
+                </a:solidFill>
+                <a:latin typeface="Arial" pitchFamily="34" charset="0"/>
+                <a:ea typeface="Arial" pitchFamily="34" charset="-122"/>
+                <a:cs typeface="Arial" pitchFamily="34" charset="-120"/>
+              </a:rPr>
+              <a:t>Sin costo fijo</a:t>
+            </a:r>
+            <a:endParaRPr lang="en-US" sz="1700" dirty="0"/>
+          </a:p>
+        </p:txBody>
+      </p:sp>
+      <p:sp>
+        <p:nvSpPr>
+          <p:cNvPr id="7" name="Text 4"/>
+          <p:cNvSpPr/>
+          <p:nvPr/>
+        </p:nvSpPr>
+        <p:spPr>
+          <a:xfrm>
+            <a:off x="822960" y="3200400"/>
+            <a:ext cx="3017520" cy="1554480"/>
+          </a:xfrm>
+          <a:prstGeom prst="rect">
+            <a:avLst/>
+          </a:prstGeom>
+          <a:noFill/>
+          <a:ln/>
+        </p:spPr>
+        <p:txBody>
+          <a:bodyPr wrap="square" lIns="0" tIns="0" rIns="0" bIns="0" rtlCol="0" anchor="ctr"/>
+          <a:lstStyle/>
+          <a:p>
+            <a:pPr marL="0" indent="0">
+              <a:buNone/>
+            </a:pPr>
+            <a:r>
+              <a:rPr lang="en-US" sz="1250" dirty="0">
+                <a:solidFill>
+                  <a:srgbClr val="64748B"/>
+                </a:solidFill>
+                <a:latin typeface="Arial" pitchFamily="34" charset="0"/>
+                <a:ea typeface="Arial" pitchFamily="34" charset="-122"/>
+                <a:cs typeface="Arial" pitchFamily="34" charset="-120"/>
+              </a:rPr>
+              <a:t>No comprás leads ni pagás abono. Solo reconocés una comisión cuando un referido se convierte en cliente tuyo — como una referencia personal.</a:t>
+            </a:r>
+            <a:endParaRPr lang="en-US" sz="1250" dirty="0"/>
+          </a:p>
+        </p:txBody>
+      </p:sp>
+      <p:sp>
+        <p:nvSpPr>
+          <p:cNvPr id="8" name="Shape 5"/>
+          <p:cNvSpPr/>
+          <p:nvPr/>
+        </p:nvSpPr>
+        <p:spPr>
+          <a:xfrm>
+            <a:off x="4343400" y="1737360"/>
+            <a:ext cx="3566160" cy="3200400"/>
+          </a:xfrm>
+          <a:prstGeom prst="roundRect">
+            <a:avLst>
+              <a:gd name="adj" fmla="val 4000"/>
+            </a:avLst>
+          </a:prstGeom>
+          <a:solidFill>
+            <a:srgbClr val="F1F5F9"/>
+          </a:solidFill>
+          <a:ln/>
+        </p:spPr>
+        <p:txBody>
+          <a:bodyPr/>
+          <a:lstStyle/>
+          <a:p>
+            <a:endParaRPr lang="es-AR"/>
+          </a:p>
+        </p:txBody>
+      </p:sp>
+      <p:sp>
+        <p:nvSpPr>
+          <p:cNvPr id="9" name="Shape 6"/>
+          <p:cNvSpPr/>
+          <p:nvPr/>
+        </p:nvSpPr>
+        <p:spPr>
+          <a:xfrm>
+            <a:off x="4617720" y="2011680"/>
+            <a:ext cx="502920" cy="502920"/>
+          </a:xfrm>
+          <a:prstGeom prst="roundRect">
+            <a:avLst>
+              <a:gd name="adj" fmla="val 21818"/>
+            </a:avLst>
+          </a:prstGeom>
+          <a:solidFill>
+            <a:srgbClr val="EFF6FF"/>
+          </a:solidFill>
+          <a:ln/>
+        </p:spPr>
+        <p:txBody>
+          <a:bodyPr/>
+          <a:lstStyle/>
+          <a:p>
+            <a:endParaRPr lang="es-AR"/>
+          </a:p>
+        </p:txBody>
+      </p:sp>
+      <p:pic>
+        <p:nvPicPr>
+          <p:cNvPr id="10" name="Image 1" descr="/tmp/deck/icon-invoice-blue.png"/>
+          <p:cNvPicPr>
+            <a:picLocks noChangeAspect="1"/>
+          </p:cNvPicPr>
+          <p:nvPr/>
+        </p:nvPicPr>
+        <p:blipFill>
+          <a:blip r:embed="rId4"/>
+          <a:stretch>
+            <a:fillRect/>
+          </a:stretch>
+        </p:blipFill>
+        <p:spPr>
+          <a:xfrm>
+            <a:off x="4728362" y="2122322"/>
+            <a:ext cx="281635" cy="281635"/>
+          </a:xfrm>
+          <a:prstGeom prst="rect">
+            <a:avLst/>
+          </a:prstGeom>
+        </p:spPr>
+      </p:pic>
+      <p:sp>
+        <p:nvSpPr>
+          <p:cNvPr id="11" name="Text 7"/>
+          <p:cNvSpPr/>
+          <p:nvPr/>
+        </p:nvSpPr>
+        <p:spPr>
+          <a:xfrm>
+            <a:off x="4617720" y="2743200"/>
+            <a:ext cx="3017520" cy="411480"/>
+          </a:xfrm>
+          <a:prstGeom prst="rect">
+            <a:avLst/>
+          </a:prstGeom>
+          <a:noFill/>
+          <a:ln/>
+        </p:spPr>
+        <p:txBody>
+          <a:bodyPr wrap="square" lIns="0" tIns="0" rIns="0" bIns="0" rtlCol="0" anchor="ctr"/>
+          <a:lstStyle/>
+          <a:p>
+            <a:pPr marL="0" indent="0">
+              <a:buNone/>
+            </a:pPr>
+            <a:r>
+              <a:rPr lang="en-US" sz="1700" b="1" dirty="0">
+                <a:solidFill>
+                  <a:srgbClr val="0F172A"/>
+                </a:solidFill>
+                <a:latin typeface="Arial" pitchFamily="34" charset="0"/>
+                <a:ea typeface="Arial" pitchFamily="34" charset="-122"/>
+                <a:cs typeface="Arial" pitchFamily="34" charset="-120"/>
+              </a:rPr>
+              <a:t>Comisión a acordar</a:t>
+            </a:r>
+            <a:endParaRPr lang="en-US" sz="1700" dirty="0"/>
+          </a:p>
+        </p:txBody>
+      </p:sp>
+      <p:sp>
+        <p:nvSpPr>
+          <p:cNvPr id="12" name="Text 8"/>
+          <p:cNvSpPr/>
+          <p:nvPr/>
+        </p:nvSpPr>
+        <p:spPr>
+          <a:xfrm>
+            <a:off x="4617720" y="3200400"/>
+            <a:ext cx="3017520" cy="1554480"/>
+          </a:xfrm>
+          <a:prstGeom prst="rect">
+            <a:avLst/>
+          </a:prstGeom>
+          <a:noFill/>
+          <a:ln/>
+        </p:spPr>
+        <p:txBody>
+          <a:bodyPr wrap="square" lIns="0" tIns="0" rIns="0" bIns="0" rtlCol="0" anchor="ctr"/>
+          <a:lstStyle/>
+          <a:p>
+            <a:pPr marL="0" indent="0">
+              <a:buNone/>
+            </a:pPr>
+            <a:r>
+              <a:rPr lang="en-US" sz="1250" dirty="0">
+                <a:solidFill>
+                  <a:srgbClr val="64748B"/>
+                </a:solidFill>
+                <a:latin typeface="Arial" pitchFamily="34" charset="0"/>
+                <a:ea typeface="Arial" pitchFamily="34" charset="-122"/>
+                <a:cs typeface="Arial" pitchFamily="34" charset="-120"/>
+              </a:rPr>
+              <a:t>Estructura simple de referido: monto fijo o porcentaje por cliente convertido. Lo definimos juntos, sujeto a la normativa aplicable.</a:t>
+            </a:r>
+            <a:endParaRPr lang="en-US" sz="1250" dirty="0"/>
+          </a:p>
+        </p:txBody>
+      </p:sp>
+      <p:sp>
+        <p:nvSpPr>
+          <p:cNvPr id="13" name="Shape 9"/>
+          <p:cNvSpPr/>
+          <p:nvPr/>
+        </p:nvSpPr>
+        <p:spPr>
+          <a:xfrm>
+            <a:off x="8138160" y="1737360"/>
+            <a:ext cx="3566160" cy="3200400"/>
+          </a:xfrm>
+          <a:prstGeom prst="roundRect">
+            <a:avLst>
+              <a:gd name="adj" fmla="val 4000"/>
+            </a:avLst>
+          </a:prstGeom>
+          <a:solidFill>
+            <a:srgbClr val="F1F5F9"/>
+          </a:solidFill>
+          <a:ln/>
+        </p:spPr>
+        <p:txBody>
+          <a:bodyPr/>
+          <a:lstStyle/>
+          <a:p>
+            <a:endParaRPr lang="es-AR"/>
+          </a:p>
+        </p:txBody>
+      </p:sp>
+      <p:sp>
+        <p:nvSpPr>
+          <p:cNvPr id="14" name="Shape 10"/>
+          <p:cNvSpPr/>
+          <p:nvPr/>
+        </p:nvSpPr>
+        <p:spPr>
+          <a:xfrm>
+            <a:off x="8412480" y="2011680"/>
+            <a:ext cx="502920" cy="502920"/>
+          </a:xfrm>
+          <a:prstGeom prst="roundRect">
+            <a:avLst>
+              <a:gd name="adj" fmla="val 21818"/>
+            </a:avLst>
+          </a:prstGeom>
+          <a:solidFill>
+            <a:srgbClr val="EFF6FF"/>
+          </a:solidFill>
+          <a:ln/>
+        </p:spPr>
+        <p:txBody>
+          <a:bodyPr/>
+          <a:lstStyle/>
+          <a:p>
+            <a:endParaRPr lang="es-AR"/>
+          </a:p>
+        </p:txBody>
+      </p:sp>
+      <p:pic>
+        <p:nvPicPr>
+          <p:cNvPr id="15" name="Image 2" descr="/tmp/deck/icon-rocket-blue.png"/>
+          <p:cNvPicPr>
+            <a:picLocks noChangeAspect="1"/>
+          </p:cNvPicPr>
+          <p:nvPr/>
+        </p:nvPicPr>
+        <p:blipFill>
+          <a:blip r:embed="rId5"/>
+          <a:stretch>
+            <a:fillRect/>
+          </a:stretch>
+        </p:blipFill>
+        <p:spPr>
+          <a:xfrm>
             <a:off x="8523122" y="2122322"/>
             <a:ext cx="281635" cy="281635"/>
           </a:xfrm>
@@ -7827,7 +7907,7 @@
           <a:bodyPr wrap="square" lIns="0" tIns="0" rIns="0" bIns="0" rtlCol="0" anchor="ctr"/>
           <a:lstStyle/>
           <a:p>
-            <a:pPr indent="0" marL="0">
+            <a:pPr marL="0" indent="0">
               <a:buNone/>
             </a:pPr>
             <a:r>
@@ -7866,7 +7946,7 @@
           <a:bodyPr wrap="square" lIns="0" tIns="0" rIns="0" bIns="0" rtlCol="0" anchor="ctr"/>
           <a:lstStyle/>
           <a:p>
-            <a:pPr indent="0" marL="0">
+            <a:pPr marL="0" indent="0">
               <a:buNone/>
             </a:pPr>
             <a:r>
@@ -7905,6 +7985,13 @@
           </a:solidFill>
           <a:ln/>
         </p:spPr>
+        <p:txBody>
+          <a:bodyPr/>
+          <a:lstStyle/>
+          <a:p>
+            <a:endParaRPr lang="es-AR"/>
+          </a:p>
+        </p:txBody>
       </p:sp>
       <p:sp>
         <p:nvSpPr>
@@ -7927,7 +8014,7 @@
           <a:bodyPr wrap="square" lIns="0" tIns="0" rIns="0" bIns="0" rtlCol="0" anchor="ctr"/>
           <a:lstStyle/>
           <a:p>
-            <a:pPr indent="0" marL="0">
+            <a:pPr marL="0" indent="0">
               <a:buNone/>
             </a:pPr>
             <a:r>
@@ -7941,9 +8028,6 @@
               </a:rPr>
               <a:t>Tu riesgo: cero. </a:t>
             </a:r>
-            <a:pPr indent="0" marL="0">
-              <a:buNone/>
-            </a:pPr>
             <a:r>
               <a:rPr lang="en-US" sz="1450" dirty="0">
                 <a:solidFill>
@@ -7980,7 +8064,7 @@
           <a:bodyPr wrap="square" lIns="0" tIns="0" rIns="0" bIns="0" rtlCol="0" anchor="ctr"/>
           <a:lstStyle/>
           <a:p>
-            <a:pPr indent="0" marL="0">
+            <a:pPr marL="0" indent="0">
               <a:buNone/>
             </a:pPr>
             <a:r>
@@ -8019,7 +8103,7 @@
           <a:bodyPr wrap="square" lIns="0" tIns="0" rIns="0" bIns="0" rtlCol="0" anchor="ctr"/>
           <a:lstStyle/>
           <a:p>
-            <a:pPr algn="r" indent="0" marL="0">
+            <a:pPr marL="0" indent="0" algn="r">
               <a:buNone/>
             </a:pPr>
             <a:r>
@@ -8053,6 +8137,7 @@
         <a:solidFill>
           <a:srgbClr val="FFFFFF"/>
         </a:solidFill>
+        <a:effectLst/>
       </p:bgPr>
     </p:bg>
     <p:spTree>
@@ -8090,7 +8175,7 @@
           <a:bodyPr wrap="square" lIns="0" tIns="0" rIns="0" bIns="0" rtlCol="0" anchor="ctr"/>
           <a:lstStyle/>
           <a:p>
-            <a:pPr indent="0" marL="0">
+            <a:pPr marL="0" indent="0">
               <a:buNone/>
             </a:pPr>
             <a:r>
@@ -8124,17 +8209,41 @@
         </p:nvGraphicFramePr>
         <p:xfrm>
           <a:off x="548640" y="1737360"/>
-          <a:ext cx="11064240" cy="914400"/>
+          <a:ext cx="11064240" cy="2267712"/>
         </p:xfrm>
         <a:graphic>
           <a:graphicData uri="http://schemas.openxmlformats.org/drawingml/2006/table">
             <a:tbl>
               <a:tblPr/>
               <a:tblGrid>
-                <a:gridCol w="2766060"/>
-                <a:gridCol w="2766060"/>
-                <a:gridCol w="2766060"/>
-                <a:gridCol w="2766060"/>
+                <a:gridCol w="2766060">
+                  <a:extLst>
+                    <a:ext uri="{9D8B030D-6E8A-4147-A177-3AD203B41FA5}">
+                      <a16:colId xmlns:a16="http://schemas.microsoft.com/office/drawing/2014/main" val="20000"/>
+                    </a:ext>
+                  </a:extLst>
+                </a:gridCol>
+                <a:gridCol w="2766060">
+                  <a:extLst>
+                    <a:ext uri="{9D8B030D-6E8A-4147-A177-3AD203B41FA5}">
+                      <a16:colId xmlns:a16="http://schemas.microsoft.com/office/drawing/2014/main" val="20001"/>
+                    </a:ext>
+                  </a:extLst>
+                </a:gridCol>
+                <a:gridCol w="2766060">
+                  <a:extLst>
+                    <a:ext uri="{9D8B030D-6E8A-4147-A177-3AD203B41FA5}">
+                      <a16:colId xmlns:a16="http://schemas.microsoft.com/office/drawing/2014/main" val="20002"/>
+                    </a:ext>
+                  </a:extLst>
+                </a:gridCol>
+                <a:gridCol w="2766060">
+                  <a:extLst>
+                    <a:ext uri="{9D8B030D-6E8A-4147-A177-3AD203B41FA5}">
+                      <a16:colId xmlns:a16="http://schemas.microsoft.com/office/drawing/2014/main" val="20003"/>
+                    </a:ext>
+                  </a:extLst>
+                </a:gridCol>
               </a:tblGrid>
               <a:tr h="566928">
                 <a:tc>
@@ -8142,7 +8251,7 @@
                     <a:bodyPr/>
                     <a:lstStyle/>
                     <a:p>
-                      <a:pPr algn="ctr" indent="0" marL="0">
+                      <a:pPr marL="0" indent="0" algn="ctr">
                         <a:buNone/>
                       </a:pPr>
                       <a:r>
@@ -8163,7 +8272,7 @@
                       </a:endParaRPr>
                     </a:p>
                   </a:txBody>
-                  <a:tcPr marL="91440" marR="91440" marT="45720" marB="45720" anchor="ctr">
+                  <a:tcPr anchor="ctr">
                     <a:lnL w="12700" cap="flat" cmpd="sng" algn="ctr">
                       <a:solidFill>
                         <a:srgbClr val="E2E8F0"/>
@@ -8210,7 +8319,7 @@
                     <a:bodyPr/>
                     <a:lstStyle/>
                     <a:p>
-                      <a:pPr algn="ctr" indent="0" marL="0">
+                      <a:pPr marL="0" indent="0" algn="ctr">
                         <a:buNone/>
                       </a:pPr>
                       <a:r>
@@ -8231,7 +8340,7 @@
                       </a:endParaRPr>
                     </a:p>
                   </a:txBody>
-                  <a:tcPr marL="91440" marR="91440" marT="45720" marB="45720" anchor="ctr">
+                  <a:tcPr anchor="ctr">
                     <a:lnL w="12700" cap="flat" cmpd="sng" algn="ctr">
                       <a:solidFill>
                         <a:srgbClr val="E2E8F0"/>
@@ -8278,7 +8387,7 @@
                     <a:bodyPr/>
                     <a:lstStyle/>
                     <a:p>
-                      <a:pPr algn="ctr" indent="0" marL="0">
+                      <a:pPr marL="0" indent="0" algn="ctr">
                         <a:buNone/>
                       </a:pPr>
                       <a:r>
@@ -8299,7 +8408,7 @@
                       </a:endParaRPr>
                     </a:p>
                   </a:txBody>
-                  <a:tcPr marL="91440" marR="91440" marT="45720" marB="45720" anchor="ctr">
+                  <a:tcPr anchor="ctr">
                     <a:lnL w="12700" cap="flat" cmpd="sng" algn="ctr">
                       <a:solidFill>
                         <a:srgbClr val="E2E8F0"/>
@@ -8346,7 +8455,7 @@
                     <a:bodyPr/>
                     <a:lstStyle/>
                     <a:p>
-                      <a:pPr algn="ctr" indent="0" marL="0">
+                      <a:pPr marL="0" indent="0" algn="ctr">
                         <a:buNone/>
                       </a:pPr>
                       <a:r>
@@ -8367,7 +8476,7 @@
                       </a:endParaRPr>
                     </a:p>
                   </a:txBody>
-                  <a:tcPr marL="91440" marR="91440" marT="45720" marB="45720" anchor="ctr">
+                  <a:tcPr anchor="ctr">
                     <a:lnL w="12700" cap="flat" cmpd="sng" algn="ctr">
                       <a:solidFill>
                         <a:srgbClr val="E2E8F0"/>
@@ -8409,6 +8518,11 @@
                     </a:solidFill>
                   </a:tcPr>
                 </a:tc>
+                <a:extLst>
+                  <a:ext uri="{0D108BD9-81ED-4DB2-BD59-A6C34878D82A}">
+                    <a16:rowId xmlns:a16="http://schemas.microsoft.com/office/drawing/2014/main" val="10000"/>
+                  </a:ext>
+                </a:extLst>
               </a:tr>
               <a:tr h="566928">
                 <a:tc>
@@ -8416,7 +8530,7 @@
                     <a:bodyPr/>
                     <a:lstStyle/>
                     <a:p>
-                      <a:pPr algn="ctr" indent="0" marL="0">
+                      <a:pPr marL="0" indent="0" algn="ctr">
                         <a:buNone/>
                       </a:pPr>
                       <a:r>
@@ -8437,7 +8551,7 @@
                       </a:endParaRPr>
                     </a:p>
                   </a:txBody>
-                  <a:tcPr marL="91440" marR="91440" marT="45720" marB="45720" anchor="ctr">
+                  <a:tcPr anchor="ctr">
                     <a:lnL w="12700" cap="flat" cmpd="sng" algn="ctr">
                       <a:solidFill>
                         <a:srgbClr val="E2E8F0"/>
@@ -8484,7 +8598,7 @@
                     <a:bodyPr/>
                     <a:lstStyle/>
                     <a:p>
-                      <a:pPr algn="ctr" indent="0" marL="0">
+                      <a:pPr marL="0" indent="0" algn="ctr">
                         <a:buNone/>
                       </a:pPr>
                       <a:r>
@@ -8505,7 +8619,7 @@
                       </a:endParaRPr>
                     </a:p>
                   </a:txBody>
-                  <a:tcPr marL="91440" marR="91440" marT="45720" marB="45720" anchor="ctr">
+                  <a:tcPr anchor="ctr">
                     <a:lnL w="12700" cap="flat" cmpd="sng" algn="ctr">
                       <a:solidFill>
                         <a:srgbClr val="E2E8F0"/>
@@ -8552,7 +8666,7 @@
                     <a:bodyPr/>
                     <a:lstStyle/>
                     <a:p>
-                      <a:pPr algn="ctr" indent="0" marL="0">
+                      <a:pPr marL="0" indent="0" algn="ctr">
                         <a:buNone/>
                       </a:pPr>
                       <a:r>
@@ -8573,7 +8687,7 @@
                       </a:endParaRPr>
                     </a:p>
                   </a:txBody>
-                  <a:tcPr marL="91440" marR="91440" marT="45720" marB="45720" anchor="ctr">
+                  <a:tcPr anchor="ctr">
                     <a:lnL w="12700" cap="flat" cmpd="sng" algn="ctr">
                       <a:solidFill>
                         <a:srgbClr val="E2E8F0"/>
@@ -8620,7 +8734,7 @@
                     <a:bodyPr/>
                     <a:lstStyle/>
                     <a:p>
-                      <a:pPr algn="ctr" indent="0" marL="0">
+                      <a:pPr marL="0" indent="0" algn="ctr">
                         <a:buNone/>
                       </a:pPr>
                       <a:r>
@@ -8641,7 +8755,7 @@
                       </a:endParaRPr>
                     </a:p>
                   </a:txBody>
-                  <a:tcPr marL="91440" marR="91440" marT="45720" marB="45720" anchor="ctr">
+                  <a:tcPr anchor="ctr">
                     <a:lnL w="12700" cap="flat" cmpd="sng" algn="ctr">
                       <a:solidFill>
                         <a:srgbClr val="E2E8F0"/>
@@ -8683,6 +8797,11 @@
                     </a:solidFill>
                   </a:tcPr>
                 </a:tc>
+                <a:extLst>
+                  <a:ext uri="{0D108BD9-81ED-4DB2-BD59-A6C34878D82A}">
+                    <a16:rowId xmlns:a16="http://schemas.microsoft.com/office/drawing/2014/main" val="10001"/>
+                  </a:ext>
+                </a:extLst>
               </a:tr>
               <a:tr h="566928">
                 <a:tc>
@@ -8690,7 +8809,7 @@
                     <a:bodyPr/>
                     <a:lstStyle/>
                     <a:p>
-                      <a:pPr algn="ctr" indent="0" marL="0">
+                      <a:pPr marL="0" indent="0" algn="ctr">
                         <a:buNone/>
                       </a:pPr>
                       <a:r>
@@ -8711,7 +8830,7 @@
                       </a:endParaRPr>
                     </a:p>
                   </a:txBody>
-                  <a:tcPr marL="91440" marR="91440" marT="45720" marB="45720" anchor="ctr">
+                  <a:tcPr anchor="ctr">
                     <a:lnL w="12700" cap="flat" cmpd="sng" algn="ctr">
                       <a:solidFill>
                         <a:srgbClr val="E2E8F0"/>
@@ -8758,7 +8877,7 @@
                     <a:bodyPr/>
                     <a:lstStyle/>
                     <a:p>
-                      <a:pPr algn="ctr" indent="0" marL="0">
+                      <a:pPr marL="0" indent="0" algn="ctr">
                         <a:buNone/>
                       </a:pPr>
                       <a:r>
@@ -8779,7 +8898,7 @@
                       </a:endParaRPr>
                     </a:p>
                   </a:txBody>
-                  <a:tcPr marL="91440" marR="91440" marT="45720" marB="45720" anchor="ctr">
+                  <a:tcPr anchor="ctr">
                     <a:lnL w="12700" cap="flat" cmpd="sng" algn="ctr">
                       <a:solidFill>
                         <a:srgbClr val="E2E8F0"/>
@@ -8826,7 +8945,7 @@
                     <a:bodyPr/>
                     <a:lstStyle/>
                     <a:p>
-                      <a:pPr algn="ctr" indent="0" marL="0">
+                      <a:pPr marL="0" indent="0" algn="ctr">
                         <a:buNone/>
                       </a:pPr>
                       <a:r>
@@ -8847,7 +8966,7 @@
                       </a:endParaRPr>
                     </a:p>
                   </a:txBody>
-                  <a:tcPr marL="91440" marR="91440" marT="45720" marB="45720" anchor="ctr">
+                  <a:tcPr anchor="ctr">
                     <a:lnL w="12700" cap="flat" cmpd="sng" algn="ctr">
                       <a:solidFill>
                         <a:srgbClr val="E2E8F0"/>
@@ -8894,7 +9013,7 @@
                     <a:bodyPr/>
                     <a:lstStyle/>
                     <a:p>
-                      <a:pPr algn="ctr" indent="0" marL="0">
+                      <a:pPr marL="0" indent="0" algn="ctr">
                         <a:buNone/>
                       </a:pPr>
                       <a:r>
@@ -8915,7 +9034,7 @@
                       </a:endParaRPr>
                     </a:p>
                   </a:txBody>
-                  <a:tcPr marL="91440" marR="91440" marT="45720" marB="45720" anchor="ctr">
+                  <a:tcPr anchor="ctr">
                     <a:lnL w="12700" cap="flat" cmpd="sng" algn="ctr">
                       <a:solidFill>
                         <a:srgbClr val="E2E8F0"/>
@@ -8957,6 +9076,11 @@
                     </a:solidFill>
                   </a:tcPr>
                 </a:tc>
+                <a:extLst>
+                  <a:ext uri="{0D108BD9-81ED-4DB2-BD59-A6C34878D82A}">
+                    <a16:rowId xmlns:a16="http://schemas.microsoft.com/office/drawing/2014/main" val="10002"/>
+                  </a:ext>
+                </a:extLst>
               </a:tr>
               <a:tr h="566928">
                 <a:tc>
@@ -8964,7 +9088,7 @@
                     <a:bodyPr/>
                     <a:lstStyle/>
                     <a:p>
-                      <a:pPr algn="ctr" indent="0" marL="0">
+                      <a:pPr marL="0" indent="0" algn="ctr">
                         <a:buNone/>
                       </a:pPr>
                       <a:r>
@@ -8985,7 +9109,7 @@
                       </a:endParaRPr>
                     </a:p>
                   </a:txBody>
-                  <a:tcPr marL="91440" marR="91440" marT="45720" marB="45720" anchor="ctr">
+                  <a:tcPr anchor="ctr">
                     <a:lnL w="12700" cap="flat" cmpd="sng" algn="ctr">
                       <a:solidFill>
                         <a:srgbClr val="E2E8F0"/>
@@ -9032,7 +9156,7 @@
                     <a:bodyPr/>
                     <a:lstStyle/>
                     <a:p>
-                      <a:pPr algn="ctr" indent="0" marL="0">
+                      <a:pPr marL="0" indent="0" algn="ctr">
                         <a:buNone/>
                       </a:pPr>
                       <a:r>
@@ -9053,7 +9177,7 @@
                       </a:endParaRPr>
                     </a:p>
                   </a:txBody>
-                  <a:tcPr marL="91440" marR="91440" marT="45720" marB="45720" anchor="ctr">
+                  <a:tcPr anchor="ctr">
                     <a:lnL w="12700" cap="flat" cmpd="sng" algn="ctr">
                       <a:solidFill>
                         <a:srgbClr val="E2E8F0"/>
@@ -9100,7 +9224,7 @@
                     <a:bodyPr/>
                     <a:lstStyle/>
                     <a:p>
-                      <a:pPr algn="ctr" indent="0" marL="0">
+                      <a:pPr marL="0" indent="0" algn="ctr">
                         <a:buNone/>
                       </a:pPr>
                       <a:r>
@@ -9121,7 +9245,7 @@
                       </a:endParaRPr>
                     </a:p>
                   </a:txBody>
-                  <a:tcPr marL="91440" marR="91440" marT="45720" marB="45720" anchor="ctr">
+                  <a:tcPr anchor="ctr">
                     <a:lnL w="12700" cap="flat" cmpd="sng" algn="ctr">
                       <a:solidFill>
                         <a:srgbClr val="E2E8F0"/>
@@ -9168,7 +9292,7 @@
                     <a:bodyPr/>
                     <a:lstStyle/>
                     <a:p>
-                      <a:pPr algn="ctr" indent="0" marL="0">
+                      <a:pPr marL="0" indent="0" algn="ctr">
                         <a:buNone/>
                       </a:pPr>
                       <a:r>
@@ -9189,7 +9313,7 @@
                       </a:endParaRPr>
                     </a:p>
                   </a:txBody>
-                  <a:tcPr marL="91440" marR="91440" marT="45720" marB="45720" anchor="ctr">
+                  <a:tcPr anchor="ctr">
                     <a:lnL w="12700" cap="flat" cmpd="sng" algn="ctr">
                       <a:solidFill>
                         <a:srgbClr val="E2E8F0"/>
@@ -9231,6 +9355,11 @@
                     </a:solidFill>
                   </a:tcPr>
                 </a:tc>
+                <a:extLst>
+                  <a:ext uri="{0D108BD9-81ED-4DB2-BD59-A6C34878D82A}">
+                    <a16:rowId xmlns:a16="http://schemas.microsoft.com/office/drawing/2014/main" val="10003"/>
+                  </a:ext>
+                </a:extLst>
               </a:tr>
             </a:tbl>
           </a:graphicData>
@@ -9257,6 +9386,13 @@
           </a:solidFill>
           <a:ln/>
         </p:spPr>
+        <p:txBody>
+          <a:bodyPr/>
+          <a:lstStyle/>
+          <a:p>
+            <a:endParaRPr lang="es-AR"/>
+          </a:p>
+        </p:txBody>
       </p:sp>
       <p:sp>
         <p:nvSpPr>
@@ -9279,7 +9415,7 @@
           <a:bodyPr wrap="square" lIns="0" tIns="0" rIns="0" bIns="0" rtlCol="0" anchor="ctr"/>
           <a:lstStyle/>
           <a:p>
-            <a:pPr indent="0" marL="0">
+            <a:pPr marL="0" indent="0">
               <a:buNone/>
             </a:pPr>
             <a:r>
@@ -9293,9 +9429,6 @@
               </a:rPr>
               <a:t>Supuestos: </a:t>
             </a:r>
-            <a:pPr indent="0" marL="0">
-              <a:buNone/>
-            </a:pPr>
             <a:r>
               <a:rPr lang="en-US" sz="1150" dirty="0">
                 <a:solidFill>
@@ -9307,9 +9440,6 @@
               </a:rPr>
               <a:t>CPC USD 0,50–0,90 (Meta Ads, audiencias ES-LATAM, vertical finanzas) · 35% de los visitantes completa el cálculo (herramienta de 3 min sin registro) · 3–4% de quienes calculan pide un asesor. </a:t>
             </a:r>
-            <a:pPr indent="0" marL="0">
-              <a:buNone/>
-            </a:pPr>
             <a:r>
               <a:rPr lang="en-US" sz="1150" b="1" i="1" dirty="0">
                 <a:solidFill>
@@ -9346,7 +9476,7 @@
           <a:bodyPr wrap="square" lIns="0" tIns="0" rIns="0" bIns="0" rtlCol="0" anchor="ctr"/>
           <a:lstStyle/>
           <a:p>
-            <a:pPr indent="0" marL="0">
+            <a:pPr marL="0" indent="0">
               <a:buNone/>
             </a:pPr>
             <a:r>
@@ -9385,7 +9515,7 @@
           <a:bodyPr wrap="square" lIns="0" tIns="0" rIns="0" bIns="0" rtlCol="0" anchor="ctr"/>
           <a:lstStyle/>
           <a:p>
-            <a:pPr indent="0" marL="0">
+            <a:pPr marL="0" indent="0">
               <a:buNone/>
             </a:pPr>
             <a:r>
@@ -9424,7 +9554,7 @@
           <a:bodyPr wrap="square" lIns="0" tIns="0" rIns="0" bIns="0" rtlCol="0" anchor="ctr"/>
           <a:lstStyle/>
           <a:p>
-            <a:pPr algn="r" indent="0" marL="0">
+            <a:pPr marL="0" indent="0" algn="r">
               <a:buNone/>
             </a:pPr>
             <a:r>
@@ -9458,6 +9588,7 @@
         <a:solidFill>
           <a:srgbClr val="FFFFFF"/>
         </a:solidFill>
+        <a:effectLst/>
       </p:bgPr>
     </p:bg>
     <p:spTree>
@@ -9495,7 +9626,7 @@
           <a:bodyPr wrap="square" lIns="0" tIns="0" rIns="0" bIns="0" rtlCol="0" anchor="ctr"/>
           <a:lstStyle/>
           <a:p>
-            <a:pPr indent="0" marL="0">
+            <a:pPr marL="0" indent="0">
               <a:buNone/>
             </a:pPr>
             <a:r>
@@ -9534,6 +9665,13 @@
           </a:solidFill>
           <a:ln/>
         </p:spPr>
+        <p:txBody>
+          <a:bodyPr/>
+          <a:lstStyle/>
+          <a:p>
+            <a:endParaRPr lang="es-AR"/>
+          </a:p>
+        </p:txBody>
       </p:sp>
       <p:sp>
         <p:nvSpPr>
@@ -9556,302 +9694,17 @@
           </a:solidFill>
           <a:ln/>
         </p:spPr>
+        <p:txBody>
+          <a:bodyPr/>
+          <a:lstStyle/>
+          <a:p>
+            <a:endParaRPr lang="es-AR"/>
+          </a:p>
+        </p:txBody>
       </p:sp>
       <p:pic>
         <p:nvPicPr>
-          <p:cNvPr id="5" name="Image 0" descr="/tmp/deck/icon-flask-blue.png">    </p:cNvPr>
-          <p:cNvPicPr>
-            <a:picLocks noChangeAspect="1"/>
-          </p:cNvPicPr>
-          <p:nvPr/>
-        </p:nvPicPr>
-        <p:blipFill>
-          <a:blip r:embed="rId1"/>
-          <a:stretch>
-            <a:fillRect/>
-          </a:stretch>
-        </p:blipFill>
-        <p:spPr>
-          <a:xfrm>
-            <a:off x="873801" y="2016801"/>
-            <a:ext cx="245791" cy="245791"/>
-          </a:xfrm>
-          <a:prstGeom prst="rect">
-            <a:avLst/>
-          </a:prstGeom>
-        </p:spPr>
-      </p:pic>
-      <p:sp>
-        <p:nvSpPr>
-          <p:cNvPr id="6" name="Text 3"/>
-          <p:cNvSpPr/>
-          <p:nvPr/>
-        </p:nvSpPr>
-        <p:spPr>
-          <a:xfrm>
-            <a:off x="1417320" y="1892808"/>
-            <a:ext cx="4343400" cy="365760"/>
-          </a:xfrm>
-          <a:prstGeom prst="rect">
-            <a:avLst/>
-          </a:prstGeom>
-          <a:noFill/>
-          <a:ln/>
-        </p:spPr>
-        <p:txBody>
-          <a:bodyPr wrap="square" lIns="0" tIns="0" rIns="0" bIns="0" rtlCol="0" anchor="ctr"/>
-          <a:lstStyle/>
-          <a:p>
-            <a:pPr indent="0" marL="0">
-              <a:buNone/>
-            </a:pPr>
-            <a:r>
-              <a:rPr lang="en-US" sz="1550" b="1" dirty="0">
-                <a:solidFill>
-                  <a:srgbClr val="0F172A"/>
-                </a:solidFill>
-                <a:latin typeface="Arial" pitchFamily="34" charset="0"/>
-                <a:ea typeface="Arial" pitchFamily="34" charset="-122"/>
-                <a:cs typeface="Arial" pitchFamily="34" charset="-120"/>
-              </a:rPr>
-              <a:t>Motor testeado</a:t>
-            </a:r>
-            <a:endParaRPr lang="en-US" sz="1550" dirty="0"/>
-          </a:p>
-        </p:txBody>
-      </p:sp>
-      <p:sp>
-        <p:nvSpPr>
-          <p:cNvPr id="7" name="Text 4"/>
-          <p:cNvSpPr/>
-          <p:nvPr/>
-        </p:nvSpPr>
-        <p:spPr>
-          <a:xfrm>
-            <a:off x="1417320" y="2258568"/>
-            <a:ext cx="4343400" cy="1097280"/>
-          </a:xfrm>
-          <a:prstGeom prst="rect">
-            <a:avLst/>
-          </a:prstGeom>
-          <a:noFill/>
-          <a:ln/>
-        </p:spPr>
-        <p:txBody>
-          <a:bodyPr wrap="square" lIns="0" tIns="0" rIns="0" bIns="0" rtlCol="0" anchor="ctr"/>
-          <a:lstStyle/>
-          <a:p>
-            <a:pPr indent="0" marL="0">
-              <a:buNone/>
-            </a:pPr>
-            <a:r>
-              <a:rPr lang="en-US" sz="1150" dirty="0">
-                <a:solidFill>
-                  <a:srgbClr val="64748B"/>
-                </a:solidFill>
-                <a:latin typeface="Arial" pitchFamily="34" charset="0"/>
-                <a:ea typeface="Arial" pitchFamily="34" charset="-122"/>
-                <a:cs typeface="Arial" pitchFamily="34" charset="-120"/>
-              </a:rPr>
-              <a:t>40 tests automáticos sobre la matemática financiera. Capitalización mensual consistente en todo el producto.</a:t>
-            </a:r>
-            <a:endParaRPr lang="en-US" sz="1150" dirty="0"/>
-          </a:p>
-        </p:txBody>
-      </p:sp>
-      <p:sp>
-        <p:nvSpPr>
-          <p:cNvPr id="8" name="Shape 5"/>
-          <p:cNvSpPr/>
-          <p:nvPr/>
-        </p:nvSpPr>
-        <p:spPr>
-          <a:xfrm>
-            <a:off x="6217920" y="1691640"/>
-            <a:ext cx="5440680" cy="1783080"/>
-          </a:xfrm>
-          <a:prstGeom prst="roundRect">
-            <a:avLst>
-              <a:gd name="adj" fmla="val 7179"/>
-            </a:avLst>
-          </a:prstGeom>
-          <a:solidFill>
-            <a:srgbClr val="F1F5F9"/>
-          </a:solidFill>
-          <a:ln/>
-        </p:spPr>
-      </p:sp>
-      <p:sp>
-        <p:nvSpPr>
-          <p:cNvPr id="9" name="Shape 6"/>
-          <p:cNvSpPr/>
-          <p:nvPr/>
-        </p:nvSpPr>
-        <p:spPr>
-          <a:xfrm>
-            <a:off x="6446520" y="1920240"/>
-            <a:ext cx="438912" cy="438912"/>
-          </a:xfrm>
-          <a:prstGeom prst="roundRect">
-            <a:avLst>
-              <a:gd name="adj" fmla="val 25000"/>
-            </a:avLst>
-          </a:prstGeom>
-          <a:solidFill>
-            <a:srgbClr val="EFF6FF"/>
-          </a:solidFill>
-          <a:ln/>
-        </p:spPr>
-      </p:sp>
-      <p:pic>
-        <p:nvPicPr>
-          <p:cNvPr id="10" name="Image 1" descr="/tmp/deck/icon-check-blue.png">    </p:cNvPr>
-          <p:cNvPicPr>
-            <a:picLocks noChangeAspect="1"/>
-          </p:cNvPicPr>
-          <p:nvPr/>
-        </p:nvPicPr>
-        <p:blipFill>
-          <a:blip r:embed="rId2"/>
-          <a:stretch>
-            <a:fillRect/>
-          </a:stretch>
-        </p:blipFill>
-        <p:spPr>
-          <a:xfrm>
-            <a:off x="6543081" y="2016801"/>
-            <a:ext cx="245791" cy="245791"/>
-          </a:xfrm>
-          <a:prstGeom prst="rect">
-            <a:avLst/>
-          </a:prstGeom>
-        </p:spPr>
-      </p:pic>
-      <p:sp>
-        <p:nvSpPr>
-          <p:cNvPr id="11" name="Text 7"/>
-          <p:cNvSpPr/>
-          <p:nvPr/>
-        </p:nvSpPr>
-        <p:spPr>
-          <a:xfrm>
-            <a:off x="7086600" y="1892808"/>
-            <a:ext cx="4343400" cy="365760"/>
-          </a:xfrm>
-          <a:prstGeom prst="rect">
-            <a:avLst/>
-          </a:prstGeom>
-          <a:noFill/>
-          <a:ln/>
-        </p:spPr>
-        <p:txBody>
-          <a:bodyPr wrap="square" lIns="0" tIns="0" rIns="0" bIns="0" rtlCol="0" anchor="ctr"/>
-          <a:lstStyle/>
-          <a:p>
-            <a:pPr indent="0" marL="0">
-              <a:buNone/>
-            </a:pPr>
-            <a:r>
-              <a:rPr lang="en-US" sz="1550" b="1" dirty="0">
-                <a:solidFill>
-                  <a:srgbClr val="0F172A"/>
-                </a:solidFill>
-                <a:latin typeface="Arial" pitchFamily="34" charset="0"/>
-                <a:ea typeface="Arial" pitchFamily="34" charset="-122"/>
-                <a:cs typeface="Arial" pitchFamily="34" charset="-120"/>
-              </a:rPr>
-              <a:t>Metodología pública</a:t>
-            </a:r>
-            <a:endParaRPr lang="en-US" sz="1550" dirty="0"/>
-          </a:p>
-        </p:txBody>
-      </p:sp>
-      <p:sp>
-        <p:nvSpPr>
-          <p:cNvPr id="12" name="Text 8"/>
-          <p:cNvSpPr/>
-          <p:nvPr/>
-        </p:nvSpPr>
-        <p:spPr>
-          <a:xfrm>
-            <a:off x="7086600" y="2258568"/>
-            <a:ext cx="4343400" cy="1097280"/>
-          </a:xfrm>
-          <a:prstGeom prst="rect">
-            <a:avLst/>
-          </a:prstGeom>
-          <a:noFill/>
-          <a:ln/>
-        </p:spPr>
-        <p:txBody>
-          <a:bodyPr wrap="square" lIns="0" tIns="0" rIns="0" bIns="0" rtlCol="0" anchor="ctr"/>
-          <a:lstStyle/>
-          <a:p>
-            <a:pPr indent="0" marL="0">
-              <a:buNone/>
-            </a:pPr>
-            <a:r>
-              <a:rPr lang="en-US" sz="1150" dirty="0">
-                <a:solidFill>
-                  <a:srgbClr val="64748B"/>
-                </a:solidFill>
-                <a:latin typeface="Arial" pitchFamily="34" charset="0"/>
-                <a:ea typeface="Arial" pitchFamily="34" charset="-122"/>
-                <a:cs typeface="Arial" pitchFamily="34" charset="-120"/>
-              </a:rPr>
-              <a:t>Sección "Cómo calculamos" abierta a cualquiera: fórmulas, supuestos y límites del modelo, sin letra chica.</a:t>
-            </a:r>
-            <a:endParaRPr lang="en-US" sz="1150" dirty="0"/>
-          </a:p>
-        </p:txBody>
-      </p:sp>
-      <p:sp>
-        <p:nvSpPr>
-          <p:cNvPr id="13" name="Shape 9"/>
-          <p:cNvSpPr/>
-          <p:nvPr/>
-        </p:nvSpPr>
-        <p:spPr>
-          <a:xfrm>
-            <a:off x="548640" y="3703320"/>
-            <a:ext cx="5440680" cy="1783080"/>
-          </a:xfrm>
-          <a:prstGeom prst="roundRect">
-            <a:avLst>
-              <a:gd name="adj" fmla="val 7179"/>
-            </a:avLst>
-          </a:prstGeom>
-          <a:solidFill>
-            <a:srgbClr val="F1F5F9"/>
-          </a:solidFill>
-          <a:ln/>
-        </p:spPr>
-      </p:sp>
-      <p:sp>
-        <p:nvSpPr>
-          <p:cNvPr id="14" name="Shape 10"/>
-          <p:cNvSpPr/>
-          <p:nvPr/>
-        </p:nvSpPr>
-        <p:spPr>
-          <a:xfrm>
-            <a:off x="777240" y="3931920"/>
-            <a:ext cx="438912" cy="438912"/>
-          </a:xfrm>
-          <a:prstGeom prst="roundRect">
-            <a:avLst>
-              <a:gd name="adj" fmla="val 25000"/>
-            </a:avLst>
-          </a:prstGeom>
-          <a:solidFill>
-            <a:srgbClr val="EFF6FF"/>
-          </a:solidFill>
-          <a:ln/>
-        </p:spPr>
-      </p:sp>
-      <p:pic>
-        <p:nvPicPr>
-          <p:cNvPr id="15" name="Image 2" descr="/tmp/deck/icon-chart-blue.png">    </p:cNvPr>
+          <p:cNvPr id="5" name="Image 0" descr="/tmp/deck/icon-flask-blue.png"/>
           <p:cNvPicPr>
             <a:picLocks noChangeAspect="1"/>
           </p:cNvPicPr>
@@ -9865,7 +9718,7 @@
         </p:blipFill>
         <p:spPr>
           <a:xfrm>
-            <a:off x="873801" y="4028481"/>
+            <a:off x="873801" y="2016801"/>
             <a:ext cx="245791" cy="245791"/>
           </a:xfrm>
           <a:prstGeom prst="rect">
@@ -9875,13 +9728,13 @@
       </p:pic>
       <p:sp>
         <p:nvSpPr>
-          <p:cNvPr id="16" name="Text 11"/>
-          <p:cNvSpPr/>
-          <p:nvPr/>
-        </p:nvSpPr>
-        <p:spPr>
-          <a:xfrm>
-            <a:off x="1417320" y="3904488"/>
+          <p:cNvPr id="6" name="Text 3"/>
+          <p:cNvSpPr/>
+          <p:nvPr/>
+        </p:nvSpPr>
+        <p:spPr>
+          <a:xfrm>
+            <a:off x="1417320" y="1892808"/>
             <a:ext cx="4343400" cy="365760"/>
           </a:xfrm>
           <a:prstGeom prst="rect">
@@ -9894,7 +9747,7 @@
           <a:bodyPr wrap="square" lIns="0" tIns="0" rIns="0" bIns="0" rtlCol="0" anchor="ctr"/>
           <a:lstStyle/>
           <a:p>
-            <a:pPr indent="0" marL="0">
+            <a:pPr marL="0" indent="0">
               <a:buNone/>
             </a:pPr>
             <a:r>
@@ -9906,7 +9759,7 @@
                 <a:ea typeface="Arial" pitchFamily="34" charset="-122"/>
                 <a:cs typeface="Arial" pitchFamily="34" charset="-120"/>
               </a:rPr>
-              <a:t>Números honestos</a:t>
+              <a:t>Motor testeado</a:t>
             </a:r>
             <a:endParaRPr lang="en-US" sz="1550" dirty="0"/>
           </a:p>
@@ -9914,13 +9767,13 @@
       </p:sp>
       <p:sp>
         <p:nvSpPr>
-          <p:cNvPr id="17" name="Text 12"/>
-          <p:cNvSpPr/>
-          <p:nvPr/>
-        </p:nvSpPr>
-        <p:spPr>
-          <a:xfrm>
-            <a:off x="1417320" y="4270248"/>
+          <p:cNvPr id="7" name="Text 4"/>
+          <p:cNvSpPr/>
+          <p:nvPr/>
+        </p:nvSpPr>
+        <p:spPr>
+          <a:xfrm>
+            <a:off x="1417320" y="2258568"/>
             <a:ext cx="4343400" cy="1097280"/>
           </a:xfrm>
           <a:prstGeom prst="rect">
@@ -9933,7 +9786,7 @@
           <a:bodyPr wrap="square" lIns="0" tIns="0" rIns="0" bIns="0" rtlCol="0" anchor="ctr"/>
           <a:lstStyle/>
           <a:p>
-            <a:pPr indent="0" marL="0">
+            <a:pPr marL="0" indent="0">
               <a:buNone/>
             </a:pPr>
             <a:r>
@@ -9945,7 +9798,7 @@
                 <a:ea typeface="Arial" pitchFamily="34" charset="-122"/>
                 <a:cs typeface="Arial" pitchFamily="34" charset="-120"/>
               </a:rPr>
-              <a:t>Retornos reales netos de inflación, en dólares constantes. Advertencias explícitas contra retornos irreales.</a:t>
+              <a:t>40 tests automáticos sobre la matemática financiera. Capitalización mensual consistente en todo el producto.</a:t>
             </a:r>
             <a:endParaRPr lang="en-US" sz="1150" dirty="0"/>
           </a:p>
@@ -9953,13 +9806,13 @@
       </p:sp>
       <p:sp>
         <p:nvSpPr>
-          <p:cNvPr id="18" name="Shape 13"/>
-          <p:cNvSpPr/>
-          <p:nvPr/>
-        </p:nvSpPr>
-        <p:spPr>
-          <a:xfrm>
-            <a:off x="6217920" y="3703320"/>
+          <p:cNvPr id="8" name="Shape 5"/>
+          <p:cNvSpPr/>
+          <p:nvPr/>
+        </p:nvSpPr>
+        <p:spPr>
+          <a:xfrm>
+            <a:off x="6217920" y="1691640"/>
             <a:ext cx="5440680" cy="1783080"/>
           </a:xfrm>
           <a:prstGeom prst="roundRect">
@@ -9972,16 +9825,23 @@
           </a:solidFill>
           <a:ln/>
         </p:spPr>
-      </p:sp>
-      <p:sp>
-        <p:nvSpPr>
-          <p:cNvPr id="19" name="Shape 14"/>
-          <p:cNvSpPr/>
-          <p:nvPr/>
-        </p:nvSpPr>
-        <p:spPr>
-          <a:xfrm>
-            <a:off x="6446520" y="3931920"/>
+        <p:txBody>
+          <a:bodyPr/>
+          <a:lstStyle/>
+          <a:p>
+            <a:endParaRPr lang="es-AR"/>
+          </a:p>
+        </p:txBody>
+      </p:sp>
+      <p:sp>
+        <p:nvSpPr>
+          <p:cNvPr id="9" name="Shape 6"/>
+          <p:cNvSpPr/>
+          <p:nvPr/>
+        </p:nvSpPr>
+        <p:spPr>
+          <a:xfrm>
+            <a:off x="6446520" y="1920240"/>
             <a:ext cx="438912" cy="438912"/>
           </a:xfrm>
           <a:prstGeom prst="roundRect">
@@ -9994,10 +9854,17 @@
           </a:solidFill>
           <a:ln/>
         </p:spPr>
+        <p:txBody>
+          <a:bodyPr/>
+          <a:lstStyle/>
+          <a:p>
+            <a:endParaRPr lang="es-AR"/>
+          </a:p>
+        </p:txBody>
       </p:sp>
       <p:pic>
         <p:nvPicPr>
-          <p:cNvPr id="20" name="Image 3" descr="/tmp/deck/icon-privacy-blue.png">    </p:cNvPr>
+          <p:cNvPr id="10" name="Image 1" descr="/tmp/deck/icon-check-blue.png"/>
           <p:cNvPicPr>
             <a:picLocks noChangeAspect="1"/>
           </p:cNvPicPr>
@@ -10011,6 +9878,326 @@
         </p:blipFill>
         <p:spPr>
           <a:xfrm>
+            <a:off x="6543081" y="2016801"/>
+            <a:ext cx="245791" cy="245791"/>
+          </a:xfrm>
+          <a:prstGeom prst="rect">
+            <a:avLst/>
+          </a:prstGeom>
+        </p:spPr>
+      </p:pic>
+      <p:sp>
+        <p:nvSpPr>
+          <p:cNvPr id="11" name="Text 7"/>
+          <p:cNvSpPr/>
+          <p:nvPr/>
+        </p:nvSpPr>
+        <p:spPr>
+          <a:xfrm>
+            <a:off x="7086600" y="1892808"/>
+            <a:ext cx="4343400" cy="365760"/>
+          </a:xfrm>
+          <a:prstGeom prst="rect">
+            <a:avLst/>
+          </a:prstGeom>
+          <a:noFill/>
+          <a:ln/>
+        </p:spPr>
+        <p:txBody>
+          <a:bodyPr wrap="square" lIns="0" tIns="0" rIns="0" bIns="0" rtlCol="0" anchor="ctr"/>
+          <a:lstStyle/>
+          <a:p>
+            <a:pPr marL="0" indent="0">
+              <a:buNone/>
+            </a:pPr>
+            <a:r>
+              <a:rPr lang="en-US" sz="1550" b="1" dirty="0">
+                <a:solidFill>
+                  <a:srgbClr val="0F172A"/>
+                </a:solidFill>
+                <a:latin typeface="Arial" pitchFamily="34" charset="0"/>
+                <a:ea typeface="Arial" pitchFamily="34" charset="-122"/>
+                <a:cs typeface="Arial" pitchFamily="34" charset="-120"/>
+              </a:rPr>
+              <a:t>Metodología pública</a:t>
+            </a:r>
+            <a:endParaRPr lang="en-US" sz="1550" dirty="0"/>
+          </a:p>
+        </p:txBody>
+      </p:sp>
+      <p:sp>
+        <p:nvSpPr>
+          <p:cNvPr id="12" name="Text 8"/>
+          <p:cNvSpPr/>
+          <p:nvPr/>
+        </p:nvSpPr>
+        <p:spPr>
+          <a:xfrm>
+            <a:off x="7086600" y="2258568"/>
+            <a:ext cx="4343400" cy="1097280"/>
+          </a:xfrm>
+          <a:prstGeom prst="rect">
+            <a:avLst/>
+          </a:prstGeom>
+          <a:noFill/>
+          <a:ln/>
+        </p:spPr>
+        <p:txBody>
+          <a:bodyPr wrap="square" lIns="0" tIns="0" rIns="0" bIns="0" rtlCol="0" anchor="ctr"/>
+          <a:lstStyle/>
+          <a:p>
+            <a:pPr marL="0" indent="0">
+              <a:buNone/>
+            </a:pPr>
+            <a:r>
+              <a:rPr lang="en-US" sz="1150" dirty="0">
+                <a:solidFill>
+                  <a:srgbClr val="64748B"/>
+                </a:solidFill>
+                <a:latin typeface="Arial" pitchFamily="34" charset="0"/>
+                <a:ea typeface="Arial" pitchFamily="34" charset="-122"/>
+                <a:cs typeface="Arial" pitchFamily="34" charset="-120"/>
+              </a:rPr>
+              <a:t>Sección "Cómo calculamos" abierta a cualquiera: fórmulas, supuestos y límites del modelo, sin letra chica.</a:t>
+            </a:r>
+            <a:endParaRPr lang="en-US" sz="1150" dirty="0"/>
+          </a:p>
+        </p:txBody>
+      </p:sp>
+      <p:sp>
+        <p:nvSpPr>
+          <p:cNvPr id="13" name="Shape 9"/>
+          <p:cNvSpPr/>
+          <p:nvPr/>
+        </p:nvSpPr>
+        <p:spPr>
+          <a:xfrm>
+            <a:off x="548640" y="3703320"/>
+            <a:ext cx="5440680" cy="1783080"/>
+          </a:xfrm>
+          <a:prstGeom prst="roundRect">
+            <a:avLst>
+              <a:gd name="adj" fmla="val 7179"/>
+            </a:avLst>
+          </a:prstGeom>
+          <a:solidFill>
+            <a:srgbClr val="F1F5F9"/>
+          </a:solidFill>
+          <a:ln/>
+        </p:spPr>
+        <p:txBody>
+          <a:bodyPr/>
+          <a:lstStyle/>
+          <a:p>
+            <a:endParaRPr lang="es-AR"/>
+          </a:p>
+        </p:txBody>
+      </p:sp>
+      <p:sp>
+        <p:nvSpPr>
+          <p:cNvPr id="14" name="Shape 10"/>
+          <p:cNvSpPr/>
+          <p:nvPr/>
+        </p:nvSpPr>
+        <p:spPr>
+          <a:xfrm>
+            <a:off x="777240" y="3931920"/>
+            <a:ext cx="438912" cy="438912"/>
+          </a:xfrm>
+          <a:prstGeom prst="roundRect">
+            <a:avLst>
+              <a:gd name="adj" fmla="val 25000"/>
+            </a:avLst>
+          </a:prstGeom>
+          <a:solidFill>
+            <a:srgbClr val="EFF6FF"/>
+          </a:solidFill>
+          <a:ln/>
+        </p:spPr>
+        <p:txBody>
+          <a:bodyPr/>
+          <a:lstStyle/>
+          <a:p>
+            <a:endParaRPr lang="es-AR"/>
+          </a:p>
+        </p:txBody>
+      </p:sp>
+      <p:pic>
+        <p:nvPicPr>
+          <p:cNvPr id="15" name="Image 2" descr="/tmp/deck/icon-chart-blue.png"/>
+          <p:cNvPicPr>
+            <a:picLocks noChangeAspect="1"/>
+          </p:cNvPicPr>
+          <p:nvPr/>
+        </p:nvPicPr>
+        <p:blipFill>
+          <a:blip r:embed="rId5"/>
+          <a:stretch>
+            <a:fillRect/>
+          </a:stretch>
+        </p:blipFill>
+        <p:spPr>
+          <a:xfrm>
+            <a:off x="873801" y="4028481"/>
+            <a:ext cx="245791" cy="245791"/>
+          </a:xfrm>
+          <a:prstGeom prst="rect">
+            <a:avLst/>
+          </a:prstGeom>
+        </p:spPr>
+      </p:pic>
+      <p:sp>
+        <p:nvSpPr>
+          <p:cNvPr id="16" name="Text 11"/>
+          <p:cNvSpPr/>
+          <p:nvPr/>
+        </p:nvSpPr>
+        <p:spPr>
+          <a:xfrm>
+            <a:off x="1417320" y="3904488"/>
+            <a:ext cx="4343400" cy="365760"/>
+          </a:xfrm>
+          <a:prstGeom prst="rect">
+            <a:avLst/>
+          </a:prstGeom>
+          <a:noFill/>
+          <a:ln/>
+        </p:spPr>
+        <p:txBody>
+          <a:bodyPr wrap="square" lIns="0" tIns="0" rIns="0" bIns="0" rtlCol="0" anchor="ctr"/>
+          <a:lstStyle/>
+          <a:p>
+            <a:pPr marL="0" indent="0">
+              <a:buNone/>
+            </a:pPr>
+            <a:r>
+              <a:rPr lang="en-US" sz="1550" b="1" dirty="0">
+                <a:solidFill>
+                  <a:srgbClr val="0F172A"/>
+                </a:solidFill>
+                <a:latin typeface="Arial" pitchFamily="34" charset="0"/>
+                <a:ea typeface="Arial" pitchFamily="34" charset="-122"/>
+                <a:cs typeface="Arial" pitchFamily="34" charset="-120"/>
+              </a:rPr>
+              <a:t>Números honestos</a:t>
+            </a:r>
+            <a:endParaRPr lang="en-US" sz="1550" dirty="0"/>
+          </a:p>
+        </p:txBody>
+      </p:sp>
+      <p:sp>
+        <p:nvSpPr>
+          <p:cNvPr id="17" name="Text 12"/>
+          <p:cNvSpPr/>
+          <p:nvPr/>
+        </p:nvSpPr>
+        <p:spPr>
+          <a:xfrm>
+            <a:off x="1417320" y="4270248"/>
+            <a:ext cx="4343400" cy="1097280"/>
+          </a:xfrm>
+          <a:prstGeom prst="rect">
+            <a:avLst/>
+          </a:prstGeom>
+          <a:noFill/>
+          <a:ln/>
+        </p:spPr>
+        <p:txBody>
+          <a:bodyPr wrap="square" lIns="0" tIns="0" rIns="0" bIns="0" rtlCol="0" anchor="ctr"/>
+          <a:lstStyle/>
+          <a:p>
+            <a:pPr marL="0" indent="0">
+              <a:buNone/>
+            </a:pPr>
+            <a:r>
+              <a:rPr lang="en-US" sz="1150" dirty="0">
+                <a:solidFill>
+                  <a:srgbClr val="64748B"/>
+                </a:solidFill>
+                <a:latin typeface="Arial" pitchFamily="34" charset="0"/>
+                <a:ea typeface="Arial" pitchFamily="34" charset="-122"/>
+                <a:cs typeface="Arial" pitchFamily="34" charset="-120"/>
+              </a:rPr>
+              <a:t>Retornos reales netos de inflación, en dólares constantes. Advertencias explícitas contra retornos irreales.</a:t>
+            </a:r>
+            <a:endParaRPr lang="en-US" sz="1150" dirty="0"/>
+          </a:p>
+        </p:txBody>
+      </p:sp>
+      <p:sp>
+        <p:nvSpPr>
+          <p:cNvPr id="18" name="Shape 13"/>
+          <p:cNvSpPr/>
+          <p:nvPr/>
+        </p:nvSpPr>
+        <p:spPr>
+          <a:xfrm>
+            <a:off x="6217920" y="3703320"/>
+            <a:ext cx="5440680" cy="1783080"/>
+          </a:xfrm>
+          <a:prstGeom prst="roundRect">
+            <a:avLst>
+              <a:gd name="adj" fmla="val 7179"/>
+            </a:avLst>
+          </a:prstGeom>
+          <a:solidFill>
+            <a:srgbClr val="F1F5F9"/>
+          </a:solidFill>
+          <a:ln/>
+        </p:spPr>
+        <p:txBody>
+          <a:bodyPr/>
+          <a:lstStyle/>
+          <a:p>
+            <a:endParaRPr lang="es-AR"/>
+          </a:p>
+        </p:txBody>
+      </p:sp>
+      <p:sp>
+        <p:nvSpPr>
+          <p:cNvPr id="19" name="Shape 14"/>
+          <p:cNvSpPr/>
+          <p:nvPr/>
+        </p:nvSpPr>
+        <p:spPr>
+          <a:xfrm>
+            <a:off x="6446520" y="3931920"/>
+            <a:ext cx="438912" cy="438912"/>
+          </a:xfrm>
+          <a:prstGeom prst="roundRect">
+            <a:avLst>
+              <a:gd name="adj" fmla="val 25000"/>
+            </a:avLst>
+          </a:prstGeom>
+          <a:solidFill>
+            <a:srgbClr val="EFF6FF"/>
+          </a:solidFill>
+          <a:ln/>
+        </p:spPr>
+        <p:txBody>
+          <a:bodyPr/>
+          <a:lstStyle/>
+          <a:p>
+            <a:endParaRPr lang="es-AR"/>
+          </a:p>
+        </p:txBody>
+      </p:sp>
+      <p:pic>
+        <p:nvPicPr>
+          <p:cNvPr id="20" name="Image 3" descr="/tmp/deck/icon-privacy-blue.png"/>
+          <p:cNvPicPr>
+            <a:picLocks noChangeAspect="1"/>
+          </p:cNvPicPr>
+          <p:nvPr/>
+        </p:nvPicPr>
+        <p:blipFill>
+          <a:blip r:embed="rId6"/>
+          <a:stretch>
+            <a:fillRect/>
+          </a:stretch>
+        </p:blipFill>
+        <p:spPr>
+          <a:xfrm>
             <a:off x="6543081" y="4028481"/>
             <a:ext cx="245791" cy="245791"/>
           </a:xfrm>
@@ -10040,7 +10227,7 @@
           <a:bodyPr wrap="square" lIns="0" tIns="0" rIns="0" bIns="0" rtlCol="0" anchor="ctr"/>
           <a:lstStyle/>
           <a:p>
-            <a:pPr indent="0" marL="0">
+            <a:pPr marL="0" indent="0">
               <a:buNone/>
             </a:pPr>
             <a:r>
@@ -10079,7 +10266,7 @@
           <a:bodyPr wrap="square" lIns="0" tIns="0" rIns="0" bIns="0" rtlCol="0" anchor="ctr"/>
           <a:lstStyle/>
           <a:p>
-            <a:pPr indent="0" marL="0">
+            <a:pPr marL="0" indent="0">
               <a:buNone/>
             </a:pPr>
             <a:r>
@@ -10118,7 +10305,7 @@
           <a:bodyPr wrap="square" lIns="0" tIns="0" rIns="0" bIns="0" rtlCol="0" anchor="ctr"/>
           <a:lstStyle/>
           <a:p>
-            <a:pPr indent="0" marL="0">
+            <a:pPr marL="0" indent="0">
               <a:buNone/>
             </a:pPr>
             <a:r>
@@ -10157,7 +10344,7 @@
           <a:bodyPr wrap="square" lIns="0" tIns="0" rIns="0" bIns="0" rtlCol="0" anchor="ctr"/>
           <a:lstStyle/>
           <a:p>
-            <a:pPr indent="0" marL="0">
+            <a:pPr marL="0" indent="0">
               <a:buNone/>
             </a:pPr>
             <a:r>
@@ -10196,7 +10383,7 @@
           <a:bodyPr wrap="square" lIns="0" tIns="0" rIns="0" bIns="0" rtlCol="0" anchor="ctr"/>
           <a:lstStyle/>
           <a:p>
-            <a:pPr algn="r" indent="0" marL="0">
+            <a:pPr marL="0" indent="0" algn="r">
               <a:buNone/>
             </a:pPr>
             <a:r>
@@ -10515,4 +10702,319 @@
     </a:ext>
   </a:extLst>
 </a:theme>
+</file>
+
+<file path=ppt/theme/theme2.xml><?xml version="1.0" encoding="utf-8"?>
+<a:theme xmlns:a="http://schemas.openxmlformats.org/drawingml/2006/main" name="Tema de Office">
+  <a:themeElements>
+    <a:clrScheme name="Office">
+      <a:dk1>
+        <a:sysClr val="windowText" lastClr="000000"/>
+      </a:dk1>
+      <a:lt1>
+        <a:sysClr val="window" lastClr="FFFFFF"/>
+      </a:lt1>
+      <a:dk2>
+        <a:srgbClr val="0E2841"/>
+      </a:dk2>
+      <a:lt2>
+        <a:srgbClr val="E8E8E8"/>
+      </a:lt2>
+      <a:accent1>
+        <a:srgbClr val="156082"/>
+      </a:accent1>
+      <a:accent2>
+        <a:srgbClr val="E97132"/>
+      </a:accent2>
+      <a:accent3>
+        <a:srgbClr val="196B24"/>
+      </a:accent3>
+      <a:accent4>
+        <a:srgbClr val="0F9ED5"/>
+      </a:accent4>
+      <a:accent5>
+        <a:srgbClr val="A02B93"/>
+      </a:accent5>
+      <a:accent6>
+        <a:srgbClr val="4EA72E"/>
+      </a:accent6>
+      <a:hlink>
+        <a:srgbClr val="467886"/>
+      </a:hlink>
+      <a:folHlink>
+        <a:srgbClr val="96607D"/>
+      </a:folHlink>
+    </a:clrScheme>
+    <a:fontScheme name="Office">
+      <a:majorFont>
+        <a:latin typeface="Aptos Display" panose="02110004020202020204"/>
+        <a:ea typeface=""/>
+        <a:cs typeface=""/>
+        <a:font script="Jpan" typeface="游ゴシック Light"/>
+        <a:font script="Hang" typeface="맑은 고딕"/>
+        <a:font script="Hans" typeface="等线 Light"/>
+        <a:font script="Hant" typeface="新細明體"/>
+        <a:font script="Arab" typeface="Times New Roman"/>
+        <a:font script="Hebr" typeface="Times New Roman"/>
+        <a:font script="Thai" typeface="Angsana New"/>
+        <a:font script="Ethi" typeface="Nyala"/>
+        <a:font script="Beng" typeface="Vrinda"/>
+        <a:font script="Gujr" typeface="Shruti"/>
+        <a:font script="Khmr" typeface="MoolBoran"/>
+        <a:font script="Knda" typeface="Tunga"/>
+        <a:font script="Guru" typeface="Raavi"/>
+        <a:font script="Cans" typeface="Euphemia"/>
+        <a:font script="Cher" typeface="Plantagenet Cherokee"/>
+        <a:font script="Yiii" typeface="Microsoft Yi Baiti"/>
+        <a:font script="Tibt" typeface="Microsoft Himalaya"/>
+        <a:font script="Thaa" typeface="MV Boli"/>
+        <a:font script="Deva" typeface="Mangal"/>
+        <a:font script="Telu" typeface="Gautami"/>
+        <a:font script="Taml" typeface="Latha"/>
+        <a:font script="Syrc" typeface="Estrangelo Edessa"/>
+        <a:font script="Orya" typeface="Kalinga"/>
+        <a:font script="Mlym" typeface="Kartika"/>
+        <a:font script="Laoo" typeface="DokChampa"/>
+        <a:font script="Sinh" typeface="Iskoola Pota"/>
+        <a:font script="Mong" typeface="Mongolian Baiti"/>
+        <a:font script="Viet" typeface="Times New Roman"/>
+        <a:font script="Uigh" typeface="Microsoft Uighur"/>
+        <a:font script="Geor" typeface="Sylfaen"/>
+        <a:font script="Armn" typeface="Arial"/>
+        <a:font script="Bugi" typeface="Leelawadee UI"/>
+        <a:font script="Bopo" typeface="Microsoft JhengHei"/>
+        <a:font script="Java" typeface="Javanese Text"/>
+        <a:font script="Lisu" typeface="Segoe UI"/>
+        <a:font script="Mymr" typeface="Myanmar Text"/>
+        <a:font script="Nkoo" typeface="Ebrima"/>
+        <a:font script="Olck" typeface="Nirmala UI"/>
+        <a:font script="Osma" typeface="Ebrima"/>
+        <a:font script="Phag" typeface="Phagspa"/>
+        <a:font script="Syrn" typeface="Estrangelo Edessa"/>
+        <a:font script="Syrj" typeface="Estrangelo Edessa"/>
+        <a:font script="Syre" typeface="Estrangelo Edessa"/>
+        <a:font script="Sora" typeface="Nirmala UI"/>
+        <a:font script="Tale" typeface="Microsoft Tai Le"/>
+        <a:font script="Talu" typeface="Microsoft New Tai Lue"/>
+        <a:font script="Tfng" typeface="Ebrima"/>
+      </a:majorFont>
+      <a:minorFont>
+        <a:latin typeface="Aptos" panose="02110004020202020204"/>
+        <a:ea typeface=""/>
+        <a:cs typeface=""/>
+        <a:font script="Jpan" typeface="游ゴシック"/>
+        <a:font script="Hang" typeface="맑은 고딕"/>
+        <a:font script="Hans" typeface="等线"/>
+        <a:font script="Hant" typeface="新細明體"/>
+        <a:font script="Arab" typeface="Arial"/>
+        <a:font script="Hebr" typeface="Arial"/>
+        <a:font script="Thai" typeface="Cordia New"/>
+        <a:font script="Ethi" typeface="Nyala"/>
+        <a:font script="Beng" typeface="Vrinda"/>
+        <a:font script="Gujr" typeface="Shruti"/>
+        <a:font script="Khmr" typeface="DaunPenh"/>
+        <a:font script="Knda" typeface="Tunga"/>
+        <a:font script="Guru" typeface="Raavi"/>
+        <a:font script="Cans" typeface="Euphemia"/>
+        <a:font script="Cher" typeface="Plantagenet Cherokee"/>
+        <a:font script="Yiii" typeface="Microsoft Yi Baiti"/>
+        <a:font script="Tibt" typeface="Microsoft Himalaya"/>
+        <a:font script="Thaa" typeface="MV Boli"/>
+        <a:font script="Deva" typeface="Mangal"/>
+        <a:font script="Telu" typeface="Gautami"/>
+        <a:font script="Taml" typeface="Latha"/>
+        <a:font script="Syrc" typeface="Estrangelo Edessa"/>
+        <a:font script="Orya" typeface="Kalinga"/>
+        <a:font script="Mlym" typeface="Kartika"/>
+        <a:font script="Laoo" typeface="DokChampa"/>
+        <a:font script="Sinh" typeface="Iskoola Pota"/>
+        <a:font script="Mong" typeface="Mongolian Baiti"/>
+        <a:font script="Viet" typeface="Arial"/>
+        <a:font script="Uigh" typeface="Microsoft Uighur"/>
+        <a:font script="Geor" typeface="Sylfaen"/>
+        <a:font script="Armn" typeface="Arial"/>
+        <a:font script="Bugi" typeface="Leelawadee UI"/>
+        <a:font script="Bopo" typeface="Microsoft JhengHei"/>
+        <a:font script="Java" typeface="Javanese Text"/>
+        <a:font script="Lisu" typeface="Segoe UI"/>
+        <a:font script="Mymr" typeface="Myanmar Text"/>
+        <a:font script="Nkoo" typeface="Ebrima"/>
+        <a:font script="Olck" typeface="Nirmala UI"/>
+        <a:font script="Osma" typeface="Ebrima"/>
+        <a:font script="Phag" typeface="Phagspa"/>
+        <a:font script="Syrn" typeface="Estrangelo Edessa"/>
+        <a:font script="Syrj" typeface="Estrangelo Edessa"/>
+        <a:font script="Syre" typeface="Estrangelo Edessa"/>
+        <a:font script="Sora" typeface="Nirmala UI"/>
+        <a:font script="Tale" typeface="Microsoft Tai Le"/>
+        <a:font script="Talu" typeface="Microsoft New Tai Lue"/>
+        <a:font script="Tfng" typeface="Ebrima"/>
+      </a:minorFont>
+    </a:fontScheme>
+    <a:fmtScheme name="Office">
+      <a:fillStyleLst>
+        <a:solidFill>
+          <a:schemeClr val="phClr"/>
+        </a:solidFill>
+        <a:gradFill rotWithShape="1">
+          <a:gsLst>
+            <a:gs pos="0">
+              <a:schemeClr val="phClr">
+                <a:lumMod val="110000"/>
+                <a:satMod val="105000"/>
+                <a:tint val="67000"/>
+              </a:schemeClr>
+            </a:gs>
+            <a:gs pos="50000">
+              <a:schemeClr val="phClr">
+                <a:lumMod val="105000"/>
+                <a:satMod val="103000"/>
+                <a:tint val="73000"/>
+              </a:schemeClr>
+            </a:gs>
+            <a:gs pos="100000">
+              <a:schemeClr val="phClr">
+                <a:lumMod val="105000"/>
+                <a:satMod val="109000"/>
+                <a:tint val="81000"/>
+              </a:schemeClr>
+            </a:gs>
+          </a:gsLst>
+          <a:lin ang="5400000" scaled="0"/>
+        </a:gradFill>
+        <a:gradFill rotWithShape="1">
+          <a:gsLst>
+            <a:gs pos="0">
+              <a:schemeClr val="phClr">
+                <a:satMod val="103000"/>
+                <a:lumMod val="102000"/>
+                <a:tint val="94000"/>
+              </a:schemeClr>
+            </a:gs>
+            <a:gs pos="50000">
+              <a:schemeClr val="phClr">
+                <a:satMod val="110000"/>
+                <a:lumMod val="100000"/>
+                <a:shade val="100000"/>
+              </a:schemeClr>
+            </a:gs>
+            <a:gs pos="100000">
+              <a:schemeClr val="phClr">
+                <a:lumMod val="99000"/>
+                <a:satMod val="120000"/>
+                <a:shade val="78000"/>
+              </a:schemeClr>
+            </a:gs>
+          </a:gsLst>
+          <a:lin ang="5400000" scaled="0"/>
+        </a:gradFill>
+      </a:fillStyleLst>
+      <a:lnStyleLst>
+        <a:ln w="12700" cap="flat" cmpd="sng" algn="ctr">
+          <a:solidFill>
+            <a:schemeClr val="phClr"/>
+          </a:solidFill>
+          <a:prstDash val="solid"/>
+          <a:miter lim="800000"/>
+        </a:ln>
+        <a:ln w="19050" cap="flat" cmpd="sng" algn="ctr">
+          <a:solidFill>
+            <a:schemeClr val="phClr"/>
+          </a:solidFill>
+          <a:prstDash val="solid"/>
+          <a:miter lim="800000"/>
+        </a:ln>
+        <a:ln w="25400" cap="flat" cmpd="sng" algn="ctr">
+          <a:solidFill>
+            <a:schemeClr val="phClr"/>
+          </a:solidFill>
+          <a:prstDash val="solid"/>
+          <a:miter lim="800000"/>
+        </a:ln>
+      </a:lnStyleLst>
+      <a:effectStyleLst>
+        <a:effectStyle>
+          <a:effectLst/>
+        </a:effectStyle>
+        <a:effectStyle>
+          <a:effectLst/>
+        </a:effectStyle>
+        <a:effectStyle>
+          <a:effectLst>
+            <a:outerShdw blurRad="57150" dist="19050" dir="5400000" algn="ctr" rotWithShape="0">
+              <a:srgbClr val="000000">
+                <a:alpha val="63000"/>
+              </a:srgbClr>
+            </a:outerShdw>
+          </a:effectLst>
+        </a:effectStyle>
+      </a:effectStyleLst>
+      <a:bgFillStyleLst>
+        <a:solidFill>
+          <a:schemeClr val="phClr"/>
+        </a:solidFill>
+        <a:solidFill>
+          <a:schemeClr val="phClr">
+            <a:tint val="95000"/>
+            <a:satMod val="170000"/>
+          </a:schemeClr>
+        </a:solidFill>
+        <a:gradFill rotWithShape="1">
+          <a:gsLst>
+            <a:gs pos="0">
+              <a:schemeClr val="phClr">
+                <a:tint val="93000"/>
+                <a:satMod val="150000"/>
+                <a:shade val="98000"/>
+                <a:lumMod val="102000"/>
+              </a:schemeClr>
+            </a:gs>
+            <a:gs pos="50000">
+              <a:schemeClr val="phClr">
+                <a:tint val="98000"/>
+                <a:satMod val="130000"/>
+                <a:shade val="90000"/>
+                <a:lumMod val="103000"/>
+              </a:schemeClr>
+            </a:gs>
+            <a:gs pos="100000">
+              <a:schemeClr val="phClr">
+                <a:shade val="63000"/>
+                <a:satMod val="120000"/>
+              </a:schemeClr>
+            </a:gs>
+          </a:gsLst>
+          <a:lin ang="5400000" scaled="0"/>
+        </a:gradFill>
+      </a:bgFillStyleLst>
+    </a:fmtScheme>
+  </a:themeElements>
+  <a:objectDefaults>
+    <a:lnDef>
+      <a:spPr/>
+      <a:bodyPr/>
+      <a:lstStyle/>
+      <a:style>
+        <a:lnRef idx="2">
+          <a:schemeClr val="accent1"/>
+        </a:lnRef>
+        <a:fillRef idx="0">
+          <a:schemeClr val="accent1"/>
+        </a:fillRef>
+        <a:effectRef idx="1">
+          <a:schemeClr val="accent1"/>
+        </a:effectRef>
+        <a:fontRef idx="minor">
+          <a:schemeClr val="tx1"/>
+        </a:fontRef>
+      </a:style>
+    </a:lnDef>
+  </a:objectDefaults>
+  <a:extraClrSchemeLst/>
+  <a:extLst>
+    <a:ext uri="{05A4C25C-085E-4340-85A3-A5531E510DB2}">
+      <thm15:themeFamily xmlns:thm15="http://schemas.microsoft.com/office/thememl/2012/main" name="Office Theme" id="{2E142A2C-CD16-42D6-873A-C26D2A0506FA}" vid="{1BDDFF52-6CD6-40A5-AB3C-68EB2F1E4D0A}"/>
+    </a:ext>
+  </a:extLst>
+</a:theme>
 </file>